--- a/artifacts/speaking-portfolio-expanded/decks/adaptive-systems-15min-handout.pptx
+++ b/artifacts/speaking-portfolio-expanded/decks/adaptive-systems-15min-handout.pptx
@@ -2899,7 +2899,7 @@
                 <a:ea typeface="Arial"/>
                 <a:cs typeface="Arial"/>
               </a:rPr>
-              <a:t xml:space="preserve">Zoom out from the ingest job. The assistant with every customer's data and a toolbox that can send email, issue refunds, delete records and ship code is not a design we get to decline. It is arriving one integration at a time, and not only in our products. Browsers now ship a chat that drives the page. WebMCP lets an agent act on whatever site you have open. The next generation of CLIs will take natural language by default, and you will pass `--no-agent` to get the old behavior back. The intermediary intelligence layer is going to wrap everything, and I know who to blame: the kids. Actually, the kids hate AI. It will be their kids who demand an agent safety blanket on everything. I will be in a rocking chair explaining that the internet was better on vinyl.</a:t>
+              <a:t xml:space="preserve">Zoom out from the ingest job. The assistant with every customer's data and a toolbox that can send email, issue refunds, delete records and ship code is not a design we get to decline. It is arriving one integration at a time, and not only in our products. Browsers now ship a chat that drives the page. WebMCP lets an agent act on any site that opts in, and the list of sites that opt in only goes one direction. The next generation of CLIs will take natural language by default, and you will pass `--no-agent` to get the old behavior back. The intermediary intelligence layer is going to wrap everything, and I know who to blame: the kids. Actually, the kids hate AI. It will be their kids who demand an agent safety blanket on everything. I will be in a rocking chair explaining that the internet was better on vinyl.</a:t>
             </a:r>
             <a:endParaRPr lang="en-US" sz="1200"/>
           </a:p>
@@ -3426,7 +3426,7 @@
                 <a:ea typeface="Arial"/>
                 <a:cs typeface="Arial"/>
               </a:rPr>
-              <a:t xml:space="preserve">Zoom out from the ingest job. The assistant with every customer's data and a toolbox that can send email, issue refunds, delete records and ship code is not a design we get to decline. It is arriving one integration at a time, and not only in our products. Browsers now ship a chat that drives the page. WebMCP lets an agent act on whatever site you have open. The next generation of CLIs will take natural language by default, and you will pass `--no-agent` to get the old behavior back. The intermediary intelligence layer is going to wrap everything, and I know who to blame: the kids. Actually, the kids hate AI. It will be their kids who demand an agent safety blanket on everything. I will be in a rocking chair explaining that the internet was better on vinyl.</a:t>
+              <a:t xml:space="preserve">Zoom out from the ingest job. The assistant with every customer's data and a toolbox that can send email, issue refunds, delete records and ship code is not a design we get to decline. It is arriving one integration at a time, and not only in our products. Browsers now ship a chat that drives the page. WebMCP lets an agent act on any site that opts in, and the list of sites that opt in only goes one direction. The next generation of CLIs will take natural language by default, and you will pass `--no-agent` to get the old behavior back. The intermediary intelligence layer is going to wrap everything, and I know who to blame: the kids. Actually, the kids hate AI. It will be their kids who demand an agent safety blanket on everything. I will be in a rocking chair explaining that the internet was better on vinyl.</a:t>
             </a:r>
             <a:endParaRPr lang="en-US" sz="1200"/>
           </a:p>
@@ -4388,7 +4388,7 @@
                 <a:ea typeface="Arial"/>
                 <a:cs typeface="Arial"/>
               </a:rPr>
-              <a:t xml:space="preserve">Read customer data and post to a vendor never share one agent</a:t>
+              <a:t xml:space="preserve">Reads customer data? Then it never posts to a vendor.</a:t>
             </a:r>
             <a:endParaRPr lang="en-US" sz="1200"/>
           </a:p>
@@ -5007,7 +5007,7 @@
                 <a:ea typeface="Arial"/>
                 <a:cs typeface="Arial"/>
               </a:rPr>
-              <a:t xml:space="preserve">Read customer data and post to a vendor never share one agent</a:t>
+              <a:t xml:space="preserve">Reads customer data? Then it never posts to a vendor.</a:t>
             </a:r>
             <a:endParaRPr lang="en-US" sz="1200"/>
           </a:p>
@@ -6337,6 +6337,52 @@
                 <a:ea typeface="Arial"/>
                 <a:cs typeface="Arial"/>
               </a:rPr>
+              <a:t xml:space="preserve">Three events, three different right answers, none of them success or failure. If your dashboard only has two states, it is hiding the most interesting one.</a:t>
+            </a:r>
+            <a:endParaRPr lang="en-US" sz="1200"/>
+          </a:p>
+          <a:p>
+            <a:pPr marL="0" indent="0">
+              <a:lnSpc>
+                <a:spcPts val="1560"/>
+              </a:lnSpc>
+              <a:spcAft>
+                <a:spcPts val="0"/>
+              </a:spcAft>
+              <a:buNone/>
+            </a:pPr>
+            <a:r>
+              <a:rPr lang="en-US" sz="1200" b="0">
+                <a:solidFill>
+                  <a:srgbClr val="202b33"/>
+                </a:solidFill>
+                <a:latin typeface="Arial"/>
+                <a:ea typeface="Arial"/>
+                <a:cs typeface="Arial"/>
+              </a:rPr>
+              <a:t xml:space="preserve"/>
+            </a:r>
+            <a:endParaRPr lang="en-US" sz="1200"/>
+          </a:p>
+          <a:p>
+            <a:pPr marL="0" indent="0">
+              <a:lnSpc>
+                <a:spcPts val="1560"/>
+              </a:lnSpc>
+              <a:spcAft>
+                <a:spcPts val="0"/>
+              </a:spcAft>
+              <a:buNone/>
+            </a:pPr>
+            <a:r>
+              <a:rPr lang="en-US" sz="1200" b="0">
+                <a:solidFill>
+                  <a:srgbClr val="202b33"/>
+                </a:solidFill>
+                <a:latin typeface="Arial"/>
+                <a:ea typeface="Arial"/>
+                <a:cs typeface="Arial"/>
+              </a:rPr>
               <a:t xml:space="preserve"/>
             </a:r>
             <a:endParaRPr lang="en-US" sz="1200"/>
@@ -6429,7 +6475,7 @@
                 <a:ea typeface="Arial"/>
                 <a:cs typeface="Arial"/>
               </a:rPr>
-              <a:t xml:space="preserve">Bridge: the same orchestrator can ask for its own scale inside a per-customer budget; that is a companion talk.</a:t>
+              <a:t xml:space="preserve">Bridge: the same orchestrator can ask for its own scale inside a per-customer budget; that is slide 11 in the long version, and the mechanics are a companion talk.</a:t>
             </a:r>
             <a:endParaRPr lang="en-US" sz="1200"/>
           </a:p>
@@ -11209,30 +11255,7 @@
                 <a:ea typeface="Arial"/>
                 <a:cs typeface="Arial"/>
               </a:rPr>
-              <a:t xml:space="preserve">The assistant with everything is coming, one</a:t>
-            </a:r>
-            <a:endParaRPr lang="en-US" sz="2550"/>
-          </a:p>
-          <a:p>
-            <a:pPr marL="0" indent="0">
-              <a:lnSpc>
-                <a:spcPts val="3060"/>
-              </a:lnSpc>
-              <a:spcAft>
-                <a:spcPts val="0"/>
-              </a:spcAft>
-              <a:buNone/>
-            </a:pPr>
-            <a:r>
-              <a:rPr lang="en-US" sz="2550" b="1">
-                <a:solidFill>
-                  <a:srgbClr val="202B33"/>
-                </a:solidFill>
-                <a:latin typeface="Arial"/>
-                <a:ea typeface="Arial"/>
-                <a:cs typeface="Arial"/>
-              </a:rPr>
-              <a:t xml:space="preserve">integration at a time</a:t>
+              <a:t xml:space="preserve">Sorry, You're Building It</a:t>
             </a:r>
             <a:endParaRPr lang="en-US" sz="2550"/>
           </a:p>
@@ -11684,7 +11707,7 @@
                 <a:ea typeface="Arial"/>
                 <a:cs typeface="Arial"/>
               </a:rPr>
-              <a:t xml:space="preserve">lets an agent act on whatever site you have open. The</a:t>
+              <a:t xml:space="preserve">lets an agent act on any site that opts in, and the</a:t>
             </a:r>
             <a:endParaRPr lang="en-US" sz="1200"/>
           </a:p>
@@ -11707,7 +11730,7 @@
                 <a:ea typeface="Arial"/>
                 <a:cs typeface="Arial"/>
               </a:rPr>
-              <a:t xml:space="preserve">next generation of CLIs will take natural language by</a:t>
+              <a:t xml:space="preserve">list of sites that opt in only goes one direction.</a:t>
             </a:r>
             <a:endParaRPr lang="en-US" sz="1200"/>
           </a:p>
@@ -11730,7 +11753,7 @@
                 <a:ea typeface="Arial"/>
                 <a:cs typeface="Arial"/>
               </a:rPr>
-              <a:t xml:space="preserve">default, and you will pass --no-agent to get the old</a:t>
+              <a:t xml:space="preserve">The next generation of CLIs will take natural</a:t>
             </a:r>
             <a:endParaRPr lang="en-US" sz="1200"/>
           </a:p>
@@ -11753,7 +11776,7 @@
                 <a:ea typeface="Arial"/>
                 <a:cs typeface="Arial"/>
               </a:rPr>
-              <a:t xml:space="preserve">behavior back. The intermediary intelligence layer is</a:t>
+              <a:t xml:space="preserve">language by default, and you will pass --no-agent to</a:t>
             </a:r>
             <a:endParaRPr lang="en-US" sz="1200"/>
           </a:p>
@@ -11776,7 +11799,7 @@
                 <a:ea typeface="Arial"/>
                 <a:cs typeface="Arial"/>
               </a:rPr>
-              <a:t xml:space="preserve">going to wrap everything, and I know who to blame:</a:t>
+              <a:t xml:space="preserve">get the old behavior back. The intermediary</a:t>
             </a:r>
             <a:endParaRPr lang="en-US" sz="1200"/>
           </a:p>
@@ -11799,7 +11822,7 @@
                 <a:ea typeface="Arial"/>
                 <a:cs typeface="Arial"/>
               </a:rPr>
-              <a:t xml:space="preserve">the kids. Actually, the kids hate AI. It will be</a:t>
+              <a:t xml:space="preserve">intelligence layer is going to wrap everything, and I</a:t>
             </a:r>
             <a:endParaRPr lang="en-US" sz="1200"/>
           </a:p>
@@ -11822,7 +11845,7 @@
                 <a:ea typeface="Arial"/>
                 <a:cs typeface="Arial"/>
               </a:rPr>
-              <a:t xml:space="preserve">their kids who demand an agent safety blanket on</a:t>
+              <a:t xml:space="preserve">know who to blame: the kids. Actually, the kids hate</a:t>
             </a:r>
             <a:endParaRPr lang="en-US" sz="1200"/>
           </a:p>
@@ -11845,7 +11868,7 @@
                 <a:ea typeface="Arial"/>
                 <a:cs typeface="Arial"/>
               </a:rPr>
-              <a:t xml:space="preserve">everything. I will be in a rocking chair explaining</a:t>
+              <a:t xml:space="preserve">AI. It will be their kids who demand an agent safety</a:t>
             </a:r>
             <a:endParaRPr lang="en-US" sz="1200"/>
           </a:p>
@@ -11868,7 +11891,30 @@
                 <a:ea typeface="Arial"/>
                 <a:cs typeface="Arial"/>
               </a:rPr>
-              <a:t xml:space="preserve">that the internet was better on vinyl.</a:t>
+              <a:t xml:space="preserve">blanket on everything. I will be in a rocking chair</a:t>
+            </a:r>
+            <a:endParaRPr lang="en-US" sz="1200"/>
+          </a:p>
+          <a:p>
+            <a:pPr marL="0" indent="0">
+              <a:lnSpc>
+                <a:spcPts val="1575"/>
+              </a:lnSpc>
+              <a:spcAft>
+                <a:spcPts val="0"/>
+              </a:spcAft>
+              <a:buNone/>
+            </a:pPr>
+            <a:r>
+              <a:rPr lang="en-US" sz="1200" b="0">
+                <a:solidFill>
+                  <a:srgbClr val="202B33"/>
+                </a:solidFill>
+                <a:latin typeface="Arial"/>
+                <a:ea typeface="Arial"/>
+                <a:cs typeface="Arial"/>
+              </a:rPr>
+              <a:t xml:space="preserve">explaining that the internet was better on vinyl.</a:t>
             </a:r>
             <a:endParaRPr lang="en-US" sz="1200"/>
           </a:p>
@@ -12097,30 +12143,7 @@
                 <a:ea typeface="Arial"/>
                 <a:cs typeface="Arial"/>
               </a:rPr>
-              <a:t xml:space="preserve">The assistant with everything is coming, one</a:t>
-            </a:r>
-            <a:endParaRPr lang="en-US" sz="2550"/>
-          </a:p>
-          <a:p>
-            <a:pPr marL="0" indent="0">
-              <a:lnSpc>
-                <a:spcPts val="3060"/>
-              </a:lnSpc>
-              <a:spcAft>
-                <a:spcPts val="0"/>
-              </a:spcAft>
-              <a:buNone/>
-            </a:pPr>
-            <a:r>
-              <a:rPr lang="en-US" sz="2550" b="1">
-                <a:solidFill>
-                  <a:srgbClr val="202B33"/>
-                </a:solidFill>
-                <a:latin typeface="Arial"/>
-                <a:ea typeface="Arial"/>
-                <a:cs typeface="Arial"/>
-              </a:rPr>
-              <a:t xml:space="preserve">integration at a time (continued)</a:t>
+              <a:t xml:space="preserve">Sorry, You're Building It (continued)</a:t>
             </a:r>
             <a:endParaRPr lang="en-US" sz="2550"/>
           </a:p>
@@ -14060,7 +14083,7 @@
                 <a:ea typeface="Arial"/>
                 <a:cs typeface="Arial"/>
               </a:rPr>
-              <a:t xml:space="preserve">Read customer data and post to a vendor never share</a:t>
+              <a:t xml:space="preserve">Reads customer data? Then it never posts to a vendor.</a:t>
             </a:r>
             <a:endParaRPr lang="en-US" sz="1200"/>
           </a:p>
@@ -14083,7 +14106,7 @@
                 <a:ea typeface="Arial"/>
                 <a:cs typeface="Arial"/>
               </a:rPr>
-              <a:t xml:space="preserve">one agent</a:t>
+              <a:t xml:space="preserve"/>
             </a:r>
             <a:endParaRPr lang="en-US" sz="1200"/>
           </a:p>
@@ -14106,7 +14129,7 @@
                 <a:ea typeface="Arial"/>
                 <a:cs typeface="Arial"/>
               </a:rPr>
-              <a:t xml:space="preserve"/>
+              <a:t xml:space="preserve">A signed URL is a credential</a:t>
             </a:r>
             <a:endParaRPr lang="en-US" sz="1200"/>
           </a:p>
@@ -14129,7 +14152,7 @@
                 <a:ea typeface="Arial"/>
                 <a:cs typeface="Arial"/>
               </a:rPr>
-              <a:t xml:space="preserve">A signed URL is a credential</a:t>
+              <a:t xml:space="preserve"/>
             </a:r>
             <a:endParaRPr lang="en-US" sz="1200"/>
           </a:p>
@@ -14152,7 +14175,7 @@
                 <a:ea typeface="Arial"/>
                 <a:cs typeface="Arial"/>
               </a:rPr>
-              <a:t xml:space="preserve"/>
+              <a:t xml:space="preserve">Two guards do most of the work. First, tools come in</a:t>
             </a:r>
             <a:endParaRPr lang="en-US" sz="1200"/>
           </a:p>
@@ -14175,7 +14198,7 @@
                 <a:ea typeface="Arial"/>
                 <a:cs typeface="Arial"/>
               </a:rPr>
-              <a:t xml:space="preserve">Two guards do most of the work. First, tools come in</a:t>
+              <a:t xml:space="preserve">risk classes. Read is cheap to grant. Write, send,</a:t>
             </a:r>
             <a:endParaRPr lang="en-US" sz="1200"/>
           </a:p>
@@ -14198,7 +14221,7 @@
                 <a:ea typeface="Arial"/>
                 <a:cs typeface="Arial"/>
               </a:rPr>
-              <a:t xml:space="preserve">risk classes. Read is cheap to grant. Write, send,</a:t>
+              <a:t xml:space="preserve">pay, delete, deploy and export each need their own</a:t>
             </a:r>
             <a:endParaRPr lang="en-US" sz="1200"/>
           </a:p>
@@ -14221,7 +14244,7 @@
                 <a:ea typeface="Arial"/>
                 <a:cs typeface="Arial"/>
               </a:rPr>
-              <a:t xml:space="preserve">pay, delete, deploy and export each need their own</a:t>
+              <a:t xml:space="preserve">approval path, and a generated agent gets at most one</a:t>
             </a:r>
             <a:endParaRPr lang="en-US" sz="1200"/>
           </a:p>
@@ -14251,29 +14274,6 @@
             <a:noAutofit/>
           </a:bodyPr>
           <a:lstStyle/>
-          <a:p>
-            <a:pPr marL="0" indent="0">
-              <a:lnSpc>
-                <a:spcPts val="1575"/>
-              </a:lnSpc>
-              <a:spcAft>
-                <a:spcPts val="0"/>
-              </a:spcAft>
-              <a:buNone/>
-            </a:pPr>
-            <a:r>
-              <a:rPr lang="en-US" sz="1200" b="0">
-                <a:solidFill>
-                  <a:srgbClr val="202B33"/>
-                </a:solidFill>
-                <a:latin typeface="Arial"/>
-                <a:ea typeface="Arial"/>
-                <a:cs typeface="Arial"/>
-              </a:rPr>
-              <a:t xml:space="preserve">approval path, and a generated agent gets at most one</a:t>
-            </a:r>
-            <a:endParaRPr lang="en-US" sz="1200"/>
-          </a:p>
           <a:p>
             <a:pPr marL="0" indent="0">
               <a:lnSpc>
@@ -16558,6 +16558,52 @@
             </a:r>
             <a:endParaRPr lang="en-US" sz="1200"/>
           </a:p>
+          <a:p>
+            <a:pPr marL="0" indent="0">
+              <a:lnSpc>
+                <a:spcPts val="1575"/>
+              </a:lnSpc>
+              <a:spcAft>
+                <a:spcPts val="0"/>
+              </a:spcAft>
+              <a:buNone/>
+            </a:pPr>
+            <a:r>
+              <a:rPr lang="en-US" sz="1200" b="0">
+                <a:solidFill>
+                  <a:srgbClr val="202B33"/>
+                </a:solidFill>
+                <a:latin typeface="Arial"/>
+                <a:ea typeface="Arial"/>
+                <a:cs typeface="Arial"/>
+              </a:rPr>
+              <a:t xml:space="preserve">the job continues for matching records.</a:t>
+            </a:r>
+            <a:endParaRPr lang="en-US" sz="1200"/>
+          </a:p>
+          <a:p>
+            <a:pPr marL="0" indent="0">
+              <a:lnSpc>
+                <a:spcPts val="1575"/>
+              </a:lnSpc>
+              <a:spcAft>
+                <a:spcPts val="0"/>
+              </a:spcAft>
+              <a:buNone/>
+            </a:pPr>
+            <a:r>
+              <a:rPr lang="en-US" sz="1200" b="0">
+                <a:solidFill>
+                  <a:srgbClr val="202B33"/>
+                </a:solidFill>
+                <a:latin typeface="Arial"/>
+                <a:ea typeface="Arial"/>
+                <a:cs typeface="Arial"/>
+              </a:rPr>
+              <a:t xml:space="preserve"/>
+            </a:r>
+            <a:endParaRPr lang="en-US" sz="1200"/>
+          </a:p>
         </p:txBody>
       </p:sp>
       <p:sp>
@@ -16603,7 +16649,7 @@
                 <a:ea typeface="Arial"/>
                 <a:cs typeface="Arial"/>
               </a:rPr>
-              <a:t xml:space="preserve">the job continues for matching records.</a:t>
+              <a:t xml:space="preserve">The status change has no semantic evidence. The job</a:t>
             </a:r>
             <a:endParaRPr lang="en-US" sz="1200"/>
           </a:p>
@@ -16626,7 +16672,7 @@
                 <a:ea typeface="Arial"/>
                 <a:cs typeface="Arial"/>
               </a:rPr>
-              <a:t xml:space="preserve"/>
+              <a:t xml:space="preserve">isolates affected records, reports what is</a:t>
             </a:r>
             <a:endParaRPr lang="en-US" sz="1200"/>
           </a:p>
@@ -16649,7 +16695,7 @@
                 <a:ea typeface="Arial"/>
                 <a:cs typeface="Arial"/>
               </a:rPr>
-              <a:t xml:space="preserve">The status change has no semantic evidence. The job</a:t>
+              <a:t xml:space="preserve">incomplete, and hands an owner the samples and the</a:t>
             </a:r>
             <a:endParaRPr lang="en-US" sz="1200"/>
           </a:p>
@@ -16672,7 +16718,7 @@
                 <a:ea typeface="Arial"/>
                 <a:cs typeface="Arial"/>
               </a:rPr>
-              <a:t xml:space="preserve">isolates affected records, reports what is</a:t>
+              <a:t xml:space="preserve">exact question.</a:t>
             </a:r>
             <a:endParaRPr lang="en-US" sz="1200"/>
           </a:p>
@@ -16695,7 +16741,7 @@
                 <a:ea typeface="Arial"/>
                 <a:cs typeface="Arial"/>
               </a:rPr>
-              <a:t xml:space="preserve">incomplete, and hands an owner the samples and the</a:t>
+              <a:t xml:space="preserve"/>
             </a:r>
             <a:endParaRPr lang="en-US" sz="1200"/>
           </a:p>
@@ -16718,7 +16764,7 @@
                 <a:ea typeface="Arial"/>
                 <a:cs typeface="Arial"/>
               </a:rPr>
-              <a:t xml:space="preserve">exact question.</a:t>
+              <a:t xml:space="preserve">The provider timeout has an uncertain outcome. The</a:t>
             </a:r>
             <a:endParaRPr lang="en-US" sz="1200"/>
           </a:p>
@@ -16741,7 +16787,7 @@
                 <a:ea typeface="Arial"/>
                 <a:cs typeface="Arial"/>
               </a:rPr>
-              <a:t xml:space="preserve"/>
+              <a:t xml:space="preserve">controller queries the saved job ID instead of</a:t>
             </a:r>
             <a:endParaRPr lang="en-US" sz="1200"/>
           </a:p>
@@ -16764,7 +16810,7 @@
                 <a:ea typeface="Arial"/>
                 <a:cs typeface="Arial"/>
               </a:rPr>
-              <a:t xml:space="preserve">The provider timeout has an uncertain outcome. The</a:t>
+              <a:t xml:space="preserve">submitting again, and where it cannot, it holds the</a:t>
             </a:r>
             <a:endParaRPr lang="en-US" sz="1200"/>
           </a:p>
@@ -16787,7 +16833,7 @@
                 <a:ea typeface="Arial"/>
                 <a:cs typeface="Arial"/>
               </a:rPr>
-              <a:t xml:space="preserve">controller queries the saved job ID instead of</a:t>
+              <a:t xml:space="preserve">unresolved operation and its reservation.</a:t>
             </a:r>
             <a:endParaRPr lang="en-US" sz="1200"/>
           </a:p>
@@ -16810,7 +16856,7 @@
                 <a:ea typeface="Arial"/>
                 <a:cs typeface="Arial"/>
               </a:rPr>
-              <a:t xml:space="preserve">submitting again, and where it cannot, it holds the</a:t>
+              <a:t xml:space="preserve"/>
             </a:r>
             <a:endParaRPr lang="en-US" sz="1200"/>
           </a:p>
@@ -16833,7 +16879,53 @@
                 <a:ea typeface="Arial"/>
                 <a:cs typeface="Arial"/>
               </a:rPr>
-              <a:t xml:space="preserve">unresolved operation and its reservation.</a:t>
+              <a:t xml:space="preserve">Three events, three different right answers, none of</a:t>
+            </a:r>
+            <a:endParaRPr lang="en-US" sz="1200"/>
+          </a:p>
+          <a:p>
+            <a:pPr marL="0" indent="0">
+              <a:lnSpc>
+                <a:spcPts val="1575"/>
+              </a:lnSpc>
+              <a:spcAft>
+                <a:spcPts val="0"/>
+              </a:spcAft>
+              <a:buNone/>
+            </a:pPr>
+            <a:r>
+              <a:rPr lang="en-US" sz="1200" b="0">
+                <a:solidFill>
+                  <a:srgbClr val="202B33"/>
+                </a:solidFill>
+                <a:latin typeface="Arial"/>
+                <a:ea typeface="Arial"/>
+                <a:cs typeface="Arial"/>
+              </a:rPr>
+              <a:t xml:space="preserve">them success or failure. If your dashboard only has</a:t>
+            </a:r>
+            <a:endParaRPr lang="en-US" sz="1200"/>
+          </a:p>
+          <a:p>
+            <a:pPr marL="0" indent="0">
+              <a:lnSpc>
+                <a:spcPts val="1575"/>
+              </a:lnSpc>
+              <a:spcAft>
+                <a:spcPts val="0"/>
+              </a:spcAft>
+              <a:buNone/>
+            </a:pPr>
+            <a:r>
+              <a:rPr lang="en-US" sz="1200" b="0">
+                <a:solidFill>
+                  <a:srgbClr val="202B33"/>
+                </a:solidFill>
+                <a:latin typeface="Arial"/>
+                <a:ea typeface="Arial"/>
+                <a:cs typeface="Arial"/>
+              </a:rPr>
+              <a:t xml:space="preserve">two states, it is hiding the most interesting one.</a:t>
             </a:r>
             <a:endParaRPr lang="en-US" sz="1200"/>
           </a:p>

--- a/artifacts/speaking-portfolio-expanded/decks/adaptive-systems-15min-handout.pptx
+++ b/artifacts/speaking-portfolio-expanded/decks/adaptive-systems-15min-handout.pptx
@@ -18,9 +18,6 @@
     <p:sldId id="263" r:id="rIdSlide8"/>
     <p:sldId id="264" r:id="rIdSlide9"/>
     <p:sldId id="265" r:id="rIdSlide10"/>
-    <p:sldId id="266" r:id="rIdSlide11"/>
-    <p:sldId id="267" r:id="rIdSlide12"/>
-    <p:sldId id="268" r:id="rIdSlide13"/>
   </p:sldIdLst>
   <p:sldSz cx="10058400" cy="7772400" type="custom"/>
   <p:notesSz cx="6858000" cy="9144000"/>
@@ -310,1771 +307,6 @@
                 <a:ea typeface="Arial"/>
                 <a:cs typeface="Arial"/>
               </a:rPr>
-              <a:t xml:space="preserve">Adaptive, agentic apps</a:t>
-            </a:r>
-            <a:endParaRPr lang="en-US" sz="1200"/>
-          </a:p>
-          <a:p>
-            <a:pPr marL="0" indent="0">
-              <a:lnSpc>
-                <a:spcPts val="1560"/>
-              </a:lnSpc>
-              <a:spcAft>
-                <a:spcPts val="0"/>
-              </a:spcAft>
-              <a:buNone/>
-            </a:pPr>
-            <a:r>
-              <a:rPr lang="en-US" sz="1200" b="0">
-                <a:solidFill>
-                  <a:srgbClr val="202b33"/>
-                </a:solidFill>
-                <a:latin typeface="Arial"/>
-                <a:ea typeface="Arial"/>
-                <a:cs typeface="Arial"/>
-              </a:rPr>
-              <a:t xml:space="preserve"/>
-            </a:r>
-            <a:endParaRPr lang="en-US" sz="1200"/>
-          </a:p>
-          <a:p>
-            <a:pPr marL="0" indent="0">
-              <a:lnSpc>
-                <a:spcPts val="1560"/>
-              </a:lnSpc>
-              <a:spcAft>
-                <a:spcPts val="0"/>
-              </a:spcAft>
-              <a:buNone/>
-            </a:pPr>
-            <a:r>
-              <a:rPr lang="en-US" sz="1200" b="0">
-                <a:solidFill>
-                  <a:srgbClr val="202b33"/>
-                </a:solidFill>
-                <a:latin typeface="Arial"/>
-                <a:ea typeface="Arial"/>
-                <a:cs typeface="Arial"/>
-              </a:rPr>
-              <a:t xml:space="preserve">Source slide 14. 11:30 to 14:00</a:t>
-            </a:r>
-            <a:endParaRPr lang="en-US" sz="1200"/>
-          </a:p>
-          <a:p>
-            <a:pPr marL="0" indent="0">
-              <a:lnSpc>
-                <a:spcPts val="1560"/>
-              </a:lnSpc>
-              <a:spcAft>
-                <a:spcPts val="0"/>
-              </a:spcAft>
-              <a:buNone/>
-            </a:pPr>
-            <a:r>
-              <a:rPr lang="en-US" sz="1200" b="0">
-                <a:solidFill>
-                  <a:srgbClr val="202b33"/>
-                </a:solidFill>
-                <a:latin typeface="Arial"/>
-                <a:ea typeface="Arial"/>
-                <a:cs typeface="Arial"/>
-              </a:rPr>
-              <a:t xml:space="preserve"/>
-            </a:r>
-            <a:endParaRPr lang="en-US" sz="1200"/>
-          </a:p>
-          <a:p>
-            <a:pPr marL="0" indent="0">
-              <a:lnSpc>
-                <a:spcPts val="1560"/>
-              </a:lnSpc>
-              <a:spcAft>
-                <a:spcPts val="0"/>
-              </a:spcAft>
-              <a:buNone/>
-            </a:pPr>
-            <a:r>
-              <a:rPr lang="en-US" sz="1200" b="0">
-                <a:solidFill>
-                  <a:srgbClr val="202b33"/>
-                </a:solidFill>
-                <a:latin typeface="Arial"/>
-                <a:ea typeface="Arial"/>
-                <a:cs typeface="Arial"/>
-              </a:rPr>
-              <a:t xml:space="preserve">Before returning: check relevant memory and correct known mistakes</a:t>
-            </a:r>
-            <a:endParaRPr lang="en-US" sz="1200"/>
-          </a:p>
-          <a:p>
-            <a:pPr marL="0" indent="0">
-              <a:lnSpc>
-                <a:spcPts val="1560"/>
-              </a:lnSpc>
-              <a:spcAft>
-                <a:spcPts val="0"/>
-              </a:spcAft>
-              <a:buNone/>
-            </a:pPr>
-            <a:r>
-              <a:rPr lang="en-US" sz="1200" b="0">
-                <a:solidFill>
-                  <a:srgbClr val="202b33"/>
-                </a:solidFill>
-                <a:latin typeface="Arial"/>
-                <a:ea typeface="Arial"/>
-                <a:cs typeface="Arial"/>
-              </a:rPr>
-              <a:t xml:space="preserve"/>
-            </a:r>
-            <a:endParaRPr lang="en-US" sz="1200"/>
-          </a:p>
-          <a:p>
-            <a:pPr marL="0" indent="0">
-              <a:lnSpc>
-                <a:spcPts val="1560"/>
-              </a:lnSpc>
-              <a:spcAft>
-                <a:spcPts val="0"/>
-              </a:spcAft>
-              <a:buNone/>
-            </a:pPr>
-            <a:r>
-              <a:rPr lang="en-US" sz="1200" b="0">
-                <a:solidFill>
-                  <a:srgbClr val="202b33"/>
-                </a:solidFill>
-                <a:latin typeface="Arial"/>
-                <a:ea typeface="Arial"/>
-                <a:cs typeface="Arial"/>
-              </a:rPr>
-              <a:t xml:space="preserve">After execution: record checks, outcome, correction and frequency</a:t>
-            </a:r>
-            <a:endParaRPr lang="en-US" sz="1200"/>
-          </a:p>
-          <a:p>
-            <a:pPr marL="0" indent="0">
-              <a:lnSpc>
-                <a:spcPts val="1560"/>
-              </a:lnSpc>
-              <a:spcAft>
-                <a:spcPts val="0"/>
-              </a:spcAft>
-              <a:buNone/>
-            </a:pPr>
-            <a:r>
-              <a:rPr lang="en-US" sz="1200" b="0">
-                <a:solidFill>
-                  <a:srgbClr val="202b33"/>
-                </a:solidFill>
-                <a:latin typeface="Arial"/>
-                <a:ea typeface="Arial"/>
-                <a:cs typeface="Arial"/>
-              </a:rPr>
-              <a:t xml:space="preserve"/>
-            </a:r>
-            <a:endParaRPr lang="en-US" sz="1200"/>
-          </a:p>
-          <a:p>
-            <a:pPr marL="0" indent="0">
-              <a:lnSpc>
-                <a:spcPts val="1560"/>
-              </a:lnSpc>
-              <a:spcAft>
-                <a:spcPts val="0"/>
-              </a:spcAft>
-              <a:buNone/>
-            </a:pPr>
-            <a:r>
-              <a:rPr lang="en-US" sz="1200" b="0">
-                <a:solidFill>
-                  <a:srgbClr val="202b33"/>
-                </a:solidFill>
-                <a:latin typeface="Arial"/>
-                <a:ea typeface="Arial"/>
-                <a:cs typeface="Arial"/>
-              </a:rPr>
-              <a:t xml:space="preserve">Generated, executed and verified are different states</a:t>
-            </a:r>
-            <a:endParaRPr lang="en-US" sz="1200"/>
-          </a:p>
-          <a:p>
-            <a:pPr marL="0" indent="0">
-              <a:lnSpc>
-                <a:spcPts val="1560"/>
-              </a:lnSpc>
-              <a:spcAft>
-                <a:spcPts val="0"/>
-              </a:spcAft>
-              <a:buNone/>
-            </a:pPr>
-            <a:r>
-              <a:rPr lang="en-US" sz="1200" b="0">
-                <a:solidFill>
-                  <a:srgbClr val="202b33"/>
-                </a:solidFill>
-                <a:latin typeface="Arial"/>
-                <a:ea typeface="Arial"/>
-                <a:cs typeface="Arial"/>
-              </a:rPr>
-              <a:t xml:space="preserve"/>
-            </a:r>
-            <a:endParaRPr lang="en-US" sz="1200"/>
-          </a:p>
-          <a:p>
-            <a:pPr marL="0" indent="0">
-              <a:lnSpc>
-                <a:spcPts val="1560"/>
-              </a:lnSpc>
-              <a:spcAft>
-                <a:spcPts val="0"/>
-              </a:spcAft>
-              <a:buNone/>
-            </a:pPr>
-            <a:r>
-              <a:rPr lang="en-US" sz="1200" b="0">
-                <a:solidFill>
-                  <a:srgbClr val="202b33"/>
-                </a:solidFill>
-                <a:latin typeface="Arial"/>
-                <a:ea typeface="Arial"/>
-                <a:cs typeface="Arial"/>
-              </a:rPr>
-              <a:t xml:space="preserve">Memory is evidence, never permission</a:t>
-            </a:r>
-            <a:endParaRPr lang="en-US" sz="1200"/>
-          </a:p>
-          <a:p>
-            <a:pPr marL="0" indent="0">
-              <a:lnSpc>
-                <a:spcPts val="1560"/>
-              </a:lnSpc>
-              <a:spcAft>
-                <a:spcPts val="0"/>
-              </a:spcAft>
-              <a:buNone/>
-            </a:pPr>
-            <a:r>
-              <a:rPr lang="en-US" sz="1200" b="0">
-                <a:solidFill>
-                  <a:srgbClr val="202b33"/>
-                </a:solidFill>
-                <a:latin typeface="Arial"/>
-                <a:ea typeface="Arial"/>
-                <a:cs typeface="Arial"/>
-              </a:rPr>
-              <a:t xml:space="preserve"/>
-            </a:r>
-            <a:endParaRPr lang="en-US" sz="1200"/>
-          </a:p>
-          <a:p>
-            <a:pPr marL="0" indent="0">
-              <a:lnSpc>
-                <a:spcPts val="1560"/>
-              </a:lnSpc>
-              <a:spcAft>
-                <a:spcPts val="0"/>
-              </a:spcAft>
-              <a:buNone/>
-            </a:pPr>
-            <a:r>
-              <a:rPr lang="en-US" sz="1200" b="0">
-                <a:solidFill>
-                  <a:srgbClr val="202b33"/>
-                </a:solidFill>
-                <a:latin typeface="Arial"/>
-                <a:ea typeface="Arial"/>
-                <a:cs typeface="Arial"/>
-              </a:rPr>
-              <a:t xml:space="preserve">You do not need the whole agent factory to start. Take one agent that writes SQL, builds reports, runs shell commands or generates scripted API actions. Give it working memory for this job: the goal, constraints, draft and unresolved checks. Give it observational memory across jobs: what it generated, what actually ran, what failed, and what the checks established. Now ask it to consult that history before it hands you the next answer.</a:t>
-            </a:r>
-            <a:endParaRPr lang="en-US" sz="1200"/>
-          </a:p>
-          <a:p>
-            <a:pPr marL="0" indent="0">
-              <a:lnSpc>
-                <a:spcPts val="1560"/>
-              </a:lnSpc>
-              <a:spcAft>
-                <a:spcPts val="0"/>
-              </a:spcAft>
-              <a:buNone/>
-            </a:pPr>
-            <a:r>
-              <a:rPr lang="en-US" sz="1200" b="0">
-                <a:solidFill>
-                  <a:srgbClr val="202b33"/>
-                </a:solidFill>
-                <a:latin typeface="Arial"/>
-                <a:ea typeface="Arial"/>
-                <a:cs typeface="Arial"/>
-              </a:rPr>
-              <a:t xml:space="preserve"/>
-            </a:r>
-            <a:endParaRPr lang="en-US" sz="1200"/>
-          </a:p>
-          <a:p>
-            <a:pPr marL="0" indent="0">
-              <a:lnSpc>
-                <a:spcPts val="1560"/>
-              </a:lnSpc>
-              <a:spcAft>
-                <a:spcPts val="0"/>
-              </a:spcAft>
-              <a:buNone/>
-            </a:pPr>
-            <a:r>
-              <a:rPr lang="en-US" sz="1200" b="0">
-                <a:solidFill>
-                  <a:srgbClr val="202b33"/>
-                </a:solidFill>
-                <a:latin typeface="Arial"/>
-                <a:ea typeface="Arial"/>
-                <a:cs typeface="Arial"/>
-              </a:rPr>
-              <a:t xml:space="preserve">Suppose a reporting query keeps forgetting the tenant filter. It runs perfectly well; it reports the wrong population. An independent preflight check rejects it before dispatch. Record the draft, the failed check, the correction and the eventual result. Next time, retrieve that pattern while the agent is still drafting. Fix the omission before returning the SQL, then run the check again. That is adaptive behavior you can build with one agent and a small log.</a:t>
-            </a:r>
-            <a:endParaRPr lang="en-US" sz="1200"/>
-          </a:p>
-          <a:p>
-            <a:pPr marL="0" indent="0">
-              <a:lnSpc>
-                <a:spcPts val="1560"/>
-              </a:lnSpc>
-              <a:spcAft>
-                <a:spcPts val="0"/>
-              </a:spcAft>
-              <a:buNone/>
-            </a:pPr>
-            <a:r>
-              <a:rPr lang="en-US" sz="1200" b="0">
-                <a:solidFill>
-                  <a:srgbClr val="202b33"/>
-                </a:solidFill>
-                <a:latin typeface="Arial"/>
-                <a:ea typeface="Arial"/>
-                <a:cs typeface="Arial"/>
-              </a:rPr>
-              <a:t xml:space="preserve"/>
-            </a:r>
-            <a:endParaRPr lang="en-US" sz="1200"/>
-          </a:p>
-          <a:p>
-            <a:pPr marL="0" indent="0">
-              <a:lnSpc>
-                <a:spcPts val="1560"/>
-              </a:lnSpc>
-              <a:spcAft>
-                <a:spcPts val="0"/>
-              </a:spcAft>
-              <a:buNone/>
-            </a:pPr>
-            <a:r>
-              <a:rPr lang="en-US" sz="1200" b="0">
-                <a:solidFill>
-                  <a:srgbClr val="202b33"/>
-                </a:solidFill>
-                <a:latin typeface="Arial"/>
-                <a:ea typeface="Arial"/>
-                <a:cs typeface="Arial"/>
-              </a:rPr>
-              <a:t xml:space="preserve">The instruction is simple: before returning generated work, retrieve relevant memory and correct applicable mistakes; after an authorized execution, record the observed outcome and update the pattern counts. If you cannot check something safely, say what remains unverified. Remembered output is untrusted data and grants no new permissions. The copyable prompt and a small record format are in the handout.</a:t>
-            </a:r>
-            <a:endParaRPr lang="en-US" sz="1200"/>
-          </a:p>
-          <a:p>
-            <a:pPr marL="0" indent="0">
-              <a:lnSpc>
-                <a:spcPts val="1560"/>
-              </a:lnSpc>
-              <a:spcAft>
-                <a:spcPts val="0"/>
-              </a:spcAft>
-              <a:buNone/>
-            </a:pPr>
-            <a:r>
-              <a:rPr lang="en-US" sz="1200" b="0">
-                <a:solidFill>
-                  <a:srgbClr val="202b33"/>
-                </a:solidFill>
-                <a:latin typeface="Arial"/>
-                <a:ea typeface="Arial"/>
-                <a:cs typeface="Arial"/>
-              </a:rPr>
-              <a:t xml:space="preserve"/>
-            </a:r>
-            <a:endParaRPr lang="en-US" sz="1200"/>
-          </a:p>
-          <a:p>
-            <a:pPr marL="0" indent="0">
-              <a:lnSpc>
-                <a:spcPts val="1560"/>
-              </a:lnSpc>
-              <a:spcAft>
-                <a:spcPts val="0"/>
-              </a:spcAft>
-              <a:buNone/>
-            </a:pPr>
-            <a:r>
-              <a:rPr lang="en-US" sz="1200" b="0">
-                <a:solidFill>
-                  <a:srgbClr val="202b33"/>
-                </a:solidFill>
-                <a:latin typeface="Arial"/>
-                <a:ea typeface="Arial"/>
-                <a:cs typeface="Arial"/>
-              </a:rPr>
-              <a:t xml:space="preserve">As patterns repeat, turn the reliable ones into tested templates and adapters. The runtime agent learns which evidence to consult; the offline improvement loop evaluates changes to the reusable procedure. Once the known case is covered by code, it need not spend another model call rediscovering the rule.</a:t>
-            </a:r>
-            <a:endParaRPr lang="en-US" sz="1200"/>
-          </a:p>
-          <a:p>
-            <a:pPr marL="0" indent="0">
-              <a:lnSpc>
-                <a:spcPts val="1560"/>
-              </a:lnSpc>
-              <a:spcAft>
-                <a:spcPts val="0"/>
-              </a:spcAft>
-              <a:buNone/>
-            </a:pPr>
-            <a:r>
-              <a:rPr lang="en-US" sz="1200" b="0">
-                <a:solidFill>
-                  <a:srgbClr val="202b33"/>
-                </a:solidFill>
-                <a:latin typeface="Arial"/>
-                <a:ea typeface="Arial"/>
-                <a:cs typeface="Arial"/>
-              </a:rPr>
-              <a:t xml:space="preserve"/>
-            </a:r>
-            <a:endParaRPr lang="en-US" sz="1200"/>
-          </a:p>
-          <a:p>
-            <a:pPr marL="0" indent="0">
-              <a:lnSpc>
-                <a:spcPts val="1560"/>
-              </a:lnSpc>
-              <a:spcAft>
-                <a:spcPts val="0"/>
-              </a:spcAft>
-              <a:buNone/>
-            </a:pPr>
-            <a:r>
-              <a:rPr lang="en-US" sz="1200" b="0">
-                <a:solidFill>
-                  <a:srgbClr val="202b33"/>
-                </a:solidFill>
-                <a:latin typeface="Arial"/>
-                <a:ea typeface="Arial"/>
-                <a:cs typeface="Arial"/>
-              </a:rPr>
-              <a:t xml:space="preserve"/>
-            </a:r>
-            <a:endParaRPr lang="en-US" sz="1200"/>
-          </a:p>
-          <a:p>
-            <a:pPr marL="0" indent="0">
-              <a:lnSpc>
-                <a:spcPts val="1560"/>
-              </a:lnSpc>
-              <a:spcAft>
-                <a:spcPts val="0"/>
-              </a:spcAft>
-              <a:buNone/>
-            </a:pPr>
-            <a:r>
-              <a:rPr lang="en-US" sz="1200" b="0">
-                <a:solidFill>
-                  <a:srgbClr val="202b33"/>
-                </a:solidFill>
-                <a:latin typeface="Arial"/>
-                <a:ea typeface="Arial"/>
-                <a:cs typeface="Arial"/>
-              </a:rPr>
-              <a:t xml:space="preserve"/>
-            </a:r>
-            <a:endParaRPr lang="en-US" sz="1200"/>
-          </a:p>
-          <a:p>
-            <a:pPr marL="0" indent="0">
-              <a:lnSpc>
-                <a:spcPts val="1560"/>
-              </a:lnSpc>
-              <a:spcAft>
-                <a:spcPts val="0"/>
-              </a:spcAft>
-              <a:buNone/>
-            </a:pPr>
-            <a:r>
-              <a:rPr lang="en-US" sz="1200" b="0">
-                <a:solidFill>
-                  <a:srgbClr val="202b33"/>
-                </a:solidFill>
-                <a:latin typeface="Arial"/>
-                <a:ea typeface="Arial"/>
-                <a:cs typeface="Arial"/>
-              </a:rPr>
-              <a:t xml:space="preserve">Show the prompt in memory-pattern.md. Ask which observation proves the query ran and which proves it answered the right question. Use the tenant-filter example; no live execution is needed.</a:t>
-            </a:r>
-            <a:endParaRPr lang="en-US" sz="1200"/>
-          </a:p>
-          <a:p>
-            <a:pPr marL="0" indent="0">
-              <a:lnSpc>
-                <a:spcPts val="1560"/>
-              </a:lnSpc>
-              <a:spcAft>
-                <a:spcPts val="0"/>
-              </a:spcAft>
-              <a:buNone/>
-            </a:pPr>
-            <a:r>
-              <a:rPr lang="en-US" sz="1200" b="0">
-                <a:solidFill>
-                  <a:srgbClr val="202b33"/>
-                </a:solidFill>
-                <a:latin typeface="Arial"/>
-                <a:ea typeface="Arial"/>
-                <a:cs typeface="Arial"/>
-              </a:rPr>
-              <a:t xml:space="preserve"/>
-            </a:r>
-            <a:endParaRPr lang="en-US" sz="1200"/>
-          </a:p>
-          <a:p>
-            <a:pPr marL="0" indent="0">
-              <a:lnSpc>
-                <a:spcPts val="1560"/>
-              </a:lnSpc>
-              <a:spcAft>
-                <a:spcPts val="0"/>
-              </a:spcAft>
-              <a:buNone/>
-            </a:pPr>
-            <a:r>
-              <a:rPr lang="en-US" sz="1200" b="0">
-                <a:solidFill>
-                  <a:srgbClr val="202b33"/>
-                </a:solidFill>
-                <a:latin typeface="Arial"/>
-                <a:ea typeface="Arial"/>
-                <a:cs typeface="Arial"/>
-              </a:rPr>
-              <a:t xml:space="preserve"/>
-            </a:r>
-            <a:endParaRPr lang="en-US" sz="1200"/>
-          </a:p>
-        </p:txBody>
-      </p:sp>
-    </p:spTree>
-  </p:cSld>
-  <p:clrMapOvr>
-    <a:masterClrMapping/>
-  </p:clrMapOvr>
-</p:notes>
-</file>
-
-<file path=ppt/notesSlides/notesSlide11.xml><?xml version="1.0" encoding="utf-8"?>
-<p:notes xmlns:a="http://schemas.openxmlformats.org/drawingml/2006/main" xmlns:r="http://schemas.openxmlformats.org/officeDocument/2006/relationships" xmlns:p="http://schemas.openxmlformats.org/presentationml/2006/main">
-  <p:cSld>
-    <p:spTree>
-      <p:nvGrpSpPr>
-        <p:cNvPr id="1" name=""/>
-        <p:cNvGrpSpPr/>
-        <p:nvPr/>
-      </p:nvGrpSpPr>
-      <p:grpSpPr>
-        <a:xfrm>
-          <a:off x="0" y="0"/>
-          <a:ext cx="0" cy="0"/>
-          <a:chOff x="0" y="0"/>
-          <a:chExt cx="0" cy="0"/>
-        </a:xfrm>
-      </p:grpSpPr>
-      <p:sp>
-        <p:nvSpPr>
-          <p:cNvPr id="2" name="Presenter notes"/>
-          <p:cNvSpPr txBox="1"/>
-          <p:nvPr>
-            <p:ph type="body" idx="1"/>
-          </p:nvPr>
-        </p:nvSpPr>
-        <p:spPr>
-          <a:xfrm>
-            <a:off x="457200" y="1428750"/>
-            <a:ext cx="5715000" cy="6667500"/>
-          </a:xfrm>
-        </p:spPr>
-        <p:txBody>
-          <a:bodyPr/>
-          <a:lstStyle/>
-          <a:p>
-            <a:pPr marL="0" indent="0">
-              <a:lnSpc>
-                <a:spcPts val="1560"/>
-              </a:lnSpc>
-              <a:spcAft>
-                <a:spcPts val="0"/>
-              </a:spcAft>
-              <a:buNone/>
-            </a:pPr>
-            <a:r>
-              <a:rPr lang="en-US" sz="1200" b="0">
-                <a:solidFill>
-                  <a:srgbClr val="202b33"/>
-                </a:solidFill>
-                <a:latin typeface="Arial"/>
-                <a:ea typeface="Arial"/>
-                <a:cs typeface="Arial"/>
-              </a:rPr>
-              <a:t xml:space="preserve">Adaptive, agentic apps</a:t>
-            </a:r>
-            <a:endParaRPr lang="en-US" sz="1200"/>
-          </a:p>
-          <a:p>
-            <a:pPr marL="0" indent="0">
-              <a:lnSpc>
-                <a:spcPts val="1560"/>
-              </a:lnSpc>
-              <a:spcAft>
-                <a:spcPts val="0"/>
-              </a:spcAft>
-              <a:buNone/>
-            </a:pPr>
-            <a:r>
-              <a:rPr lang="en-US" sz="1200" b="0">
-                <a:solidFill>
-                  <a:srgbClr val="202b33"/>
-                </a:solidFill>
-                <a:latin typeface="Arial"/>
-                <a:ea typeface="Arial"/>
-                <a:cs typeface="Arial"/>
-              </a:rPr>
-              <a:t xml:space="preserve"/>
-            </a:r>
-            <a:endParaRPr lang="en-US" sz="1200"/>
-          </a:p>
-          <a:p>
-            <a:pPr marL="0" indent="0">
-              <a:lnSpc>
-                <a:spcPts val="1560"/>
-              </a:lnSpc>
-              <a:spcAft>
-                <a:spcPts val="0"/>
-              </a:spcAft>
-              <a:buNone/>
-            </a:pPr>
-            <a:r>
-              <a:rPr lang="en-US" sz="1200" b="0">
-                <a:solidFill>
-                  <a:srgbClr val="202b33"/>
-                </a:solidFill>
-                <a:latin typeface="Arial"/>
-                <a:ea typeface="Arial"/>
-                <a:cs typeface="Arial"/>
-              </a:rPr>
-              <a:t xml:space="preserve">Source slide 14. 11:30 to 14:00</a:t>
-            </a:r>
-            <a:endParaRPr lang="en-US" sz="1200"/>
-          </a:p>
-          <a:p>
-            <a:pPr marL="0" indent="0">
-              <a:lnSpc>
-                <a:spcPts val="1560"/>
-              </a:lnSpc>
-              <a:spcAft>
-                <a:spcPts val="0"/>
-              </a:spcAft>
-              <a:buNone/>
-            </a:pPr>
-            <a:r>
-              <a:rPr lang="en-US" sz="1200" b="0">
-                <a:solidFill>
-                  <a:srgbClr val="202b33"/>
-                </a:solidFill>
-                <a:latin typeface="Arial"/>
-                <a:ea typeface="Arial"/>
-                <a:cs typeface="Arial"/>
-              </a:rPr>
-              <a:t xml:space="preserve"/>
-            </a:r>
-            <a:endParaRPr lang="en-US" sz="1200"/>
-          </a:p>
-          <a:p>
-            <a:pPr marL="0" indent="0">
-              <a:lnSpc>
-                <a:spcPts val="1560"/>
-              </a:lnSpc>
-              <a:spcAft>
-                <a:spcPts val="0"/>
-              </a:spcAft>
-              <a:buNone/>
-            </a:pPr>
-            <a:r>
-              <a:rPr lang="en-US" sz="1200" b="0">
-                <a:solidFill>
-                  <a:srgbClr val="202b33"/>
-                </a:solidFill>
-                <a:latin typeface="Arial"/>
-                <a:ea typeface="Arial"/>
-                <a:cs typeface="Arial"/>
-              </a:rPr>
-              <a:t xml:space="preserve">Before returning: check relevant memory and correct known mistakes</a:t>
-            </a:r>
-            <a:endParaRPr lang="en-US" sz="1200"/>
-          </a:p>
-          <a:p>
-            <a:pPr marL="0" indent="0">
-              <a:lnSpc>
-                <a:spcPts val="1560"/>
-              </a:lnSpc>
-              <a:spcAft>
-                <a:spcPts val="0"/>
-              </a:spcAft>
-              <a:buNone/>
-            </a:pPr>
-            <a:r>
-              <a:rPr lang="en-US" sz="1200" b="0">
-                <a:solidFill>
-                  <a:srgbClr val="202b33"/>
-                </a:solidFill>
-                <a:latin typeface="Arial"/>
-                <a:ea typeface="Arial"/>
-                <a:cs typeface="Arial"/>
-              </a:rPr>
-              <a:t xml:space="preserve"/>
-            </a:r>
-            <a:endParaRPr lang="en-US" sz="1200"/>
-          </a:p>
-          <a:p>
-            <a:pPr marL="0" indent="0">
-              <a:lnSpc>
-                <a:spcPts val="1560"/>
-              </a:lnSpc>
-              <a:spcAft>
-                <a:spcPts val="0"/>
-              </a:spcAft>
-              <a:buNone/>
-            </a:pPr>
-            <a:r>
-              <a:rPr lang="en-US" sz="1200" b="0">
-                <a:solidFill>
-                  <a:srgbClr val="202b33"/>
-                </a:solidFill>
-                <a:latin typeface="Arial"/>
-                <a:ea typeface="Arial"/>
-                <a:cs typeface="Arial"/>
-              </a:rPr>
-              <a:t xml:space="preserve">After execution: record checks, outcome, correction and frequency</a:t>
-            </a:r>
-            <a:endParaRPr lang="en-US" sz="1200"/>
-          </a:p>
-          <a:p>
-            <a:pPr marL="0" indent="0">
-              <a:lnSpc>
-                <a:spcPts val="1560"/>
-              </a:lnSpc>
-              <a:spcAft>
-                <a:spcPts val="0"/>
-              </a:spcAft>
-              <a:buNone/>
-            </a:pPr>
-            <a:r>
-              <a:rPr lang="en-US" sz="1200" b="0">
-                <a:solidFill>
-                  <a:srgbClr val="202b33"/>
-                </a:solidFill>
-                <a:latin typeface="Arial"/>
-                <a:ea typeface="Arial"/>
-                <a:cs typeface="Arial"/>
-              </a:rPr>
-              <a:t xml:space="preserve"/>
-            </a:r>
-            <a:endParaRPr lang="en-US" sz="1200"/>
-          </a:p>
-          <a:p>
-            <a:pPr marL="0" indent="0">
-              <a:lnSpc>
-                <a:spcPts val="1560"/>
-              </a:lnSpc>
-              <a:spcAft>
-                <a:spcPts val="0"/>
-              </a:spcAft>
-              <a:buNone/>
-            </a:pPr>
-            <a:r>
-              <a:rPr lang="en-US" sz="1200" b="0">
-                <a:solidFill>
-                  <a:srgbClr val="202b33"/>
-                </a:solidFill>
-                <a:latin typeface="Arial"/>
-                <a:ea typeface="Arial"/>
-                <a:cs typeface="Arial"/>
-              </a:rPr>
-              <a:t xml:space="preserve">Generated, executed and verified are different states</a:t>
-            </a:r>
-            <a:endParaRPr lang="en-US" sz="1200"/>
-          </a:p>
-          <a:p>
-            <a:pPr marL="0" indent="0">
-              <a:lnSpc>
-                <a:spcPts val="1560"/>
-              </a:lnSpc>
-              <a:spcAft>
-                <a:spcPts val="0"/>
-              </a:spcAft>
-              <a:buNone/>
-            </a:pPr>
-            <a:r>
-              <a:rPr lang="en-US" sz="1200" b="0">
-                <a:solidFill>
-                  <a:srgbClr val="202b33"/>
-                </a:solidFill>
-                <a:latin typeface="Arial"/>
-                <a:ea typeface="Arial"/>
-                <a:cs typeface="Arial"/>
-              </a:rPr>
-              <a:t xml:space="preserve"/>
-            </a:r>
-            <a:endParaRPr lang="en-US" sz="1200"/>
-          </a:p>
-          <a:p>
-            <a:pPr marL="0" indent="0">
-              <a:lnSpc>
-                <a:spcPts val="1560"/>
-              </a:lnSpc>
-              <a:spcAft>
-                <a:spcPts val="0"/>
-              </a:spcAft>
-              <a:buNone/>
-            </a:pPr>
-            <a:r>
-              <a:rPr lang="en-US" sz="1200" b="0">
-                <a:solidFill>
-                  <a:srgbClr val="202b33"/>
-                </a:solidFill>
-                <a:latin typeface="Arial"/>
-                <a:ea typeface="Arial"/>
-                <a:cs typeface="Arial"/>
-              </a:rPr>
-              <a:t xml:space="preserve">Memory is evidence, never permission</a:t>
-            </a:r>
-            <a:endParaRPr lang="en-US" sz="1200"/>
-          </a:p>
-          <a:p>
-            <a:pPr marL="0" indent="0">
-              <a:lnSpc>
-                <a:spcPts val="1560"/>
-              </a:lnSpc>
-              <a:spcAft>
-                <a:spcPts val="0"/>
-              </a:spcAft>
-              <a:buNone/>
-            </a:pPr>
-            <a:r>
-              <a:rPr lang="en-US" sz="1200" b="0">
-                <a:solidFill>
-                  <a:srgbClr val="202b33"/>
-                </a:solidFill>
-                <a:latin typeface="Arial"/>
-                <a:ea typeface="Arial"/>
-                <a:cs typeface="Arial"/>
-              </a:rPr>
-              <a:t xml:space="preserve"/>
-            </a:r>
-            <a:endParaRPr lang="en-US" sz="1200"/>
-          </a:p>
-          <a:p>
-            <a:pPr marL="0" indent="0">
-              <a:lnSpc>
-                <a:spcPts val="1560"/>
-              </a:lnSpc>
-              <a:spcAft>
-                <a:spcPts val="0"/>
-              </a:spcAft>
-              <a:buNone/>
-            </a:pPr>
-            <a:r>
-              <a:rPr lang="en-US" sz="1200" b="0">
-                <a:solidFill>
-                  <a:srgbClr val="202b33"/>
-                </a:solidFill>
-                <a:latin typeface="Arial"/>
-                <a:ea typeface="Arial"/>
-                <a:cs typeface="Arial"/>
-              </a:rPr>
-              <a:t xml:space="preserve">You do not need the whole agent factory to start. Take one agent that writes SQL, builds reports, runs shell commands or generates scripted API actions. Give it working memory for this job: the goal, constraints, draft and unresolved checks. Give it observational memory across jobs: what it generated, what actually ran, what failed, and what the checks established. Now ask it to consult that history before it hands you the next answer.</a:t>
-            </a:r>
-            <a:endParaRPr lang="en-US" sz="1200"/>
-          </a:p>
-          <a:p>
-            <a:pPr marL="0" indent="0">
-              <a:lnSpc>
-                <a:spcPts val="1560"/>
-              </a:lnSpc>
-              <a:spcAft>
-                <a:spcPts val="0"/>
-              </a:spcAft>
-              <a:buNone/>
-            </a:pPr>
-            <a:r>
-              <a:rPr lang="en-US" sz="1200" b="0">
-                <a:solidFill>
-                  <a:srgbClr val="202b33"/>
-                </a:solidFill>
-                <a:latin typeface="Arial"/>
-                <a:ea typeface="Arial"/>
-                <a:cs typeface="Arial"/>
-              </a:rPr>
-              <a:t xml:space="preserve"/>
-            </a:r>
-            <a:endParaRPr lang="en-US" sz="1200"/>
-          </a:p>
-          <a:p>
-            <a:pPr marL="0" indent="0">
-              <a:lnSpc>
-                <a:spcPts val="1560"/>
-              </a:lnSpc>
-              <a:spcAft>
-                <a:spcPts val="0"/>
-              </a:spcAft>
-              <a:buNone/>
-            </a:pPr>
-            <a:r>
-              <a:rPr lang="en-US" sz="1200" b="0">
-                <a:solidFill>
-                  <a:srgbClr val="202b33"/>
-                </a:solidFill>
-                <a:latin typeface="Arial"/>
-                <a:ea typeface="Arial"/>
-                <a:cs typeface="Arial"/>
-              </a:rPr>
-              <a:t xml:space="preserve">Suppose a reporting query keeps forgetting the tenant filter. It runs perfectly well; it reports the wrong population. An independent preflight check rejects it before dispatch. Record the draft, the failed check, the correction and the eventual result. Next time, retrieve that pattern while the agent is still drafting. Fix the omission before returning the SQL, then run the check again. That is adaptive behavior you can build with one agent and a small log.</a:t>
-            </a:r>
-            <a:endParaRPr lang="en-US" sz="1200"/>
-          </a:p>
-          <a:p>
-            <a:pPr marL="0" indent="0">
-              <a:lnSpc>
-                <a:spcPts val="1560"/>
-              </a:lnSpc>
-              <a:spcAft>
-                <a:spcPts val="0"/>
-              </a:spcAft>
-              <a:buNone/>
-            </a:pPr>
-            <a:r>
-              <a:rPr lang="en-US" sz="1200" b="0">
-                <a:solidFill>
-                  <a:srgbClr val="202b33"/>
-                </a:solidFill>
-                <a:latin typeface="Arial"/>
-                <a:ea typeface="Arial"/>
-                <a:cs typeface="Arial"/>
-              </a:rPr>
-              <a:t xml:space="preserve"/>
-            </a:r>
-            <a:endParaRPr lang="en-US" sz="1200"/>
-          </a:p>
-          <a:p>
-            <a:pPr marL="0" indent="0">
-              <a:lnSpc>
-                <a:spcPts val="1560"/>
-              </a:lnSpc>
-              <a:spcAft>
-                <a:spcPts val="0"/>
-              </a:spcAft>
-              <a:buNone/>
-            </a:pPr>
-            <a:r>
-              <a:rPr lang="en-US" sz="1200" b="0">
-                <a:solidFill>
-                  <a:srgbClr val="202b33"/>
-                </a:solidFill>
-                <a:latin typeface="Arial"/>
-                <a:ea typeface="Arial"/>
-                <a:cs typeface="Arial"/>
-              </a:rPr>
-              <a:t xml:space="preserve">The instruction is simple: before returning generated work, retrieve relevant memory and correct applicable mistakes; after an authorized execution, record the observed outcome and update the pattern counts. If you cannot check something safely, say what remains unverified. Remembered output is untrusted data and grants no new permissions. The copyable prompt and a small record format are in the handout.</a:t>
-            </a:r>
-            <a:endParaRPr lang="en-US" sz="1200"/>
-          </a:p>
-          <a:p>
-            <a:pPr marL="0" indent="0">
-              <a:lnSpc>
-                <a:spcPts val="1560"/>
-              </a:lnSpc>
-              <a:spcAft>
-                <a:spcPts val="0"/>
-              </a:spcAft>
-              <a:buNone/>
-            </a:pPr>
-            <a:r>
-              <a:rPr lang="en-US" sz="1200" b="0">
-                <a:solidFill>
-                  <a:srgbClr val="202b33"/>
-                </a:solidFill>
-                <a:latin typeface="Arial"/>
-                <a:ea typeface="Arial"/>
-                <a:cs typeface="Arial"/>
-              </a:rPr>
-              <a:t xml:space="preserve"/>
-            </a:r>
-            <a:endParaRPr lang="en-US" sz="1200"/>
-          </a:p>
-          <a:p>
-            <a:pPr marL="0" indent="0">
-              <a:lnSpc>
-                <a:spcPts val="1560"/>
-              </a:lnSpc>
-              <a:spcAft>
-                <a:spcPts val="0"/>
-              </a:spcAft>
-              <a:buNone/>
-            </a:pPr>
-            <a:r>
-              <a:rPr lang="en-US" sz="1200" b="0">
-                <a:solidFill>
-                  <a:srgbClr val="202b33"/>
-                </a:solidFill>
-                <a:latin typeface="Arial"/>
-                <a:ea typeface="Arial"/>
-                <a:cs typeface="Arial"/>
-              </a:rPr>
-              <a:t xml:space="preserve">As patterns repeat, turn the reliable ones into tested templates and adapters. The runtime agent learns which evidence to consult; the offline improvement loop evaluates changes to the reusable procedure. Once the known case is covered by code, it need not spend another model call rediscovering the rule.</a:t>
-            </a:r>
-            <a:endParaRPr lang="en-US" sz="1200"/>
-          </a:p>
-          <a:p>
-            <a:pPr marL="0" indent="0">
-              <a:lnSpc>
-                <a:spcPts val="1560"/>
-              </a:lnSpc>
-              <a:spcAft>
-                <a:spcPts val="0"/>
-              </a:spcAft>
-              <a:buNone/>
-            </a:pPr>
-            <a:r>
-              <a:rPr lang="en-US" sz="1200" b="0">
-                <a:solidFill>
-                  <a:srgbClr val="202b33"/>
-                </a:solidFill>
-                <a:latin typeface="Arial"/>
-                <a:ea typeface="Arial"/>
-                <a:cs typeface="Arial"/>
-              </a:rPr>
-              <a:t xml:space="preserve"/>
-            </a:r>
-            <a:endParaRPr lang="en-US" sz="1200"/>
-          </a:p>
-          <a:p>
-            <a:pPr marL="0" indent="0">
-              <a:lnSpc>
-                <a:spcPts val="1560"/>
-              </a:lnSpc>
-              <a:spcAft>
-                <a:spcPts val="0"/>
-              </a:spcAft>
-              <a:buNone/>
-            </a:pPr>
-            <a:r>
-              <a:rPr lang="en-US" sz="1200" b="0">
-                <a:solidFill>
-                  <a:srgbClr val="202b33"/>
-                </a:solidFill>
-                <a:latin typeface="Arial"/>
-                <a:ea typeface="Arial"/>
-                <a:cs typeface="Arial"/>
-              </a:rPr>
-              <a:t xml:space="preserve"/>
-            </a:r>
-            <a:endParaRPr lang="en-US" sz="1200"/>
-          </a:p>
-          <a:p>
-            <a:pPr marL="0" indent="0">
-              <a:lnSpc>
-                <a:spcPts val="1560"/>
-              </a:lnSpc>
-              <a:spcAft>
-                <a:spcPts val="0"/>
-              </a:spcAft>
-              <a:buNone/>
-            </a:pPr>
-            <a:r>
-              <a:rPr lang="en-US" sz="1200" b="0">
-                <a:solidFill>
-                  <a:srgbClr val="202b33"/>
-                </a:solidFill>
-                <a:latin typeface="Arial"/>
-                <a:ea typeface="Arial"/>
-                <a:cs typeface="Arial"/>
-              </a:rPr>
-              <a:t xml:space="preserve"/>
-            </a:r>
-            <a:endParaRPr lang="en-US" sz="1200"/>
-          </a:p>
-          <a:p>
-            <a:pPr marL="0" indent="0">
-              <a:lnSpc>
-                <a:spcPts val="1560"/>
-              </a:lnSpc>
-              <a:spcAft>
-                <a:spcPts val="0"/>
-              </a:spcAft>
-              <a:buNone/>
-            </a:pPr>
-            <a:r>
-              <a:rPr lang="en-US" sz="1200" b="0">
-                <a:solidFill>
-                  <a:srgbClr val="202b33"/>
-                </a:solidFill>
-                <a:latin typeface="Arial"/>
-                <a:ea typeface="Arial"/>
-                <a:cs typeface="Arial"/>
-              </a:rPr>
-              <a:t xml:space="preserve">Show the prompt in memory-pattern.md. Ask which observation proves the query ran and which proves it answered the right question. Use the tenant-filter example; no live execution is needed.</a:t>
-            </a:r>
-            <a:endParaRPr lang="en-US" sz="1200"/>
-          </a:p>
-          <a:p>
-            <a:pPr marL="0" indent="0">
-              <a:lnSpc>
-                <a:spcPts val="1560"/>
-              </a:lnSpc>
-              <a:spcAft>
-                <a:spcPts val="0"/>
-              </a:spcAft>
-              <a:buNone/>
-            </a:pPr>
-            <a:r>
-              <a:rPr lang="en-US" sz="1200" b="0">
-                <a:solidFill>
-                  <a:srgbClr val="202b33"/>
-                </a:solidFill>
-                <a:latin typeface="Arial"/>
-                <a:ea typeface="Arial"/>
-                <a:cs typeface="Arial"/>
-              </a:rPr>
-              <a:t xml:space="preserve"/>
-            </a:r>
-            <a:endParaRPr lang="en-US" sz="1200"/>
-          </a:p>
-          <a:p>
-            <a:pPr marL="0" indent="0">
-              <a:lnSpc>
-                <a:spcPts val="1560"/>
-              </a:lnSpc>
-              <a:spcAft>
-                <a:spcPts val="0"/>
-              </a:spcAft>
-              <a:buNone/>
-            </a:pPr>
-            <a:r>
-              <a:rPr lang="en-US" sz="1200" b="0">
-                <a:solidFill>
-                  <a:srgbClr val="202b33"/>
-                </a:solidFill>
-                <a:latin typeface="Arial"/>
-                <a:ea typeface="Arial"/>
-                <a:cs typeface="Arial"/>
-              </a:rPr>
-              <a:t xml:space="preserve"/>
-            </a:r>
-            <a:endParaRPr lang="en-US" sz="1200"/>
-          </a:p>
-        </p:txBody>
-      </p:sp>
-    </p:spTree>
-  </p:cSld>
-  <p:clrMapOvr>
-    <a:masterClrMapping/>
-  </p:clrMapOvr>
-</p:notes>
-</file>
-
-<file path=ppt/notesSlides/notesSlide12.xml><?xml version="1.0" encoding="utf-8"?>
-<p:notes xmlns:a="http://schemas.openxmlformats.org/drawingml/2006/main" xmlns:r="http://schemas.openxmlformats.org/officeDocument/2006/relationships" xmlns:p="http://schemas.openxmlformats.org/presentationml/2006/main">
-  <p:cSld>
-    <p:spTree>
-      <p:nvGrpSpPr>
-        <p:cNvPr id="1" name=""/>
-        <p:cNvGrpSpPr/>
-        <p:nvPr/>
-      </p:nvGrpSpPr>
-      <p:grpSpPr>
-        <a:xfrm>
-          <a:off x="0" y="0"/>
-          <a:ext cx="0" cy="0"/>
-          <a:chOff x="0" y="0"/>
-          <a:chExt cx="0" cy="0"/>
-        </a:xfrm>
-      </p:grpSpPr>
-      <p:sp>
-        <p:nvSpPr>
-          <p:cNvPr id="2" name="Presenter notes"/>
-          <p:cNvSpPr txBox="1"/>
-          <p:nvPr>
-            <p:ph type="body" idx="1"/>
-          </p:nvPr>
-        </p:nvSpPr>
-        <p:spPr>
-          <a:xfrm>
-            <a:off x="457200" y="1428750"/>
-            <a:ext cx="5715000" cy="6667500"/>
-          </a:xfrm>
-        </p:spPr>
-        <p:txBody>
-          <a:bodyPr/>
-          <a:lstStyle/>
-          <a:p>
-            <a:pPr marL="0" indent="0">
-              <a:lnSpc>
-                <a:spcPts val="1560"/>
-              </a:lnSpc>
-              <a:spcAft>
-                <a:spcPts val="0"/>
-              </a:spcAft>
-              <a:buNone/>
-            </a:pPr>
-            <a:r>
-              <a:rPr lang="en-US" sz="1200" b="0">
-                <a:solidFill>
-                  <a:srgbClr val="202b33"/>
-                </a:solidFill>
-                <a:latin typeface="Arial"/>
-                <a:ea typeface="Arial"/>
-                <a:cs typeface="Arial"/>
-              </a:rPr>
-              <a:t xml:space="preserve">Adaptive, agentic apps</a:t>
-            </a:r>
-            <a:endParaRPr lang="en-US" sz="1200"/>
-          </a:p>
-          <a:p>
-            <a:pPr marL="0" indent="0">
-              <a:lnSpc>
-                <a:spcPts val="1560"/>
-              </a:lnSpc>
-              <a:spcAft>
-                <a:spcPts val="0"/>
-              </a:spcAft>
-              <a:buNone/>
-            </a:pPr>
-            <a:r>
-              <a:rPr lang="en-US" sz="1200" b="0">
-                <a:solidFill>
-                  <a:srgbClr val="202b33"/>
-                </a:solidFill>
-                <a:latin typeface="Arial"/>
-                <a:ea typeface="Arial"/>
-                <a:cs typeface="Arial"/>
-              </a:rPr>
-              <a:t xml:space="preserve"/>
-            </a:r>
-            <a:endParaRPr lang="en-US" sz="1200"/>
-          </a:p>
-          <a:p>
-            <a:pPr marL="0" indent="0">
-              <a:lnSpc>
-                <a:spcPts val="1560"/>
-              </a:lnSpc>
-              <a:spcAft>
-                <a:spcPts val="0"/>
-              </a:spcAft>
-              <a:buNone/>
-            </a:pPr>
-            <a:r>
-              <a:rPr lang="en-US" sz="1200" b="0">
-                <a:solidFill>
-                  <a:srgbClr val="202b33"/>
-                </a:solidFill>
-                <a:latin typeface="Arial"/>
-                <a:ea typeface="Arial"/>
-                <a:cs typeface="Arial"/>
-              </a:rPr>
-              <a:t xml:space="preserve">Source slide 15. 14:00 to 15:00</a:t>
-            </a:r>
-            <a:endParaRPr lang="en-US" sz="1200"/>
-          </a:p>
-          <a:p>
-            <a:pPr marL="0" indent="0">
-              <a:lnSpc>
-                <a:spcPts val="1560"/>
-              </a:lnSpc>
-              <a:spcAft>
-                <a:spcPts val="0"/>
-              </a:spcAft>
-              <a:buNone/>
-            </a:pPr>
-            <a:r>
-              <a:rPr lang="en-US" sz="1200" b="0">
-                <a:solidFill>
-                  <a:srgbClr val="202b33"/>
-                </a:solidFill>
-                <a:latin typeface="Arial"/>
-                <a:ea typeface="Arial"/>
-                <a:cs typeface="Arial"/>
-              </a:rPr>
-              <a:t xml:space="preserve"/>
-            </a:r>
-            <a:endParaRPr lang="en-US" sz="1200"/>
-          </a:p>
-          <a:p>
-            <a:pPr marL="0" indent="0">
-              <a:lnSpc>
-                <a:spcPts val="1560"/>
-              </a:lnSpc>
-              <a:spcAft>
-                <a:spcPts val="0"/>
-              </a:spcAft>
-              <a:buNone/>
-            </a:pPr>
-            <a:r>
-              <a:rPr lang="en-US" sz="1200" b="0">
-                <a:solidFill>
-                  <a:srgbClr val="202b33"/>
-                </a:solidFill>
-                <a:latin typeface="Arial"/>
-                <a:ea typeface="Arial"/>
-                <a:cs typeface="Arial"/>
-              </a:rPr>
-              <a:t xml:space="preserve">Conjure exactly enough</a:t>
-            </a:r>
-            <a:endParaRPr lang="en-US" sz="1200"/>
-          </a:p>
-          <a:p>
-            <a:pPr marL="0" indent="0">
-              <a:lnSpc>
-                <a:spcPts val="1560"/>
-              </a:lnSpc>
-              <a:spcAft>
-                <a:spcPts val="0"/>
-              </a:spcAft>
-              <a:buNone/>
-            </a:pPr>
-            <a:r>
-              <a:rPr lang="en-US" sz="1200" b="0">
-                <a:solidFill>
-                  <a:srgbClr val="202b33"/>
-                </a:solidFill>
-                <a:latin typeface="Arial"/>
-                <a:ea typeface="Arial"/>
-                <a:cs typeface="Arial"/>
-              </a:rPr>
-              <a:t xml:space="preserve"/>
-            </a:r>
-            <a:endParaRPr lang="en-US" sz="1200"/>
-          </a:p>
-          <a:p>
-            <a:pPr marL="0" indent="0">
-              <a:lnSpc>
-                <a:spcPts val="1560"/>
-              </a:lnSpc>
-              <a:spcAft>
-                <a:spcPts val="0"/>
-              </a:spcAft>
-              <a:buNone/>
-            </a:pPr>
-            <a:r>
-              <a:rPr lang="en-US" sz="1200" b="0">
-                <a:solidFill>
-                  <a:srgbClr val="202b33"/>
-                </a:solidFill>
-                <a:latin typeface="Arial"/>
-                <a:ea typeface="Arial"/>
-                <a:cs typeface="Arial"/>
-              </a:rPr>
-              <a:t xml:space="preserve">Prove the repair</a:t>
-            </a:r>
-            <a:endParaRPr lang="en-US" sz="1200"/>
-          </a:p>
-          <a:p>
-            <a:pPr marL="0" indent="0">
-              <a:lnSpc>
-                <a:spcPts val="1560"/>
-              </a:lnSpc>
-              <a:spcAft>
-                <a:spcPts val="0"/>
-              </a:spcAft>
-              <a:buNone/>
-            </a:pPr>
-            <a:r>
-              <a:rPr lang="en-US" sz="1200" b="0">
-                <a:solidFill>
-                  <a:srgbClr val="202b33"/>
-                </a:solidFill>
-                <a:latin typeface="Arial"/>
-                <a:ea typeface="Arial"/>
-                <a:cs typeface="Arial"/>
-              </a:rPr>
-              <a:t xml:space="preserve"/>
-            </a:r>
-            <a:endParaRPr lang="en-US" sz="1200"/>
-          </a:p>
-          <a:p>
-            <a:pPr marL="0" indent="0">
-              <a:lnSpc>
-                <a:spcPts val="1560"/>
-              </a:lnSpc>
-              <a:spcAft>
-                <a:spcPts val="0"/>
-              </a:spcAft>
-              <a:buNone/>
-            </a:pPr>
-            <a:r>
-              <a:rPr lang="en-US" sz="1200" b="0">
-                <a:solidFill>
-                  <a:srgbClr val="202b33"/>
-                </a:solidFill>
-                <a:latin typeface="Arial"/>
-                <a:ea typeface="Arial"/>
-                <a:cs typeface="Arial"/>
-              </a:rPr>
-              <a:t xml:space="preserve">Remember the known case</a:t>
-            </a:r>
-            <a:endParaRPr lang="en-US" sz="1200"/>
-          </a:p>
-          <a:p>
-            <a:pPr marL="0" indent="0">
-              <a:lnSpc>
-                <a:spcPts val="1560"/>
-              </a:lnSpc>
-              <a:spcAft>
-                <a:spcPts val="0"/>
-              </a:spcAft>
-              <a:buNone/>
-            </a:pPr>
-            <a:r>
-              <a:rPr lang="en-US" sz="1200" b="0">
-                <a:solidFill>
-                  <a:srgbClr val="202b33"/>
-                </a:solidFill>
-                <a:latin typeface="Arial"/>
-                <a:ea typeface="Arial"/>
-                <a:cs typeface="Arial"/>
-              </a:rPr>
-              <a:t xml:space="preserve"/>
-            </a:r>
-            <a:endParaRPr lang="en-US" sz="1200"/>
-          </a:p>
-          <a:p>
-            <a:pPr marL="0" indent="0">
-              <a:lnSpc>
-                <a:spcPts val="1560"/>
-              </a:lnSpc>
-              <a:spcAft>
-                <a:spcPts val="0"/>
-              </a:spcAft>
-              <a:buNone/>
-            </a:pPr>
-            <a:r>
-              <a:rPr lang="en-US" sz="1200" b="0">
-                <a:solidFill>
-                  <a:srgbClr val="202b33"/>
-                </a:solidFill>
-                <a:latin typeface="Arial"/>
-                <a:ea typeface="Arial"/>
-                <a:cs typeface="Arial"/>
-              </a:rPr>
-              <a:t xml:space="preserve">Return to the field that changed overnight. We did not predict its spelling. We did define what had to stay true, what evidence a repair needed, which tools this one job could have, and how far the app could go without us.</a:t>
-            </a:r>
-            <a:endParaRPr lang="en-US" sz="1200"/>
-          </a:p>
-          <a:p>
-            <a:pPr marL="0" indent="0">
-              <a:lnSpc>
-                <a:spcPts val="1560"/>
-              </a:lnSpc>
-              <a:spcAft>
-                <a:spcPts val="0"/>
-              </a:spcAft>
-              <a:buNone/>
-            </a:pPr>
-            <a:r>
-              <a:rPr lang="en-US" sz="1200" b="0">
-                <a:solidFill>
-                  <a:srgbClr val="202b33"/>
-                </a:solidFill>
-                <a:latin typeface="Arial"/>
-                <a:ea typeface="Arial"/>
-                <a:cs typeface="Arial"/>
-              </a:rPr>
-              <a:t xml:space="preserve"/>
-            </a:r>
-            <a:endParaRPr lang="en-US" sz="1200"/>
-          </a:p>
-          <a:p>
-            <a:pPr marL="0" indent="0">
-              <a:lnSpc>
-                <a:spcPts val="1560"/>
-              </a:lnSpc>
-              <a:spcAft>
-                <a:spcPts val="0"/>
-              </a:spcAft>
-              <a:buNone/>
-            </a:pPr>
-            <a:r>
-              <a:rPr lang="en-US" sz="1200" b="0">
-                <a:solidFill>
-                  <a:srgbClr val="202b33"/>
-                </a:solidFill>
-                <a:latin typeface="Arial"/>
-                <a:ea typeface="Arial"/>
-                <a:cs typeface="Arial"/>
-              </a:rPr>
-              <a:t xml:space="preserve">And return to the assistant with everything. It is still coming; nothing on these slides stops it, and I would not want to. What changed is how many of its pathways are live at once. Each job gets a small agent with a tailored prompt, a short tool list, a hard budget, and a log of every time it asked for more. That is the strategy I believe in for the next few years: not one agent holding every combination, which nobody can check, but many small ones you can afford to.</a:t>
-            </a:r>
-            <a:endParaRPr lang="en-US" sz="1200"/>
-          </a:p>
-          <a:p>
-            <a:pPr marL="0" indent="0">
-              <a:lnSpc>
-                <a:spcPts val="1560"/>
-              </a:lnSpc>
-              <a:spcAft>
-                <a:spcPts val="0"/>
-              </a:spcAft>
-              <a:buNone/>
-            </a:pPr>
-            <a:r>
-              <a:rPr lang="en-US" sz="1200" b="0">
-                <a:solidFill>
-                  <a:srgbClr val="202b33"/>
-                </a:solidFill>
-                <a:latin typeface="Arial"/>
-                <a:ea typeface="Arial"/>
-                <a:cs typeface="Arial"/>
-              </a:rPr>
-              <a:t xml:space="preserve"/>
-            </a:r>
-            <a:endParaRPr lang="en-US" sz="1200"/>
-          </a:p>
-          <a:p>
-            <a:pPr marL="0" indent="0">
-              <a:lnSpc>
-                <a:spcPts val="1560"/>
-              </a:lnSpc>
-              <a:spcAft>
-                <a:spcPts val="0"/>
-              </a:spcAft>
-              <a:buNone/>
-            </a:pPr>
-            <a:r>
-              <a:rPr lang="en-US" sz="1200" b="0">
-                <a:solidFill>
-                  <a:srgbClr val="202b33"/>
-                </a:solidFill>
-                <a:latin typeface="Arial"/>
-                <a:ea typeface="Arial"/>
-                <a:cs typeface="Arial"/>
-              </a:rPr>
-              <a:t xml:space="preserve">Pick one integration that already costs your team mornings. Give it a conjured agent with a bounded way to investigate, a test it did not write, and a place to record what happened. Or start with one reporting agent: keep its execution observations, make it check them before returning work, and measure whether the same mistake comes back. That is enough to start.</a:t>
-            </a:r>
-            <a:endParaRPr lang="en-US" sz="1200"/>
-          </a:p>
-          <a:p>
-            <a:pPr marL="0" indent="0">
-              <a:lnSpc>
-                <a:spcPts val="1560"/>
-              </a:lnSpc>
-              <a:spcAft>
-                <a:spcPts val="0"/>
-              </a:spcAft>
-              <a:buNone/>
-            </a:pPr>
-            <a:r>
-              <a:rPr lang="en-US" sz="1200" b="0">
-                <a:solidFill>
-                  <a:srgbClr val="202b33"/>
-                </a:solidFill>
-                <a:latin typeface="Arial"/>
-                <a:ea typeface="Arial"/>
-                <a:cs typeface="Arial"/>
-              </a:rPr>
-              <a:t xml:space="preserve"/>
-            </a:r>
-            <a:endParaRPr lang="en-US" sz="1200"/>
-          </a:p>
-          <a:p>
-            <a:pPr marL="0" indent="0">
-              <a:lnSpc>
-                <a:spcPts val="1560"/>
-              </a:lnSpc>
-              <a:spcAft>
-                <a:spcPts val="0"/>
-              </a:spcAft>
-              <a:buNone/>
-            </a:pPr>
-            <a:r>
-              <a:rPr lang="en-US" sz="1200" b="0">
-                <a:solidFill>
-                  <a:srgbClr val="202b33"/>
-                </a:solidFill>
-                <a:latin typeface="Arial"/>
-                <a:ea typeface="Arial"/>
-                <a:cs typeface="Arial"/>
-              </a:rPr>
-              <a:t xml:space="preserve"/>
-            </a:r>
-            <a:endParaRPr lang="en-US" sz="1200"/>
-          </a:p>
-          <a:p>
-            <a:pPr marL="0" indent="0">
-              <a:lnSpc>
-                <a:spcPts val="1560"/>
-              </a:lnSpc>
-              <a:spcAft>
-                <a:spcPts val="0"/>
-              </a:spcAft>
-              <a:buNone/>
-            </a:pPr>
-            <a:r>
-              <a:rPr lang="en-US" sz="1200" b="0">
-                <a:solidFill>
-                  <a:srgbClr val="202b33"/>
-                </a:solidFill>
-                <a:latin typeface="Arial"/>
-                <a:ea typeface="Arial"/>
-                <a:cs typeface="Arial"/>
-              </a:rPr>
-              <a:t xml:space="preserve"/>
-            </a:r>
-            <a:endParaRPr lang="en-US" sz="1200"/>
-          </a:p>
-          <a:p>
-            <a:pPr marL="0" indent="0">
-              <a:lnSpc>
-                <a:spcPts val="1560"/>
-              </a:lnSpc>
-              <a:spcAft>
-                <a:spcPts val="0"/>
-              </a:spcAft>
-              <a:buNone/>
-            </a:pPr>
-            <a:r>
-              <a:rPr lang="en-US" sz="1200" b="0">
-                <a:solidFill>
-                  <a:srgbClr val="202b33"/>
-                </a:solidFill>
-                <a:latin typeface="Arial"/>
-                <a:ea typeface="Arial"/>
-                <a:cs typeface="Arial"/>
-              </a:rPr>
-              <a:t xml:space="preserve">Land on the third line. Stop talking.</a:t>
-            </a:r>
-            <a:endParaRPr lang="en-US" sz="1200"/>
-          </a:p>
-          <a:p>
-            <a:pPr marL="0" indent="0">
-              <a:lnSpc>
-                <a:spcPts val="1560"/>
-              </a:lnSpc>
-              <a:spcAft>
-                <a:spcPts val="0"/>
-              </a:spcAft>
-              <a:buNone/>
-            </a:pPr>
-            <a:r>
-              <a:rPr lang="en-US" sz="1200" b="0">
-                <a:solidFill>
-                  <a:srgbClr val="202b33"/>
-                </a:solidFill>
-                <a:latin typeface="Arial"/>
-                <a:ea typeface="Arial"/>
-                <a:cs typeface="Arial"/>
-              </a:rPr>
-              <a:t xml:space="preserve"/>
-            </a:r>
-            <a:endParaRPr lang="en-US" sz="1200"/>
-          </a:p>
-          <a:p>
-            <a:pPr marL="0" indent="0">
-              <a:lnSpc>
-                <a:spcPts val="1560"/>
-              </a:lnSpc>
-              <a:spcAft>
-                <a:spcPts val="0"/>
-              </a:spcAft>
-              <a:buNone/>
-            </a:pPr>
-            <a:r>
-              <a:rPr lang="en-US" sz="1200" b="0">
-                <a:solidFill>
-                  <a:srgbClr val="202b33"/>
-                </a:solidFill>
-                <a:latin typeface="Arial"/>
-                <a:ea typeface="Arial"/>
-                <a:cs typeface="Arial"/>
-              </a:rPr>
-              <a:t xml:space="preserve"/>
-            </a:r>
-            <a:endParaRPr lang="en-US" sz="1200"/>
-          </a:p>
-        </p:txBody>
-      </p:sp>
-    </p:spTree>
-  </p:cSld>
-  <p:clrMapOvr>
-    <a:masterClrMapping/>
-  </p:clrMapOvr>
-</p:notes>
-</file>
-
-<file path=ppt/notesSlides/notesSlide13.xml><?xml version="1.0" encoding="utf-8"?>
-<p:notes xmlns:a="http://schemas.openxmlformats.org/drawingml/2006/main" xmlns:r="http://schemas.openxmlformats.org/officeDocument/2006/relationships" xmlns:p="http://schemas.openxmlformats.org/presentationml/2006/main">
-  <p:cSld>
-    <p:spTree>
-      <p:nvGrpSpPr>
-        <p:cNvPr id="1" name=""/>
-        <p:cNvGrpSpPr/>
-        <p:nvPr/>
-      </p:nvGrpSpPr>
-      <p:grpSpPr>
-        <a:xfrm>
-          <a:off x="0" y="0"/>
-          <a:ext cx="0" cy="0"/>
-          <a:chOff x="0" y="0"/>
-          <a:chExt cx="0" cy="0"/>
-        </a:xfrm>
-      </p:grpSpPr>
-      <p:sp>
-        <p:nvSpPr>
-          <p:cNvPr id="2" name="Presenter notes"/>
-          <p:cNvSpPr txBox="1"/>
-          <p:nvPr>
-            <p:ph type="body" idx="1"/>
-          </p:nvPr>
-        </p:nvSpPr>
-        <p:spPr>
-          <a:xfrm>
-            <a:off x="457200" y="1428750"/>
-            <a:ext cx="5715000" cy="6667500"/>
-          </a:xfrm>
-        </p:spPr>
-        <p:txBody>
-          <a:bodyPr/>
-          <a:lstStyle/>
-          <a:p>
-            <a:pPr marL="0" indent="0">
-              <a:lnSpc>
-                <a:spcPts val="1560"/>
-              </a:lnSpc>
-              <a:spcAft>
-                <a:spcPts val="0"/>
-              </a:spcAft>
-              <a:buNone/>
-            </a:pPr>
-            <a:r>
-              <a:rPr lang="en-US" sz="1200" b="0">
-                <a:solidFill>
-                  <a:srgbClr val="202b33"/>
-                </a:solidFill>
-                <a:latin typeface="Arial"/>
-                <a:ea typeface="Arial"/>
-                <a:cs typeface="Arial"/>
-              </a:rPr>
               <a:t xml:space="preserve">Saltzer and Schroeder (1975), [The Protection of Information in Computer Systems](https://doi.org/10.1109/PROC.1975.9939), Proceedings of the IEEE 63(9), 1278 to 1308. Least privilege is their principle (f).</a:t>
             </a:r>
             <a:endParaRPr lang="en-US" sz="1200"/>
@@ -2188,7 +420,7 @@
                 <a:ea typeface="Arial"/>
                 <a:cs typeface="Arial"/>
               </a:rPr>
-              <a:t xml:space="preserve">Source slide 1. 00:00 to 01:00</a:t>
+              <a:t xml:space="preserve">Source slide 1. 00:00 to 01:45</a:t>
             </a:r>
             <a:endParaRPr lang="en-US" sz="1200"/>
           </a:p>
@@ -2715,7 +947,7 @@
                 <a:ea typeface="Arial"/>
                 <a:cs typeface="Arial"/>
               </a:rPr>
-              <a:t xml:space="preserve">Source slide 3. 01:00 to 02:30</a:t>
+              <a:t xml:space="preserve">Source slide 3. 01:45 to 05:15</a:t>
             </a:r>
             <a:endParaRPr lang="en-US" sz="1200"/>
           </a:p>
@@ -2899,7 +1131,7 @@
                 <a:ea typeface="Arial"/>
                 <a:cs typeface="Arial"/>
               </a:rPr>
-              <a:t xml:space="preserve">Zoom out from the ingest job. The assistant with every customer's data and a toolbox that can send email, issue refunds, delete records and ship code is not a design we get to decline. It is arriving one integration at a time, and not only in our products. Browsers now ship a chat that drives the page. WebMCP lets an agent act on any site that opts in, and the list of sites that opt in only goes one direction. The next generation of CLIs will take natural language by default, and you will pass `--no-agent` to get the old behavior back. The intermediary intelligence layer is going to wrap everything, and I know who to blame: the kids. Actually, the kids hate AI. It will be their kids who demand an agent safety blanket on everything. I will be in a rocking chair explaining that the internet was better on vinyl.</a:t>
+              <a:t xml:space="preserve">Zoom out from the ingest job. The assistant with every customer's data and a toolbox that can send email, issue refunds, delete records and ship code is not a design we get to decline. It is arriving one integration at a time, and not only in our products.</a:t>
             </a:r>
             <a:endParaRPr lang="en-US" sz="1200"/>
           </a:p>
@@ -3129,7 +1361,7 @@
                 <a:ea typeface="Arial"/>
                 <a:cs typeface="Arial"/>
               </a:rPr>
-              <a:t xml:space="preserve"/>
+              <a:t xml:space="preserve">Bridge: most of the damage will be accidents before anyone means it, and a renamed field is untrusted input read by something that can act.</a:t>
             </a:r>
             <a:endParaRPr lang="en-US" sz="1200"/>
           </a:p>
@@ -3242,7 +1474,7 @@
                 <a:ea typeface="Arial"/>
                 <a:cs typeface="Arial"/>
               </a:rPr>
-              <a:t xml:space="preserve">Source slide 3. 01:00 to 02:30</a:t>
+              <a:t xml:space="preserve">Source slide 3. 01:45 to 05:15</a:t>
             </a:r>
             <a:endParaRPr lang="en-US" sz="1200"/>
           </a:p>
@@ -3426,7 +1658,7 @@
                 <a:ea typeface="Arial"/>
                 <a:cs typeface="Arial"/>
               </a:rPr>
-              <a:t xml:space="preserve">Zoom out from the ingest job. The assistant with every customer's data and a toolbox that can send email, issue refunds, delete records and ship code is not a design we get to decline. It is arriving one integration at a time, and not only in our products. Browsers now ship a chat that drives the page. WebMCP lets an agent act on any site that opts in, and the list of sites that opt in only goes one direction. The next generation of CLIs will take natural language by default, and you will pass `--no-agent` to get the old behavior back. The intermediary intelligence layer is going to wrap everything, and I know who to blame: the kids. Actually, the kids hate AI. It will be their kids who demand an agent safety blanket on everything. I will be in a rocking chair explaining that the internet was better on vinyl.</a:t>
+              <a:t xml:space="preserve">Zoom out from the ingest job. The assistant with every customer's data and a toolbox that can send email, issue refunds, delete records and ship code is not a design we get to decline. It is arriving one integration at a time, and not only in our products.</a:t>
             </a:r>
             <a:endParaRPr lang="en-US" sz="1200"/>
           </a:p>
@@ -3656,7 +1888,7 @@
                 <a:ea typeface="Arial"/>
                 <a:cs typeface="Arial"/>
               </a:rPr>
-              <a:t xml:space="preserve"/>
+              <a:t xml:space="preserve">Bridge: most of the damage will be accidents before anyone means it, and a renamed field is untrusted input read by something that can act.</a:t>
             </a:r>
             <a:endParaRPr lang="en-US" sz="1200"/>
           </a:p>
@@ -3769,7 +2001,7 @@
                 <a:ea typeface="Arial"/>
                 <a:cs typeface="Arial"/>
               </a:rPr>
-              <a:t xml:space="preserve">Source slide 4. 02:30 to 05:30</a:t>
+              <a:t xml:space="preserve">Source slide 4. 05:15 to 07:00</a:t>
             </a:r>
             <a:endParaRPr lang="en-US" sz="1200"/>
           </a:p>
@@ -4000,52 +2232,6 @@
                 <a:cs typeface="Arial"/>
               </a:rPr>
               <a:t xml:space="preserve">If the agent needs something else, it asks. Dynamic tool search lets it discover a tool; policy decides whether this job may have it; the request and the answer are logged whether or not it was granted. That log is the most interesting file in the system.</a:t>
-            </a:r>
-            <a:endParaRPr lang="en-US" sz="1200"/>
-          </a:p>
-          <a:p>
-            <a:pPr marL="0" indent="0">
-              <a:lnSpc>
-                <a:spcPts val="1560"/>
-              </a:lnSpc>
-              <a:spcAft>
-                <a:spcPts val="0"/>
-              </a:spcAft>
-              <a:buNone/>
-            </a:pPr>
-            <a:r>
-              <a:rPr lang="en-US" sz="1200" b="0">
-                <a:solidFill>
-                  <a:srgbClr val="202b33"/>
-                </a:solidFill>
-                <a:latin typeface="Arial"/>
-                <a:ea typeface="Arial"/>
-                <a:cs typeface="Arial"/>
-              </a:rPr>
-              <a:t xml:space="preserve"/>
-            </a:r>
-            <a:endParaRPr lang="en-US" sz="1200"/>
-          </a:p>
-          <a:p>
-            <a:pPr marL="0" indent="0">
-              <a:lnSpc>
-                <a:spcPts val="1560"/>
-              </a:lnSpc>
-              <a:spcAft>
-                <a:spcPts val="0"/>
-              </a:spcAft>
-              <a:buNone/>
-            </a:pPr>
-            <a:r>
-              <a:rPr lang="en-US" sz="1200" b="0">
-                <a:solidFill>
-                  <a:srgbClr val="202b33"/>
-                </a:solidFill>
-                <a:latin typeface="Arial"/>
-                <a:ea typeface="Arial"/>
-                <a:cs typeface="Arial"/>
-              </a:rPr>
-              <a:t xml:space="preserve">I have this working as a prototype on my own integrations. I am not going to give you a success rate today, because I do not have one I trust yet. I can tell you the log of denied tool requests taught me more about my own permissions than any audit.</a:t>
             </a:r>
             <a:endParaRPr lang="en-US" sz="1200"/>
           </a:p>
@@ -4296,7 +2482,7 @@
                 <a:ea typeface="Arial"/>
                 <a:cs typeface="Arial"/>
               </a:rPr>
-              <a:t xml:space="preserve">Source slide 5. 05:30 to 07:00</a:t>
+              <a:t xml:space="preserve">Source slide 5. 07:00 to 08:30</a:t>
             </a:r>
             <a:endParaRPr lang="en-US" sz="1200"/>
           </a:p>
@@ -4526,7 +2712,7 @@
                 <a:ea typeface="Arial"/>
                 <a:cs typeface="Arial"/>
               </a:rPr>
-              <a:t xml:space="preserve">This is least privilege, and Saltzer and Schroeder wrote it down in 1975: every program runs with the least set of privileges the job needs. We have all been nodding at that for fifty years and shipping service accounts that can do anything. A per-job agent is the first thing I have built where complying is genuinely easier than not.</a:t>
+              <a:t xml:space="preserve">Second, watch the boundary between systems. An agent that can read customer data and an agent that can post to a vendor are two agents, with a filter between them. That is where data leaks: not through the model being evil, but through a tool result flowing into the next tool call.</a:t>
             </a:r>
             <a:endParaRPr lang="en-US" sz="1200"/>
           </a:p>
@@ -4572,7 +2758,7 @@
                 <a:ea typeface="Arial"/>
                 <a:cs typeface="Arial"/>
               </a:rPr>
-              <a:t xml:space="preserve">Second, watch the boundary between systems. An agent that can read customer data and an agent that can post to a vendor are two agents, with a filter between them. That is where data leaks: not through the model being evil, but through a tool result flowing into the next tool call.</a:t>
+              <a:t xml:space="preserve">Saltzer and Schroeder (1975), [The Protection of Information in Computer Systems](https://doi.org/10.1109/PROC.1975.9939), Proceedings of the IEEE 63(9), 1278 to 1308. Least privilege is their principle (f).</a:t>
             </a:r>
             <a:endParaRPr lang="en-US" sz="1200"/>
           </a:p>
@@ -4618,7 +2804,7 @@
                 <a:ea typeface="Arial"/>
                 <a:cs typeface="Arial"/>
               </a:rPr>
-              <a:t xml:space="preserve">For sensitive processing, the planner gets an opaque job reference. A trusted dispatcher grants a local worker scoped access; the worker touches the data; only an allowlisted status comes back. A signed download URL is a bearer credential. Handing it to a model while asking the model not to use it is not isolation, it is hope.</a:t>
+              <a:t xml:space="preserve">The client setup with local models for sensitive data and a frontier orchestrator. Say which parts were real and which are the stronger design you would build now.</a:t>
             </a:r>
             <a:endParaRPr lang="en-US" sz="1200"/>
           </a:p>
@@ -4664,7 +2850,7 @@
                 <a:ea typeface="Arial"/>
                 <a:cs typeface="Arial"/>
               </a:rPr>
-              <a:t xml:space="preserve">Saltzer and Schroeder (1975), [The Protection of Information in Computer Systems](https://doi.org/10.1109/PROC.1975.9939), Proceedings of the IEEE 63(9), 1278 to 1308. Least privilege is their principle (f).</a:t>
+              <a:t xml:space="preserve">Point at the filter between worker and planner. Ask what else crosses it: prompts, traces, error bodies, notification previews.</a:t>
             </a:r>
             <a:endParaRPr lang="en-US" sz="1200"/>
           </a:p>
@@ -4710,99 +2896,7 @@
                 <a:ea typeface="Arial"/>
                 <a:cs typeface="Arial"/>
               </a:rPr>
-              <a:t xml:space="preserve">The client setup with local models for sensitive data and a frontier orchestrator. Say which parts were real and which are the stronger design you would build now.</a:t>
-            </a:r>
-            <a:endParaRPr lang="en-US" sz="1200"/>
-          </a:p>
-          <a:p>
-            <a:pPr marL="0" indent="0">
-              <a:lnSpc>
-                <a:spcPts val="1560"/>
-              </a:lnSpc>
-              <a:spcAft>
-                <a:spcPts val="0"/>
-              </a:spcAft>
-              <a:buNone/>
-            </a:pPr>
-            <a:r>
-              <a:rPr lang="en-US" sz="1200" b="0">
-                <a:solidFill>
-                  <a:srgbClr val="202b33"/>
-                </a:solidFill>
-                <a:latin typeface="Arial"/>
-                <a:ea typeface="Arial"/>
-                <a:cs typeface="Arial"/>
-              </a:rPr>
-              <a:t xml:space="preserve"/>
-            </a:r>
-            <a:endParaRPr lang="en-US" sz="1200"/>
-          </a:p>
-          <a:p>
-            <a:pPr marL="0" indent="0">
-              <a:lnSpc>
-                <a:spcPts val="1560"/>
-              </a:lnSpc>
-              <a:spcAft>
-                <a:spcPts val="0"/>
-              </a:spcAft>
-              <a:buNone/>
-            </a:pPr>
-            <a:r>
-              <a:rPr lang="en-US" sz="1200" b="0">
-                <a:solidFill>
-                  <a:srgbClr val="202b33"/>
-                </a:solidFill>
-                <a:latin typeface="Arial"/>
-                <a:ea typeface="Arial"/>
-                <a:cs typeface="Arial"/>
-              </a:rPr>
-              <a:t xml:space="preserve">Point at the filter between worker and planner. Ask what else crosses it: prompts, traces, error bodies, notification previews.</a:t>
-            </a:r>
-            <a:endParaRPr lang="en-US" sz="1200"/>
-          </a:p>
-          <a:p>
-            <a:pPr marL="0" indent="0">
-              <a:lnSpc>
-                <a:spcPts val="1560"/>
-              </a:lnSpc>
-              <a:spcAft>
-                <a:spcPts val="0"/>
-              </a:spcAft>
-              <a:buNone/>
-            </a:pPr>
-            <a:r>
-              <a:rPr lang="en-US" sz="1200" b="0">
-                <a:solidFill>
-                  <a:srgbClr val="202b33"/>
-                </a:solidFill>
-                <a:latin typeface="Arial"/>
-                <a:ea typeface="Arial"/>
-                <a:cs typeface="Arial"/>
-              </a:rPr>
-              <a:t xml:space="preserve"/>
-            </a:r>
-            <a:endParaRPr lang="en-US" sz="1200"/>
-          </a:p>
-          <a:p>
-            <a:pPr marL="0" indent="0">
-              <a:lnSpc>
-                <a:spcPts val="1560"/>
-              </a:lnSpc>
-              <a:spcAft>
-                <a:spcPts val="0"/>
-              </a:spcAft>
-              <a:buNone/>
-            </a:pPr>
-            <a:r>
-              <a:rPr lang="en-US" sz="1200" b="0">
-                <a:solidFill>
-                  <a:srgbClr val="202b33"/>
-                </a:solidFill>
-                <a:latin typeface="Arial"/>
-                <a:ea typeface="Arial"/>
-                <a:cs typeface="Arial"/>
-              </a:rPr>
-              <a:t xml:space="preserve"/>
+              <a:t xml:space="preserve">Bridge: this is least privilege, written down by Saltzer and Schroeder in 1975; a per-job agent is the first design where complying is easier than not.</a:t>
             </a:r>
             <a:endParaRPr lang="en-US" sz="1200"/>
           </a:p>
@@ -4915,7 +3009,7 @@
                 <a:ea typeface="Arial"/>
                 <a:cs typeface="Arial"/>
               </a:rPr>
-              <a:t xml:space="preserve">Source slide 5. 05:30 to 07:00</a:t>
+              <a:t xml:space="preserve">Source slide 6. 08:30 to 09:45</a:t>
             </a:r>
             <a:endParaRPr lang="en-US" sz="1200"/>
           </a:p>
@@ -4961,7 +3055,7 @@
                 <a:ea typeface="Arial"/>
                 <a:cs typeface="Arial"/>
               </a:rPr>
-              <a:t xml:space="preserve">High-risk classes: write, send, pay, delete, deploy, export</a:t>
+              <a:t xml:space="preserve">zip → postal_code: investigate</a:t>
             </a:r>
             <a:endParaRPr lang="en-US" sz="1200"/>
           </a:p>
@@ -5007,7 +3101,7 @@
                 <a:ea typeface="Arial"/>
                 <a:cs typeface="Arial"/>
               </a:rPr>
-              <a:t xml:space="preserve">Reads customer data? Then it never posts to a vendor.</a:t>
+              <a:t xml:space="preserve">status: true → pending: stop</a:t>
             </a:r>
             <a:endParaRPr lang="en-US" sz="1200"/>
           </a:p>
@@ -5053,7 +3147,7 @@
                 <a:ea typeface="Arial"/>
                 <a:cs typeface="Arial"/>
               </a:rPr>
-              <a:t xml:space="preserve">A signed URL is a credential</a:t>
+              <a:t xml:space="preserve">Back to the ingest. A name resemblance is a hypothesis, not evidence. A postal code is not always a US ZIP. Keep the leading zero, keep the country, and remember ZIP+4 has a four-digit extension that somebody, somewhere, is joining on.</a:t>
             </a:r>
             <a:endParaRPr lang="en-US" sz="1200"/>
           </a:p>
@@ -5099,7 +3193,7 @@
                 <a:ea typeface="Arial"/>
                 <a:cs typeface="Arial"/>
               </a:rPr>
-              <a:t xml:space="preserve">Two guards do most of the work. First, tools come in risk classes. Read is cheap to grant. Write, send, pay, delete, deploy and export each need their own approval path, and a generated agent gets at most one of them per job. Do not smuggle a destructive migration through a tool called repair mapping.</a:t>
+              <a:t xml:space="preserve">So the generated agent may propose a reversible mapping when evidence supports equivalence, and it must quarantine the rest. An unexplained business-state change goes to an owner with samples and a question. Automatic recovery is useful precisely because it has somewhere honest to stop.</a:t>
             </a:r>
             <a:endParaRPr lang="en-US" sz="1200"/>
           </a:p>
@@ -5145,29 +3239,6 @@
                 <a:ea typeface="Arial"/>
                 <a:cs typeface="Arial"/>
               </a:rPr>
-              <a:t xml:space="preserve">This is least privilege, and Saltzer and Schroeder wrote it down in 1975: every program runs with the least set of privileges the job needs. We have all been nodding at that for fifty years and shipping service accounts that can do anything. A per-job agent is the first thing I have built where complying is genuinely easier than not.</a:t>
-            </a:r>
-            <a:endParaRPr lang="en-US" sz="1200"/>
-          </a:p>
-          <a:p>
-            <a:pPr marL="0" indent="0">
-              <a:lnSpc>
-                <a:spcPts val="1560"/>
-              </a:lnSpc>
-              <a:spcAft>
-                <a:spcPts val="0"/>
-              </a:spcAft>
-              <a:buNone/>
-            </a:pPr>
-            <a:r>
-              <a:rPr lang="en-US" sz="1200" b="0">
-                <a:solidFill>
-                  <a:srgbClr val="202b33"/>
-                </a:solidFill>
-                <a:latin typeface="Arial"/>
-                <a:ea typeface="Arial"/>
-                <a:cs typeface="Arial"/>
-              </a:rPr>
               <a:t xml:space="preserve"/>
             </a:r>
             <a:endParaRPr lang="en-US" sz="1200"/>
@@ -5191,29 +3262,6 @@
                 <a:ea typeface="Arial"/>
                 <a:cs typeface="Arial"/>
               </a:rPr>
-              <a:t xml:space="preserve">Second, watch the boundary between systems. An agent that can read customer data and an agent that can post to a vendor are two agents, with a filter between them. That is where data leaks: not through the model being evil, but through a tool result flowing into the next tool call.</a:t>
-            </a:r>
-            <a:endParaRPr lang="en-US" sz="1200"/>
-          </a:p>
-          <a:p>
-            <a:pPr marL="0" indent="0">
-              <a:lnSpc>
-                <a:spcPts val="1560"/>
-              </a:lnSpc>
-              <a:spcAft>
-                <a:spcPts val="0"/>
-              </a:spcAft>
-              <a:buNone/>
-            </a:pPr>
-            <a:r>
-              <a:rPr lang="en-US" sz="1200" b="0">
-                <a:solidFill>
-                  <a:srgbClr val="202b33"/>
-                </a:solidFill>
-                <a:latin typeface="Arial"/>
-                <a:ea typeface="Arial"/>
-                <a:cs typeface="Arial"/>
-              </a:rPr>
               <a:t xml:space="preserve"/>
             </a:r>
             <a:endParaRPr lang="en-US" sz="1200"/>
@@ -5237,7 +3285,7 @@
                 <a:ea typeface="Arial"/>
                 <a:cs typeface="Arial"/>
               </a:rPr>
-              <a:t xml:space="preserve">For sensitive processing, the planner gets an opaque job reference. A trusted dispatcher grants a local worker scoped access; the worker touches the data; only an allowlisted status comes back. A signed download URL is a bearer credential. Handing it to a model while asking the model not to use it is not isolation, it is hope.</a:t>
+              <a:t xml:space="preserve">Show {zip:"02108"} and {postal_code:"02108"}, then {status:"pending"}. Ask what evidence is missing in each. Two answers, then move.</a:t>
             </a:r>
             <a:endParaRPr lang="en-US" sz="1200"/>
           </a:p>
@@ -5283,145 +3331,7 @@
                 <a:ea typeface="Arial"/>
                 <a:cs typeface="Arial"/>
               </a:rPr>
-              <a:t xml:space="preserve">Saltzer and Schroeder (1975), [The Protection of Information in Computer Systems](https://doi.org/10.1109/PROC.1975.9939), Proceedings of the IEEE 63(9), 1278 to 1308. Least privilege is their principle (f).</a:t>
-            </a:r>
-            <a:endParaRPr lang="en-US" sz="1200"/>
-          </a:p>
-          <a:p>
-            <a:pPr marL="0" indent="0">
-              <a:lnSpc>
-                <a:spcPts val="1560"/>
-              </a:lnSpc>
-              <a:spcAft>
-                <a:spcPts val="0"/>
-              </a:spcAft>
-              <a:buNone/>
-            </a:pPr>
-            <a:r>
-              <a:rPr lang="en-US" sz="1200" b="0">
-                <a:solidFill>
-                  <a:srgbClr val="202b33"/>
-                </a:solidFill>
-                <a:latin typeface="Arial"/>
-                <a:ea typeface="Arial"/>
-                <a:cs typeface="Arial"/>
-              </a:rPr>
-              <a:t xml:space="preserve"/>
-            </a:r>
-            <a:endParaRPr lang="en-US" sz="1200"/>
-          </a:p>
-          <a:p>
-            <a:pPr marL="0" indent="0">
-              <a:lnSpc>
-                <a:spcPts val="1560"/>
-              </a:lnSpc>
-              <a:spcAft>
-                <a:spcPts val="0"/>
-              </a:spcAft>
-              <a:buNone/>
-            </a:pPr>
-            <a:r>
-              <a:rPr lang="en-US" sz="1200" b="0">
-                <a:solidFill>
-                  <a:srgbClr val="202b33"/>
-                </a:solidFill>
-                <a:latin typeface="Arial"/>
-                <a:ea typeface="Arial"/>
-                <a:cs typeface="Arial"/>
-              </a:rPr>
-              <a:t xml:space="preserve">The client setup with local models for sensitive data and a frontier orchestrator. Say which parts were real and which are the stronger design you would build now.</a:t>
-            </a:r>
-            <a:endParaRPr lang="en-US" sz="1200"/>
-          </a:p>
-          <a:p>
-            <a:pPr marL="0" indent="0">
-              <a:lnSpc>
-                <a:spcPts val="1560"/>
-              </a:lnSpc>
-              <a:spcAft>
-                <a:spcPts val="0"/>
-              </a:spcAft>
-              <a:buNone/>
-            </a:pPr>
-            <a:r>
-              <a:rPr lang="en-US" sz="1200" b="0">
-                <a:solidFill>
-                  <a:srgbClr val="202b33"/>
-                </a:solidFill>
-                <a:latin typeface="Arial"/>
-                <a:ea typeface="Arial"/>
-                <a:cs typeface="Arial"/>
-              </a:rPr>
-              <a:t xml:space="preserve"/>
-            </a:r>
-            <a:endParaRPr lang="en-US" sz="1200"/>
-          </a:p>
-          <a:p>
-            <a:pPr marL="0" indent="0">
-              <a:lnSpc>
-                <a:spcPts val="1560"/>
-              </a:lnSpc>
-              <a:spcAft>
-                <a:spcPts val="0"/>
-              </a:spcAft>
-              <a:buNone/>
-            </a:pPr>
-            <a:r>
-              <a:rPr lang="en-US" sz="1200" b="0">
-                <a:solidFill>
-                  <a:srgbClr val="202b33"/>
-                </a:solidFill>
-                <a:latin typeface="Arial"/>
-                <a:ea typeface="Arial"/>
-                <a:cs typeface="Arial"/>
-              </a:rPr>
-              <a:t xml:space="preserve">Point at the filter between worker and planner. Ask what else crosses it: prompts, traces, error bodies, notification previews.</a:t>
-            </a:r>
-            <a:endParaRPr lang="en-US" sz="1200"/>
-          </a:p>
-          <a:p>
-            <a:pPr marL="0" indent="0">
-              <a:lnSpc>
-                <a:spcPts val="1560"/>
-              </a:lnSpc>
-              <a:spcAft>
-                <a:spcPts val="0"/>
-              </a:spcAft>
-              <a:buNone/>
-            </a:pPr>
-            <a:r>
-              <a:rPr lang="en-US" sz="1200" b="0">
-                <a:solidFill>
-                  <a:srgbClr val="202b33"/>
-                </a:solidFill>
-                <a:latin typeface="Arial"/>
-                <a:ea typeface="Arial"/>
-                <a:cs typeface="Arial"/>
-              </a:rPr>
-              <a:t xml:space="preserve"/>
-            </a:r>
-            <a:endParaRPr lang="en-US" sz="1200"/>
-          </a:p>
-          <a:p>
-            <a:pPr marL="0" indent="0">
-              <a:lnSpc>
-                <a:spcPts val="1560"/>
-              </a:lnSpc>
-              <a:spcAft>
-                <a:spcPts val="0"/>
-              </a:spcAft>
-              <a:buNone/>
-            </a:pPr>
-            <a:r>
-              <a:rPr lang="en-US" sz="1200" b="0">
-                <a:solidFill>
-                  <a:srgbClr val="202b33"/>
-                </a:solidFill>
-                <a:latin typeface="Arial"/>
-                <a:ea typeface="Arial"/>
-                <a:cs typeface="Arial"/>
-              </a:rPr>
-              <a:t xml:space="preserve"/>
+              <a:t xml:space="preserve">Bridge: a Boolean status becoming an enum is the hard case — pending does not become true because both are truthy. A repair ships as a versioned artifact with a rollback, and it has to pass fixtures it did not write.</a:t>
             </a:r>
             <a:endParaRPr lang="en-US" sz="1200"/>
           </a:p>
@@ -5534,7 +3444,7 @@
                 <a:ea typeface="Arial"/>
                 <a:cs typeface="Arial"/>
               </a:rPr>
-              <a:t xml:space="preserve">Source slide 6. 07:00 to 08:30</a:t>
+              <a:t xml:space="preserve">Source slide 10. 09:45 to 12:45</a:t>
             </a:r>
             <a:endParaRPr lang="en-US" sz="1200"/>
           </a:p>
@@ -5580,7 +3490,7 @@
                 <a:ea typeface="Arial"/>
                 <a:cs typeface="Arial"/>
               </a:rPr>
-              <a:t xml:space="preserve">zip → postal_code: investigate</a:t>
+              <a:t xml:space="preserve">Rename → validated mapping, canary</a:t>
             </a:r>
             <a:endParaRPr lang="en-US" sz="1200"/>
           </a:p>
@@ -5626,7 +3536,7 @@
                 <a:ea typeface="Arial"/>
                 <a:cs typeface="Arial"/>
               </a:rPr>
-              <a:t xml:space="preserve">status: true → pending: stop</a:t>
+              <a:t xml:space="preserve">Unknown status → quarantine, owner</a:t>
             </a:r>
             <a:endParaRPr lang="en-US" sz="1200"/>
           </a:p>
@@ -5672,7 +3582,7 @@
                 <a:ea typeface="Arial"/>
                 <a:cs typeface="Arial"/>
               </a:rPr>
-              <a:t xml:space="preserve">Back to the ingest. A name resemblance is a hypothesis, not evidence. A postal code is not always a US ZIP. Keep the leading zero, keep the country, and remember ZIP+4 has a four-digit extension that somebody, somewhere, is joining on.</a:t>
+              <a:t xml:space="preserve">Lost response → reconcile, hold the reservation</a:t>
             </a:r>
             <a:endParaRPr lang="en-US" sz="1200"/>
           </a:p>
@@ -5718,7 +3628,7 @@
                 <a:ea typeface="Arial"/>
                 <a:cs typeface="Arial"/>
               </a:rPr>
-              <a:t xml:space="preserve">A Boolean status becoming an enum is harder. Does true mean active, eligible, verified, or anything except cancelled? Pending cannot become true just because both are truthy in JavaScript.</a:t>
+              <a:t xml:space="preserve">Run the design. The rename has contract evidence. The conjured diff agent proposes copy-string; now reveal the fixtures one at a time and let the room reject the one that must not be repaired. Passing both, policy permits a canary of that mapping version and the job continues for matching records.</a:t>
             </a:r>
             <a:endParaRPr lang="en-US" sz="1200"/>
           </a:p>
@@ -5764,7 +3674,7 @@
                 <a:ea typeface="Arial"/>
                 <a:cs typeface="Arial"/>
               </a:rPr>
-              <a:t xml:space="preserve">So the generated agent may propose a reversible mapping when evidence supports equivalence, and it must quarantine the rest. An unexplained business-state change goes to an owner with samples and a question. Automatic recovery is useful precisely because it has somewhere honest to stop.</a:t>
+              <a:t xml:space="preserve">The status change has no semantic evidence. The job isolates affected records, reports what is incomplete, and hands an owner the samples and the exact question.</a:t>
             </a:r>
             <a:endParaRPr lang="en-US" sz="1200"/>
           </a:p>
@@ -5810,6 +3720,29 @@
                 <a:ea typeface="Arial"/>
                 <a:cs typeface="Arial"/>
               </a:rPr>
+              <a:t xml:space="preserve">The provider timeout has an uncertain outcome. The controller queries the saved job ID instead of submitting again, and where it cannot, it holds the unresolved operation and its reservation.</a:t>
+            </a:r>
+            <a:endParaRPr lang="en-US" sz="1200"/>
+          </a:p>
+          <a:p>
+            <a:pPr marL="0" indent="0">
+              <a:lnSpc>
+                <a:spcPts val="1560"/>
+              </a:lnSpc>
+              <a:spcAft>
+                <a:spcPts val="0"/>
+              </a:spcAft>
+              <a:buNone/>
+            </a:pPr>
+            <a:r>
+              <a:rPr lang="en-US" sz="1200" b="0">
+                <a:solidFill>
+                  <a:srgbClr val="202b33"/>
+                </a:solidFill>
+                <a:latin typeface="Arial"/>
+                <a:ea typeface="Arial"/>
+                <a:cs typeface="Arial"/>
+              </a:rPr>
               <a:t xml:space="preserve"/>
             </a:r>
             <a:endParaRPr lang="en-US" sz="1200"/>
@@ -5833,6 +3766,29 @@
                 <a:ea typeface="Arial"/>
                 <a:cs typeface="Arial"/>
               </a:rPr>
+              <a:t xml:space="preserve">Three events, three different right answers, none of them success or failure. If your dashboard only has two states, it is hiding the most interesting one.</a:t>
+            </a:r>
+            <a:endParaRPr lang="en-US" sz="1200"/>
+          </a:p>
+          <a:p>
+            <a:pPr marL="0" indent="0">
+              <a:lnSpc>
+                <a:spcPts val="1560"/>
+              </a:lnSpc>
+              <a:spcAft>
+                <a:spcPts val="0"/>
+              </a:spcAft>
+              <a:buNone/>
+            </a:pPr>
+            <a:r>
+              <a:rPr lang="en-US" sz="1200" b="0">
+                <a:solidFill>
+                  <a:srgbClr val="202b33"/>
+                </a:solidFill>
+                <a:latin typeface="Arial"/>
+                <a:ea typeface="Arial"/>
+                <a:cs typeface="Arial"/>
+              </a:rPr>
               <a:t xml:space="preserve"/>
             </a:r>
             <a:endParaRPr lang="en-US" sz="1200"/>
@@ -5856,29 +3812,6 @@
                 <a:ea typeface="Arial"/>
                 <a:cs typeface="Arial"/>
               </a:rPr>
-              <a:t xml:space="preserve">Show {zip:"02108"} and {postal_code:"02108"}, then {status:"pending"}. Ask what evidence is missing in each. Two answers, then move.</a:t>
-            </a:r>
-            <a:endParaRPr lang="en-US" sz="1200"/>
-          </a:p>
-          <a:p>
-            <a:pPr marL="0" indent="0">
-              <a:lnSpc>
-                <a:spcPts val="1560"/>
-              </a:lnSpc>
-              <a:spcAft>
-                <a:spcPts val="0"/>
-              </a:spcAft>
-              <a:buNone/>
-            </a:pPr>
-            <a:r>
-              <a:rPr lang="en-US" sz="1200" b="0">
-                <a:solidFill>
-                  <a:srgbClr val="202b33"/>
-                </a:solidFill>
-                <a:latin typeface="Arial"/>
-                <a:ea typeface="Arial"/>
-                <a:cs typeface="Arial"/>
-              </a:rPr>
               <a:t xml:space="preserve"/>
             </a:r>
             <a:endParaRPr lang="en-US" sz="1200"/>
@@ -5902,7 +3835,76 @@
                 <a:ea typeface="Arial"/>
                 <a:cs typeface="Arial"/>
               </a:rPr>
-              <a:t xml:space="preserve">Bridge: a repair ships as a versioned artifact with a rollback, and it has to pass fixtures it did not write.</a:t>
+              <a:t xml:space="preserve"/>
+            </a:r>
+            <a:endParaRPr lang="en-US" sz="1200"/>
+          </a:p>
+          <a:p>
+            <a:pPr marL="0" indent="0">
+              <a:lnSpc>
+                <a:spcPts val="1560"/>
+              </a:lnSpc>
+              <a:spcAft>
+                <a:spcPts val="0"/>
+              </a:spcAft>
+              <a:buNone/>
+            </a:pPr>
+            <a:r>
+              <a:rPr lang="en-US" sz="1200" b="0">
+                <a:solidFill>
+                  <a:srgbClr val="202b33"/>
+                </a:solidFill>
+                <a:latin typeface="Arial"/>
+                <a:ea typeface="Arial"/>
+                <a:cs typeface="Arial"/>
+              </a:rPr>
+              <a:t xml:space="preserve">Five minutes from demo.md. Reveal fixtures before expected results. Ask the room for the next decision before showing it.</a:t>
+            </a:r>
+            <a:endParaRPr lang="en-US" sz="1200"/>
+          </a:p>
+          <a:p>
+            <a:pPr marL="0" indent="0">
+              <a:lnSpc>
+                <a:spcPts val="1560"/>
+              </a:lnSpc>
+              <a:spcAft>
+                <a:spcPts val="0"/>
+              </a:spcAft>
+              <a:buNone/>
+            </a:pPr>
+            <a:r>
+              <a:rPr lang="en-US" sz="1200" b="0">
+                <a:solidFill>
+                  <a:srgbClr val="202b33"/>
+                </a:solidFill>
+                <a:latin typeface="Arial"/>
+                <a:ea typeface="Arial"/>
+                <a:cs typeface="Arial"/>
+              </a:rPr>
+              <a:t xml:space="preserve"/>
+            </a:r>
+            <a:endParaRPr lang="en-US" sz="1200"/>
+          </a:p>
+          <a:p>
+            <a:pPr marL="0" indent="0">
+              <a:lnSpc>
+                <a:spcPts val="1560"/>
+              </a:lnSpc>
+              <a:spcAft>
+                <a:spcPts val="0"/>
+              </a:spcAft>
+              <a:buNone/>
+            </a:pPr>
+            <a:r>
+              <a:rPr lang="en-US" sz="1200" b="0">
+                <a:solidFill>
+                  <a:srgbClr val="202b33"/>
+                </a:solidFill>
+                <a:latin typeface="Arial"/>
+                <a:ea typeface="Arial"/>
+                <a:cs typeface="Arial"/>
+              </a:rPr>
+              <a:t xml:space="preserve">Bridge: the same orchestrator can ask for its own scale inside a per-customer budget; that is slide 11 in the long version, and the mechanics are a companion talk.</a:t>
             </a:r>
             <a:endParaRPr lang="en-US" sz="1200"/>
           </a:p>
@@ -6015,7 +4017,7 @@
                 <a:ea typeface="Arial"/>
                 <a:cs typeface="Arial"/>
               </a:rPr>
-              <a:t xml:space="preserve">Source slide 10. 08:30 to 11:30</a:t>
+              <a:t xml:space="preserve">Source slide 15. 12:45 to 15:00</a:t>
             </a:r>
             <a:endParaRPr lang="en-US" sz="1200"/>
           </a:p>
@@ -6061,7 +4063,7 @@
                 <a:ea typeface="Arial"/>
                 <a:cs typeface="Arial"/>
               </a:rPr>
-              <a:t xml:space="preserve">Rename → validated mapping, canary</a:t>
+              <a:t xml:space="preserve">Conjure exactly enough</a:t>
             </a:r>
             <a:endParaRPr lang="en-US" sz="1200"/>
           </a:p>
@@ -6107,7 +4109,7 @@
                 <a:ea typeface="Arial"/>
                 <a:cs typeface="Arial"/>
               </a:rPr>
-              <a:t xml:space="preserve">Unknown status → quarantine, owner</a:t>
+              <a:t xml:space="preserve">Prove the repair</a:t>
             </a:r>
             <a:endParaRPr lang="en-US" sz="1200"/>
           </a:p>
@@ -6153,7 +4155,7 @@
                 <a:ea typeface="Arial"/>
                 <a:cs typeface="Arial"/>
               </a:rPr>
-              <a:t xml:space="preserve">Lost response → reconcile, hold the reservation</a:t>
+              <a:t xml:space="preserve">Remember the known case</a:t>
             </a:r>
             <a:endParaRPr lang="en-US" sz="1200"/>
           </a:p>
@@ -6199,7 +4201,7 @@
                 <a:ea typeface="Arial"/>
                 <a:cs typeface="Arial"/>
               </a:rPr>
-              <a:t xml:space="preserve">Run the design. The rename has contract evidence. The conjured diff agent proposes copy-string; now reveal the fixtures one at a time and let the room reject the one that must not be repaired. Passing both, policy permits a canary of that mapping version and the job continues for matching records.</a:t>
+              <a:t xml:space="preserve">And return to the assistant with everything. It is still coming; nothing on these slides stops it, and I would not want to. What changed is how many of its pathways are live at once. Each job gets a small agent with a tailored prompt, a short tool list, a hard budget, and a log of every time it asked for more. That is the strategy I believe in for the next few years: not one agent holding every combination, which nobody can check, but many small ones you can afford to.</a:t>
             </a:r>
             <a:endParaRPr lang="en-US" sz="1200"/>
           </a:p>
@@ -6245,7 +4247,7 @@
                 <a:ea typeface="Arial"/>
                 <a:cs typeface="Arial"/>
               </a:rPr>
-              <a:t xml:space="preserve">The status change has no semantic evidence. The job isolates affected records, reports what is incomplete, and hands an owner the samples and the exact question.</a:t>
+              <a:t xml:space="preserve">Pick one integration that already costs your team mornings. Give it a conjured agent with a bounded way to investigate, a test it did not write, and a place to record what happened. Or start with one reporting agent: keep its execution observations, make it check them before returning work, and measure whether the same mistake comes back. That is enough to start.</a:t>
             </a:r>
             <a:endParaRPr lang="en-US" sz="1200"/>
           </a:p>
@@ -6291,29 +4293,6 @@
                 <a:ea typeface="Arial"/>
                 <a:cs typeface="Arial"/>
               </a:rPr>
-              <a:t xml:space="preserve">The provider timeout has an uncertain outcome. The controller queries the saved job ID instead of submitting again, and where it cannot, it holds the unresolved operation and its reservation.</a:t>
-            </a:r>
-            <a:endParaRPr lang="en-US" sz="1200"/>
-          </a:p>
-          <a:p>
-            <a:pPr marL="0" indent="0">
-              <a:lnSpc>
-                <a:spcPts val="1560"/>
-              </a:lnSpc>
-              <a:spcAft>
-                <a:spcPts val="0"/>
-              </a:spcAft>
-              <a:buNone/>
-            </a:pPr>
-            <a:r>
-              <a:rPr lang="en-US" sz="1200" b="0">
-                <a:solidFill>
-                  <a:srgbClr val="202b33"/>
-                </a:solidFill>
-                <a:latin typeface="Arial"/>
-                <a:ea typeface="Arial"/>
-                <a:cs typeface="Arial"/>
-              </a:rPr>
               <a:t xml:space="preserve"/>
             </a:r>
             <a:endParaRPr lang="en-US" sz="1200"/>
@@ -6337,29 +4316,6 @@
                 <a:ea typeface="Arial"/>
                 <a:cs typeface="Arial"/>
               </a:rPr>
-              <a:t xml:space="preserve">Three events, three different right answers, none of them success or failure. If your dashboard only has two states, it is hiding the most interesting one.</a:t>
-            </a:r>
-            <a:endParaRPr lang="en-US" sz="1200"/>
-          </a:p>
-          <a:p>
-            <a:pPr marL="0" indent="0">
-              <a:lnSpc>
-                <a:spcPts val="1560"/>
-              </a:lnSpc>
-              <a:spcAft>
-                <a:spcPts val="0"/>
-              </a:spcAft>
-              <a:buNone/>
-            </a:pPr>
-            <a:r>
-              <a:rPr lang="en-US" sz="1200" b="0">
-                <a:solidFill>
-                  <a:srgbClr val="202b33"/>
-                </a:solidFill>
-                <a:latin typeface="Arial"/>
-                <a:ea typeface="Arial"/>
-                <a:cs typeface="Arial"/>
-              </a:rPr>
               <a:t xml:space="preserve"/>
             </a:r>
             <a:endParaRPr lang="en-US" sz="1200"/>
@@ -6383,6 +4339,29 @@
                 <a:ea typeface="Arial"/>
                 <a:cs typeface="Arial"/>
               </a:rPr>
+              <a:t xml:space="preserve">Land on the third line. Stop talking.</a:t>
+            </a:r>
+            <a:endParaRPr lang="en-US" sz="1200"/>
+          </a:p>
+          <a:p>
+            <a:pPr marL="0" indent="0">
+              <a:lnSpc>
+                <a:spcPts val="1560"/>
+              </a:lnSpc>
+              <a:spcAft>
+                <a:spcPts val="0"/>
+              </a:spcAft>
+              <a:buNone/>
+            </a:pPr>
+            <a:r>
+              <a:rPr lang="en-US" sz="1200" b="0">
+                <a:solidFill>
+                  <a:srgbClr val="202b33"/>
+                </a:solidFill>
+                <a:latin typeface="Arial"/>
+                <a:ea typeface="Arial"/>
+                <a:cs typeface="Arial"/>
+              </a:rPr>
               <a:t xml:space="preserve"/>
             </a:r>
             <a:endParaRPr lang="en-US" sz="1200"/>
@@ -6407,75 +4386,6 @@
                 <a:cs typeface="Arial"/>
               </a:rPr>
               <a:t xml:space="preserve"/>
-            </a:r>
-            <a:endParaRPr lang="en-US" sz="1200"/>
-          </a:p>
-          <a:p>
-            <a:pPr marL="0" indent="0">
-              <a:lnSpc>
-                <a:spcPts val="1560"/>
-              </a:lnSpc>
-              <a:spcAft>
-                <a:spcPts val="0"/>
-              </a:spcAft>
-              <a:buNone/>
-            </a:pPr>
-            <a:r>
-              <a:rPr lang="en-US" sz="1200" b="0">
-                <a:solidFill>
-                  <a:srgbClr val="202b33"/>
-                </a:solidFill>
-                <a:latin typeface="Arial"/>
-                <a:ea typeface="Arial"/>
-                <a:cs typeface="Arial"/>
-              </a:rPr>
-              <a:t xml:space="preserve">Five minutes from demo.md. Reveal fixtures before expected results. Ask the room for the next decision before showing it.</a:t>
-            </a:r>
-            <a:endParaRPr lang="en-US" sz="1200"/>
-          </a:p>
-          <a:p>
-            <a:pPr marL="0" indent="0">
-              <a:lnSpc>
-                <a:spcPts val="1560"/>
-              </a:lnSpc>
-              <a:spcAft>
-                <a:spcPts val="0"/>
-              </a:spcAft>
-              <a:buNone/>
-            </a:pPr>
-            <a:r>
-              <a:rPr lang="en-US" sz="1200" b="0">
-                <a:solidFill>
-                  <a:srgbClr val="202b33"/>
-                </a:solidFill>
-                <a:latin typeface="Arial"/>
-                <a:ea typeface="Arial"/>
-                <a:cs typeface="Arial"/>
-              </a:rPr>
-              <a:t xml:space="preserve"/>
-            </a:r>
-            <a:endParaRPr lang="en-US" sz="1200"/>
-          </a:p>
-          <a:p>
-            <a:pPr marL="0" indent="0">
-              <a:lnSpc>
-                <a:spcPts val="1560"/>
-              </a:lnSpc>
-              <a:spcAft>
-                <a:spcPts val="0"/>
-              </a:spcAft>
-              <a:buNone/>
-            </a:pPr>
-            <a:r>
-              <a:rPr lang="en-US" sz="1200" b="0">
-                <a:solidFill>
-                  <a:srgbClr val="202b33"/>
-                </a:solidFill>
-                <a:latin typeface="Arial"/>
-                <a:ea typeface="Arial"/>
-                <a:cs typeface="Arial"/>
-              </a:rPr>
-              <a:t xml:space="preserve">Bridge: the same orchestrator can ask for its own scale inside a per-customer budget; that is slide 11 in the long version, and the mechanics are a companion talk.</a:t>
             </a:r>
             <a:endParaRPr lang="en-US" sz="1200"/>
           </a:p>
@@ -6760,7 +4670,7 @@
                 <a:ea typeface="Arial"/>
                 <a:cs typeface="Arial"/>
               </a:rPr>
-              <a:t xml:space="preserve">8 source sections</a:t>
+              <a:t xml:space="preserve">7 source sections</a:t>
             </a:r>
             <a:endParaRPr lang="en-US" sz="1575"/>
           </a:p>
@@ -6963,7 +4873,7 @@
                 <a:ea typeface="Arial"/>
                 <a:cs typeface="Arial"/>
               </a:rPr>
-              <a:t xml:space="preserve">07 / 08    SOURCE SLIDE 14</a:t>
+              <a:t xml:space="preserve">SOURCE REFERENCES</a:t>
             </a:r>
             <a:endParaRPr lang="en-US" sz="1050"/>
           </a:p>
@@ -7012,7 +4922,7 @@
                 <a:ea typeface="Arial"/>
                 <a:cs typeface="Arial"/>
               </a:rPr>
-              <a:t xml:space="preserve">Start smaller: remember what happened</a:t>
+              <a:t xml:space="preserve">References</a:t>
             </a:r>
             <a:endParaRPr lang="en-US" sz="2550"/>
           </a:p>
@@ -7061,7 +4971,7 @@
                 <a:ea typeface="Arial"/>
                 <a:cs typeface="Arial"/>
               </a:rPr>
-              <a:t xml:space="preserve">Before returning: check relevant memory and</a:t>
+              <a:t xml:space="preserve">Saltzer and Schroeder (1975), The</a:t>
             </a:r>
             <a:endParaRPr lang="en-US" sz="1500"/>
           </a:p>
@@ -7084,7 +4994,7 @@
                 <a:ea typeface="Arial"/>
                 <a:cs typeface="Arial"/>
               </a:rPr>
-              <a:t xml:space="preserve">correct known mistakes</a:t>
+              <a:t xml:space="preserve">Protection of Information in Computer</a:t>
             </a:r>
             <a:endParaRPr lang="en-US" sz="1500"/>
           </a:p>
@@ -7107,7 +5017,7 @@
                 <a:ea typeface="Arial"/>
                 <a:cs typeface="Arial"/>
               </a:rPr>
-              <a:t xml:space="preserve"/>
+              <a:t xml:space="preserve">Systems —</a:t>
             </a:r>
             <a:endParaRPr lang="en-US" sz="1500"/>
           </a:p>
@@ -7130,329 +5040,7 @@
                 <a:ea typeface="Arial"/>
                 <a:cs typeface="Arial"/>
               </a:rPr>
-              <a:t xml:space="preserve">After execution: record checks, outcome,</a:t>
-            </a:r>
-            <a:endParaRPr lang="en-US" sz="1500"/>
-          </a:p>
-          <a:p>
-            <a:pPr marL="0" indent="0">
-              <a:lnSpc>
-                <a:spcPts val="1950"/>
-              </a:lnSpc>
-              <a:spcAft>
-                <a:spcPts val="0"/>
-              </a:spcAft>
-              <a:buNone/>
-            </a:pPr>
-            <a:r>
-              <a:rPr lang="en-US" sz="1500" b="0">
-                <a:solidFill>
-                  <a:srgbClr val="202B33"/>
-                </a:solidFill>
-                <a:latin typeface="Arial"/>
-                <a:ea typeface="Arial"/>
-                <a:cs typeface="Arial"/>
-              </a:rPr>
-              <a:t xml:space="preserve">correction and frequency</a:t>
-            </a:r>
-            <a:endParaRPr lang="en-US" sz="1500"/>
-          </a:p>
-          <a:p>
-            <a:pPr marL="0" indent="0">
-              <a:lnSpc>
-                <a:spcPts val="1950"/>
-              </a:lnSpc>
-              <a:spcAft>
-                <a:spcPts val="0"/>
-              </a:spcAft>
-              <a:buNone/>
-            </a:pPr>
-            <a:r>
-              <a:rPr lang="en-US" sz="1500" b="0">
-                <a:solidFill>
-                  <a:srgbClr val="202B33"/>
-                </a:solidFill>
-                <a:latin typeface="Arial"/>
-                <a:ea typeface="Arial"/>
-                <a:cs typeface="Arial"/>
-              </a:rPr>
-              <a:t xml:space="preserve"/>
-            </a:r>
-            <a:endParaRPr lang="en-US" sz="1500"/>
-          </a:p>
-          <a:p>
-            <a:pPr marL="0" indent="0">
-              <a:lnSpc>
-                <a:spcPts val="1950"/>
-              </a:lnSpc>
-              <a:spcAft>
-                <a:spcPts val="0"/>
-              </a:spcAft>
-              <a:buNone/>
-            </a:pPr>
-            <a:r>
-              <a:rPr lang="en-US" sz="1500" b="0">
-                <a:solidFill>
-                  <a:srgbClr val="202B33"/>
-                </a:solidFill>
-                <a:latin typeface="Arial"/>
-                <a:ea typeface="Arial"/>
-                <a:cs typeface="Arial"/>
-              </a:rPr>
-              <a:t xml:space="preserve">Generated, executed and verified are</a:t>
-            </a:r>
-            <a:endParaRPr lang="en-US" sz="1500"/>
-          </a:p>
-          <a:p>
-            <a:pPr marL="0" indent="0">
-              <a:lnSpc>
-                <a:spcPts val="1950"/>
-              </a:lnSpc>
-              <a:spcAft>
-                <a:spcPts val="0"/>
-              </a:spcAft>
-              <a:buNone/>
-            </a:pPr>
-            <a:r>
-              <a:rPr lang="en-US" sz="1500" b="0">
-                <a:solidFill>
-                  <a:srgbClr val="202B33"/>
-                </a:solidFill>
-                <a:latin typeface="Arial"/>
-                <a:ea typeface="Arial"/>
-                <a:cs typeface="Arial"/>
-              </a:rPr>
-              <a:t xml:space="preserve">different states</a:t>
-            </a:r>
-            <a:endParaRPr lang="en-US" sz="1500"/>
-          </a:p>
-          <a:p>
-            <a:pPr marL="0" indent="0">
-              <a:lnSpc>
-                <a:spcPts val="1950"/>
-              </a:lnSpc>
-              <a:spcAft>
-                <a:spcPts val="0"/>
-              </a:spcAft>
-              <a:buNone/>
-            </a:pPr>
-            <a:r>
-              <a:rPr lang="en-US" sz="1500" b="0">
-                <a:solidFill>
-                  <a:srgbClr val="202B33"/>
-                </a:solidFill>
-                <a:latin typeface="Arial"/>
-                <a:ea typeface="Arial"/>
-                <a:cs typeface="Arial"/>
-              </a:rPr>
-              <a:t xml:space="preserve"/>
-            </a:r>
-            <a:endParaRPr lang="en-US" sz="1500"/>
-          </a:p>
-          <a:p>
-            <a:pPr marL="0" indent="0">
-              <a:lnSpc>
-                <a:spcPts val="1950"/>
-              </a:lnSpc>
-              <a:spcAft>
-                <a:spcPts val="0"/>
-              </a:spcAft>
-              <a:buNone/>
-            </a:pPr>
-            <a:r>
-              <a:rPr lang="en-US" sz="1500" b="0">
-                <a:solidFill>
-                  <a:srgbClr val="202B33"/>
-                </a:solidFill>
-                <a:latin typeface="Arial"/>
-                <a:ea typeface="Arial"/>
-                <a:cs typeface="Arial"/>
-              </a:rPr>
-              <a:t xml:space="preserve">Memory is evidence, never permission</a:t>
-            </a:r>
-            <a:endParaRPr lang="en-US" sz="1500"/>
-          </a:p>
-          <a:p>
-            <a:pPr marL="0" indent="0">
-              <a:lnSpc>
-                <a:spcPts val="1950"/>
-              </a:lnSpc>
-              <a:spcAft>
-                <a:spcPts val="0"/>
-              </a:spcAft>
-              <a:buNone/>
-            </a:pPr>
-            <a:r>
-              <a:rPr lang="en-US" sz="1500" b="0">
-                <a:solidFill>
-                  <a:srgbClr val="202B33"/>
-                </a:solidFill>
-                <a:latin typeface="Arial"/>
-                <a:ea typeface="Arial"/>
-                <a:cs typeface="Arial"/>
-              </a:rPr>
-              <a:t xml:space="preserve"/>
-            </a:r>
-            <a:endParaRPr lang="en-US" sz="1500"/>
-          </a:p>
-          <a:p>
-            <a:pPr marL="0" indent="0">
-              <a:lnSpc>
-                <a:spcPts val="1950"/>
-              </a:lnSpc>
-              <a:spcAft>
-                <a:spcPts val="0"/>
-              </a:spcAft>
-              <a:buNone/>
-            </a:pPr>
-            <a:r>
-              <a:rPr lang="en-US" sz="1500" b="0">
-                <a:solidFill>
-                  <a:srgbClr val="202B33"/>
-                </a:solidFill>
-                <a:latin typeface="Arial"/>
-                <a:ea typeface="Arial"/>
-                <a:cs typeface="Arial"/>
-              </a:rPr>
-              <a:t xml:space="preserve">You do not need the whole agent factory to</a:t>
-            </a:r>
-            <a:endParaRPr lang="en-US" sz="1500"/>
-          </a:p>
-          <a:p>
-            <a:pPr marL="0" indent="0">
-              <a:lnSpc>
-                <a:spcPts val="1950"/>
-              </a:lnSpc>
-              <a:spcAft>
-                <a:spcPts val="0"/>
-              </a:spcAft>
-              <a:buNone/>
-            </a:pPr>
-            <a:r>
-              <a:rPr lang="en-US" sz="1500" b="0">
-                <a:solidFill>
-                  <a:srgbClr val="202B33"/>
-                </a:solidFill>
-                <a:latin typeface="Arial"/>
-                <a:ea typeface="Arial"/>
-                <a:cs typeface="Arial"/>
-              </a:rPr>
-              <a:t xml:space="preserve">start. Take one agent that writes SQL,</a:t>
-            </a:r>
-            <a:endParaRPr lang="en-US" sz="1500"/>
-          </a:p>
-          <a:p>
-            <a:pPr marL="0" indent="0">
-              <a:lnSpc>
-                <a:spcPts val="1950"/>
-              </a:lnSpc>
-              <a:spcAft>
-                <a:spcPts val="0"/>
-              </a:spcAft>
-              <a:buNone/>
-            </a:pPr>
-            <a:r>
-              <a:rPr lang="en-US" sz="1500" b="0">
-                <a:solidFill>
-                  <a:srgbClr val="202B33"/>
-                </a:solidFill>
-                <a:latin typeface="Arial"/>
-                <a:ea typeface="Arial"/>
-                <a:cs typeface="Arial"/>
-              </a:rPr>
-              <a:t xml:space="preserve">builds reports, runs shell commands or</a:t>
-            </a:r>
-            <a:endParaRPr lang="en-US" sz="1500"/>
-          </a:p>
-          <a:p>
-            <a:pPr marL="0" indent="0">
-              <a:lnSpc>
-                <a:spcPts val="1950"/>
-              </a:lnSpc>
-              <a:spcAft>
-                <a:spcPts val="0"/>
-              </a:spcAft>
-              <a:buNone/>
-            </a:pPr>
-            <a:r>
-              <a:rPr lang="en-US" sz="1500" b="0">
-                <a:solidFill>
-                  <a:srgbClr val="202B33"/>
-                </a:solidFill>
-                <a:latin typeface="Arial"/>
-                <a:ea typeface="Arial"/>
-                <a:cs typeface="Arial"/>
-              </a:rPr>
-              <a:t xml:space="preserve">generates scripted API actions. Give it</a:t>
-            </a:r>
-            <a:endParaRPr lang="en-US" sz="1500"/>
-          </a:p>
-          <a:p>
-            <a:pPr marL="0" indent="0">
-              <a:lnSpc>
-                <a:spcPts val="1950"/>
-              </a:lnSpc>
-              <a:spcAft>
-                <a:spcPts val="0"/>
-              </a:spcAft>
-              <a:buNone/>
-            </a:pPr>
-            <a:r>
-              <a:rPr lang="en-US" sz="1500" b="0">
-                <a:solidFill>
-                  <a:srgbClr val="202B33"/>
-                </a:solidFill>
-                <a:latin typeface="Arial"/>
-                <a:ea typeface="Arial"/>
-                <a:cs typeface="Arial"/>
-              </a:rPr>
-              <a:t xml:space="preserve">working memory for this job: the goal,</a:t>
-            </a:r>
-            <a:endParaRPr lang="en-US" sz="1500"/>
-          </a:p>
-          <a:p>
-            <a:pPr marL="0" indent="0">
-              <a:lnSpc>
-                <a:spcPts val="1950"/>
-              </a:lnSpc>
-              <a:spcAft>
-                <a:spcPts val="0"/>
-              </a:spcAft>
-              <a:buNone/>
-            </a:pPr>
-            <a:r>
-              <a:rPr lang="en-US" sz="1500" b="0">
-                <a:solidFill>
-                  <a:srgbClr val="202B33"/>
-                </a:solidFill>
-                <a:latin typeface="Arial"/>
-                <a:ea typeface="Arial"/>
-                <a:cs typeface="Arial"/>
-              </a:rPr>
-              <a:t xml:space="preserve">constraints, draft and unresolved checks.</a:t>
-            </a:r>
-            <a:endParaRPr lang="en-US" sz="1500"/>
-          </a:p>
-          <a:p>
-            <a:pPr marL="0" indent="0">
-              <a:lnSpc>
-                <a:spcPts val="1950"/>
-              </a:lnSpc>
-              <a:spcAft>
-                <a:spcPts val="0"/>
-              </a:spcAft>
-              <a:buNone/>
-            </a:pPr>
-            <a:r>
-              <a:rPr lang="en-US" sz="1500" b="0">
-                <a:solidFill>
-                  <a:srgbClr val="202B33"/>
-                </a:solidFill>
-                <a:latin typeface="Arial"/>
-                <a:ea typeface="Arial"/>
-                <a:cs typeface="Arial"/>
-              </a:rPr>
-              <a:t xml:space="preserve">Give it observational memory across jobs:</a:t>
+              <a:t xml:space="preserve">https://doi.org/10.1109/PROC.1975.9939),</a:t>
             </a:r>
             <a:endParaRPr lang="en-US" sz="1500"/>
           </a:p>
@@ -7501,7 +5089,7 @@
                 <a:ea typeface="Arial"/>
                 <a:cs typeface="Arial"/>
               </a:rPr>
-              <a:t xml:space="preserve">what it generated, what actually ran, what</a:t>
+              <a:t xml:space="preserve">Proceedings of the IEEE 63(9), 1278 to</a:t>
             </a:r>
             <a:endParaRPr lang="en-US" sz="1500"/>
           </a:p>
@@ -7524,7 +5112,7 @@
                 <a:ea typeface="Arial"/>
                 <a:cs typeface="Arial"/>
               </a:rPr>
-              <a:t xml:space="preserve">failed, and what the checks established.</a:t>
+              <a:t xml:space="preserve">1308. Least privilege is their principle</a:t>
             </a:r>
             <a:endParaRPr lang="en-US" sz="1500"/>
           </a:p>
@@ -7547,329 +5135,7 @@
                 <a:ea typeface="Arial"/>
                 <a:cs typeface="Arial"/>
               </a:rPr>
-              <a:t xml:space="preserve">Now ask it to consult that history before</a:t>
-            </a:r>
-            <a:endParaRPr lang="en-US" sz="1500"/>
-          </a:p>
-          <a:p>
-            <a:pPr marL="0" indent="0">
-              <a:lnSpc>
-                <a:spcPts val="1950"/>
-              </a:lnSpc>
-              <a:spcAft>
-                <a:spcPts val="0"/>
-              </a:spcAft>
-              <a:buNone/>
-            </a:pPr>
-            <a:r>
-              <a:rPr lang="en-US" sz="1500" b="0">
-                <a:solidFill>
-                  <a:srgbClr val="202B33"/>
-                </a:solidFill>
-                <a:latin typeface="Arial"/>
-                <a:ea typeface="Arial"/>
-                <a:cs typeface="Arial"/>
-              </a:rPr>
-              <a:t xml:space="preserve">it hands you the next answer.</a:t>
-            </a:r>
-            <a:endParaRPr lang="en-US" sz="1500"/>
-          </a:p>
-          <a:p>
-            <a:pPr marL="0" indent="0">
-              <a:lnSpc>
-                <a:spcPts val="1950"/>
-              </a:lnSpc>
-              <a:spcAft>
-                <a:spcPts val="0"/>
-              </a:spcAft>
-              <a:buNone/>
-            </a:pPr>
-            <a:r>
-              <a:rPr lang="en-US" sz="1500" b="0">
-                <a:solidFill>
-                  <a:srgbClr val="202B33"/>
-                </a:solidFill>
-                <a:latin typeface="Arial"/>
-                <a:ea typeface="Arial"/>
-                <a:cs typeface="Arial"/>
-              </a:rPr>
-              <a:t xml:space="preserve"/>
-            </a:r>
-            <a:endParaRPr lang="en-US" sz="1500"/>
-          </a:p>
-          <a:p>
-            <a:pPr marL="0" indent="0">
-              <a:lnSpc>
-                <a:spcPts val="1950"/>
-              </a:lnSpc>
-              <a:spcAft>
-                <a:spcPts val="0"/>
-              </a:spcAft>
-              <a:buNone/>
-            </a:pPr>
-            <a:r>
-              <a:rPr lang="en-US" sz="1500" b="0">
-                <a:solidFill>
-                  <a:srgbClr val="202B33"/>
-                </a:solidFill>
-                <a:latin typeface="Arial"/>
-                <a:ea typeface="Arial"/>
-                <a:cs typeface="Arial"/>
-              </a:rPr>
-              <a:t xml:space="preserve">Suppose a reporting query keeps forgetting</a:t>
-            </a:r>
-            <a:endParaRPr lang="en-US" sz="1500"/>
-          </a:p>
-          <a:p>
-            <a:pPr marL="0" indent="0">
-              <a:lnSpc>
-                <a:spcPts val="1950"/>
-              </a:lnSpc>
-              <a:spcAft>
-                <a:spcPts val="0"/>
-              </a:spcAft>
-              <a:buNone/>
-            </a:pPr>
-            <a:r>
-              <a:rPr lang="en-US" sz="1500" b="0">
-                <a:solidFill>
-                  <a:srgbClr val="202B33"/>
-                </a:solidFill>
-                <a:latin typeface="Arial"/>
-                <a:ea typeface="Arial"/>
-                <a:cs typeface="Arial"/>
-              </a:rPr>
-              <a:t xml:space="preserve">the tenant filter. It runs perfectly well;</a:t>
-            </a:r>
-            <a:endParaRPr lang="en-US" sz="1500"/>
-          </a:p>
-          <a:p>
-            <a:pPr marL="0" indent="0">
-              <a:lnSpc>
-                <a:spcPts val="1950"/>
-              </a:lnSpc>
-              <a:spcAft>
-                <a:spcPts val="0"/>
-              </a:spcAft>
-              <a:buNone/>
-            </a:pPr>
-            <a:r>
-              <a:rPr lang="en-US" sz="1500" b="0">
-                <a:solidFill>
-                  <a:srgbClr val="202B33"/>
-                </a:solidFill>
-                <a:latin typeface="Arial"/>
-                <a:ea typeface="Arial"/>
-                <a:cs typeface="Arial"/>
-              </a:rPr>
-              <a:t xml:space="preserve">it reports the wrong population. An</a:t>
-            </a:r>
-            <a:endParaRPr lang="en-US" sz="1500"/>
-          </a:p>
-          <a:p>
-            <a:pPr marL="0" indent="0">
-              <a:lnSpc>
-                <a:spcPts val="1950"/>
-              </a:lnSpc>
-              <a:spcAft>
-                <a:spcPts val="0"/>
-              </a:spcAft>
-              <a:buNone/>
-            </a:pPr>
-            <a:r>
-              <a:rPr lang="en-US" sz="1500" b="0">
-                <a:solidFill>
-                  <a:srgbClr val="202B33"/>
-                </a:solidFill>
-                <a:latin typeface="Arial"/>
-                <a:ea typeface="Arial"/>
-                <a:cs typeface="Arial"/>
-              </a:rPr>
-              <a:t xml:space="preserve">independent preflight check rejects it</a:t>
-            </a:r>
-            <a:endParaRPr lang="en-US" sz="1500"/>
-          </a:p>
-          <a:p>
-            <a:pPr marL="0" indent="0">
-              <a:lnSpc>
-                <a:spcPts val="1950"/>
-              </a:lnSpc>
-              <a:spcAft>
-                <a:spcPts val="0"/>
-              </a:spcAft>
-              <a:buNone/>
-            </a:pPr>
-            <a:r>
-              <a:rPr lang="en-US" sz="1500" b="0">
-                <a:solidFill>
-                  <a:srgbClr val="202B33"/>
-                </a:solidFill>
-                <a:latin typeface="Arial"/>
-                <a:ea typeface="Arial"/>
-                <a:cs typeface="Arial"/>
-              </a:rPr>
-              <a:t xml:space="preserve">before dispatch. Record the draft, the</a:t>
-            </a:r>
-            <a:endParaRPr lang="en-US" sz="1500"/>
-          </a:p>
-          <a:p>
-            <a:pPr marL="0" indent="0">
-              <a:lnSpc>
-                <a:spcPts val="1950"/>
-              </a:lnSpc>
-              <a:spcAft>
-                <a:spcPts val="0"/>
-              </a:spcAft>
-              <a:buNone/>
-            </a:pPr>
-            <a:r>
-              <a:rPr lang="en-US" sz="1500" b="0">
-                <a:solidFill>
-                  <a:srgbClr val="202B33"/>
-                </a:solidFill>
-                <a:latin typeface="Arial"/>
-                <a:ea typeface="Arial"/>
-                <a:cs typeface="Arial"/>
-              </a:rPr>
-              <a:t xml:space="preserve">failed check, the correction and the</a:t>
-            </a:r>
-            <a:endParaRPr lang="en-US" sz="1500"/>
-          </a:p>
-          <a:p>
-            <a:pPr marL="0" indent="0">
-              <a:lnSpc>
-                <a:spcPts val="1950"/>
-              </a:lnSpc>
-              <a:spcAft>
-                <a:spcPts val="0"/>
-              </a:spcAft>
-              <a:buNone/>
-            </a:pPr>
-            <a:r>
-              <a:rPr lang="en-US" sz="1500" b="0">
-                <a:solidFill>
-                  <a:srgbClr val="202B33"/>
-                </a:solidFill>
-                <a:latin typeface="Arial"/>
-                <a:ea typeface="Arial"/>
-                <a:cs typeface="Arial"/>
-              </a:rPr>
-              <a:t xml:space="preserve">eventual result. Next time, retrieve that</a:t>
-            </a:r>
-            <a:endParaRPr lang="en-US" sz="1500"/>
-          </a:p>
-          <a:p>
-            <a:pPr marL="0" indent="0">
-              <a:lnSpc>
-                <a:spcPts val="1950"/>
-              </a:lnSpc>
-              <a:spcAft>
-                <a:spcPts val="0"/>
-              </a:spcAft>
-              <a:buNone/>
-            </a:pPr>
-            <a:r>
-              <a:rPr lang="en-US" sz="1500" b="0">
-                <a:solidFill>
-                  <a:srgbClr val="202B33"/>
-                </a:solidFill>
-                <a:latin typeface="Arial"/>
-                <a:ea typeface="Arial"/>
-                <a:cs typeface="Arial"/>
-              </a:rPr>
-              <a:t xml:space="preserve">pattern while the agent is still drafting.</a:t>
-            </a:r>
-            <a:endParaRPr lang="en-US" sz="1500"/>
-          </a:p>
-          <a:p>
-            <a:pPr marL="0" indent="0">
-              <a:lnSpc>
-                <a:spcPts val="1950"/>
-              </a:lnSpc>
-              <a:spcAft>
-                <a:spcPts val="0"/>
-              </a:spcAft>
-              <a:buNone/>
-            </a:pPr>
-            <a:r>
-              <a:rPr lang="en-US" sz="1500" b="0">
-                <a:solidFill>
-                  <a:srgbClr val="202B33"/>
-                </a:solidFill>
-                <a:latin typeface="Arial"/>
-                <a:ea typeface="Arial"/>
-                <a:cs typeface="Arial"/>
-              </a:rPr>
-              <a:t xml:space="preserve">Fix the omission before returning the SQL,</a:t>
-            </a:r>
-            <a:endParaRPr lang="en-US" sz="1500"/>
-          </a:p>
-          <a:p>
-            <a:pPr marL="0" indent="0">
-              <a:lnSpc>
-                <a:spcPts val="1950"/>
-              </a:lnSpc>
-              <a:spcAft>
-                <a:spcPts val="0"/>
-              </a:spcAft>
-              <a:buNone/>
-            </a:pPr>
-            <a:r>
-              <a:rPr lang="en-US" sz="1500" b="0">
-                <a:solidFill>
-                  <a:srgbClr val="202B33"/>
-                </a:solidFill>
-                <a:latin typeface="Arial"/>
-                <a:ea typeface="Arial"/>
-                <a:cs typeface="Arial"/>
-              </a:rPr>
-              <a:t xml:space="preserve">then run the check again. That is adaptive</a:t>
-            </a:r>
-            <a:endParaRPr lang="en-US" sz="1500"/>
-          </a:p>
-          <a:p>
-            <a:pPr marL="0" indent="0">
-              <a:lnSpc>
-                <a:spcPts val="1950"/>
-              </a:lnSpc>
-              <a:spcAft>
-                <a:spcPts val="0"/>
-              </a:spcAft>
-              <a:buNone/>
-            </a:pPr>
-            <a:r>
-              <a:rPr lang="en-US" sz="1500" b="0">
-                <a:solidFill>
-                  <a:srgbClr val="202B33"/>
-                </a:solidFill>
-                <a:latin typeface="Arial"/>
-                <a:ea typeface="Arial"/>
-                <a:cs typeface="Arial"/>
-              </a:rPr>
-              <a:t xml:space="preserve">behavior you can build with one agent and a</a:t>
-            </a:r>
-            <a:endParaRPr lang="en-US" sz="1500"/>
-          </a:p>
-          <a:p>
-            <a:pPr marL="0" indent="0">
-              <a:lnSpc>
-                <a:spcPts val="1950"/>
-              </a:lnSpc>
-              <a:spcAft>
-                <a:spcPts val="0"/>
-              </a:spcAft>
-              <a:buNone/>
-            </a:pPr>
-            <a:r>
-              <a:rPr lang="en-US" sz="1500" b="0">
-                <a:solidFill>
-                  <a:srgbClr val="202B33"/>
-                </a:solidFill>
-                <a:latin typeface="Arial"/>
-                <a:ea typeface="Arial"/>
-                <a:cs typeface="Arial"/>
-              </a:rPr>
-              <a:t xml:space="preserve">small log.</a:t>
+              <a:t xml:space="preserve">(f.</a:t>
             </a:r>
             <a:endParaRPr lang="en-US" sz="1500"/>
           </a:p>
@@ -7968,2275 +5234,6 @@
                 <a:cs typeface="Arial"/>
               </a:rPr>
               <a:t xml:space="preserve">10</a:t>
-            </a:r>
-            <a:endParaRPr lang="en-US" sz="975"/>
-          </a:p>
-        </p:txBody>
-      </p:sp>
-    </p:spTree>
-  </p:cSld>
-  <p:clrMapOvr>
-    <a:masterClrMapping/>
-  </p:clrMapOvr>
-</p:sld>
-</file>
-
-<file path=ppt/slides/slide11.xml><?xml version="1.0" encoding="utf-8"?>
-<p:sld xmlns:a="http://schemas.openxmlformats.org/drawingml/2006/main" xmlns:r="http://schemas.openxmlformats.org/officeDocument/2006/relationships" xmlns:p="http://schemas.openxmlformats.org/presentationml/2006/main">
-  <p:cSld name="Slide 11">
-    <p:bg>
-      <p:bgPr>
-        <a:solidFill>
-          <a:srgbClr val="FAFAF7"/>
-        </a:solidFill>
-        <a:effectLst/>
-      </p:bgPr>
-    </p:bg>
-    <p:spTree>
-      <p:nvGrpSpPr>
-        <p:cNvPr id="1" name=""/>
-        <p:cNvGrpSpPr/>
-        <p:nvPr/>
-      </p:nvGrpSpPr>
-      <p:grpSpPr>
-        <a:xfrm>
-          <a:off x="0" y="0"/>
-          <a:ext cx="0" cy="0"/>
-          <a:chOff x="0" y="0"/>
-          <a:chExt cx="0" cy="0"/>
-        </a:xfrm>
-      </p:grpSpPr>
-      <p:sp>
-        <p:nvSpPr>
-          <p:cNvPr id="2" name="Text 2"/>
-          <p:cNvSpPr txBox="1"/>
-          <p:nvPr/>
-        </p:nvSpPr>
-        <p:spPr>
-          <a:xfrm>
-            <a:off x="457200" y="266700"/>
-            <a:ext cx="9144000" cy="228600"/>
-          </a:xfrm>
-          <a:prstGeom prst="rect">
-            <a:avLst/>
-          </a:prstGeom>
-          <a:noFill/>
-          <a:ln>
-            <a:noFill/>
-          </a:ln>
-        </p:spPr>
-        <p:txBody>
-          <a:bodyPr wrap="none" lIns="0" tIns="0" rIns="0" bIns="0" anchor="t">
-            <a:noAutofit/>
-          </a:bodyPr>
-          <a:lstStyle/>
-          <a:p>
-            <a:pPr marL="0" indent="0">
-              <a:lnSpc>
-                <a:spcPts val="1365"/>
-              </a:lnSpc>
-              <a:spcAft>
-                <a:spcPts val="0"/>
-              </a:spcAft>
-              <a:buNone/>
-            </a:pPr>
-            <a:r>
-              <a:rPr lang="en-US" sz="1050" b="1">
-                <a:solidFill>
-                  <a:srgbClr val="246957"/>
-                </a:solidFill>
-                <a:latin typeface="Arial"/>
-                <a:ea typeface="Arial"/>
-                <a:cs typeface="Arial"/>
-              </a:rPr>
-              <a:t xml:space="preserve">07 / 08    SOURCE SLIDE 14</a:t>
-            </a:r>
-            <a:endParaRPr lang="en-US" sz="1050"/>
-          </a:p>
-        </p:txBody>
-      </p:sp>
-      <p:sp>
-        <p:nvSpPr>
-          <p:cNvPr id="3" name="Text 3"/>
-          <p:cNvSpPr txBox="1"/>
-          <p:nvPr/>
-        </p:nvSpPr>
-        <p:spPr>
-          <a:xfrm>
-            <a:off x="457200" y="657225"/>
-            <a:ext cx="9144000" cy="1104900"/>
-          </a:xfrm>
-          <a:prstGeom prst="rect">
-            <a:avLst/>
-          </a:prstGeom>
-          <a:noFill/>
-          <a:ln>
-            <a:noFill/>
-          </a:ln>
-        </p:spPr>
-        <p:txBody>
-          <a:bodyPr wrap="none" lIns="0" tIns="0" rIns="0" bIns="0" anchor="t">
-            <a:noAutofit/>
-          </a:bodyPr>
-          <a:lstStyle/>
-          <a:p>
-            <a:pPr marL="0" indent="0">
-              <a:lnSpc>
-                <a:spcPts val="3060"/>
-              </a:lnSpc>
-              <a:spcAft>
-                <a:spcPts val="0"/>
-              </a:spcAft>
-              <a:buNone/>
-            </a:pPr>
-            <a:r>
-              <a:rPr lang="en-US" sz="2550" b="1">
-                <a:solidFill>
-                  <a:srgbClr val="202B33"/>
-                </a:solidFill>
-                <a:latin typeface="Arial"/>
-                <a:ea typeface="Arial"/>
-                <a:cs typeface="Arial"/>
-              </a:rPr>
-              <a:t xml:space="preserve">Start smaller: remember what happened (continued)</a:t>
-            </a:r>
-            <a:endParaRPr lang="en-US" sz="2550"/>
-          </a:p>
-        </p:txBody>
-      </p:sp>
-      <p:sp>
-        <p:nvSpPr>
-          <p:cNvPr id="4" name="Text 4"/>
-          <p:cNvSpPr txBox="1"/>
-          <p:nvPr/>
-        </p:nvSpPr>
-        <p:spPr>
-          <a:xfrm>
-            <a:off x="457200" y="1971675"/>
-            <a:ext cx="4352925" cy="5314950"/>
-          </a:xfrm>
-          <a:prstGeom prst="rect">
-            <a:avLst/>
-          </a:prstGeom>
-          <a:noFill/>
-          <a:ln>
-            <a:noFill/>
-          </a:ln>
-        </p:spPr>
-        <p:txBody>
-          <a:bodyPr wrap="none" lIns="0" tIns="0" rIns="0" bIns="0" anchor="t">
-            <a:noAutofit/>
-          </a:bodyPr>
-          <a:lstStyle/>
-          <a:p>
-            <a:pPr marL="0" indent="0">
-              <a:lnSpc>
-                <a:spcPts val="1950"/>
-              </a:lnSpc>
-              <a:spcAft>
-                <a:spcPts val="0"/>
-              </a:spcAft>
-              <a:buNone/>
-            </a:pPr>
-            <a:r>
-              <a:rPr lang="en-US" sz="1500" b="0">
-                <a:solidFill>
-                  <a:srgbClr val="202B33"/>
-                </a:solidFill>
-                <a:latin typeface="Arial"/>
-                <a:ea typeface="Arial"/>
-                <a:cs typeface="Arial"/>
-              </a:rPr>
-              <a:t xml:space="preserve">The instruction is simple: before returning</a:t>
-            </a:r>
-            <a:endParaRPr lang="en-US" sz="1500"/>
-          </a:p>
-          <a:p>
-            <a:pPr marL="0" indent="0">
-              <a:lnSpc>
-                <a:spcPts val="1950"/>
-              </a:lnSpc>
-              <a:spcAft>
-                <a:spcPts val="0"/>
-              </a:spcAft>
-              <a:buNone/>
-            </a:pPr>
-            <a:r>
-              <a:rPr lang="en-US" sz="1500" b="0">
-                <a:solidFill>
-                  <a:srgbClr val="202B33"/>
-                </a:solidFill>
-                <a:latin typeface="Arial"/>
-                <a:ea typeface="Arial"/>
-                <a:cs typeface="Arial"/>
-              </a:rPr>
-              <a:t xml:space="preserve">generated work, retrieve relevant memory</a:t>
-            </a:r>
-            <a:endParaRPr lang="en-US" sz="1500"/>
-          </a:p>
-          <a:p>
-            <a:pPr marL="0" indent="0">
-              <a:lnSpc>
-                <a:spcPts val="1950"/>
-              </a:lnSpc>
-              <a:spcAft>
-                <a:spcPts val="0"/>
-              </a:spcAft>
-              <a:buNone/>
-            </a:pPr>
-            <a:r>
-              <a:rPr lang="en-US" sz="1500" b="0">
-                <a:solidFill>
-                  <a:srgbClr val="202B33"/>
-                </a:solidFill>
-                <a:latin typeface="Arial"/>
-                <a:ea typeface="Arial"/>
-                <a:cs typeface="Arial"/>
-              </a:rPr>
-              <a:t xml:space="preserve">and correct applicable mistakes; after an</a:t>
-            </a:r>
-            <a:endParaRPr lang="en-US" sz="1500"/>
-          </a:p>
-          <a:p>
-            <a:pPr marL="0" indent="0">
-              <a:lnSpc>
-                <a:spcPts val="1950"/>
-              </a:lnSpc>
-              <a:spcAft>
-                <a:spcPts val="0"/>
-              </a:spcAft>
-              <a:buNone/>
-            </a:pPr>
-            <a:r>
-              <a:rPr lang="en-US" sz="1500" b="0">
-                <a:solidFill>
-                  <a:srgbClr val="202B33"/>
-                </a:solidFill>
-                <a:latin typeface="Arial"/>
-                <a:ea typeface="Arial"/>
-                <a:cs typeface="Arial"/>
-              </a:rPr>
-              <a:t xml:space="preserve">authorized execution, record the observed</a:t>
-            </a:r>
-            <a:endParaRPr lang="en-US" sz="1500"/>
-          </a:p>
-          <a:p>
-            <a:pPr marL="0" indent="0">
-              <a:lnSpc>
-                <a:spcPts val="1950"/>
-              </a:lnSpc>
-              <a:spcAft>
-                <a:spcPts val="0"/>
-              </a:spcAft>
-              <a:buNone/>
-            </a:pPr>
-            <a:r>
-              <a:rPr lang="en-US" sz="1500" b="0">
-                <a:solidFill>
-                  <a:srgbClr val="202B33"/>
-                </a:solidFill>
-                <a:latin typeface="Arial"/>
-                <a:ea typeface="Arial"/>
-                <a:cs typeface="Arial"/>
-              </a:rPr>
-              <a:t xml:space="preserve">outcome and update the pattern counts. If</a:t>
-            </a:r>
-            <a:endParaRPr lang="en-US" sz="1500"/>
-          </a:p>
-          <a:p>
-            <a:pPr marL="0" indent="0">
-              <a:lnSpc>
-                <a:spcPts val="1950"/>
-              </a:lnSpc>
-              <a:spcAft>
-                <a:spcPts val="0"/>
-              </a:spcAft>
-              <a:buNone/>
-            </a:pPr>
-            <a:r>
-              <a:rPr lang="en-US" sz="1500" b="0">
-                <a:solidFill>
-                  <a:srgbClr val="202B33"/>
-                </a:solidFill>
-                <a:latin typeface="Arial"/>
-                <a:ea typeface="Arial"/>
-                <a:cs typeface="Arial"/>
-              </a:rPr>
-              <a:t xml:space="preserve">you cannot check something safely, say what</a:t>
-            </a:r>
-            <a:endParaRPr lang="en-US" sz="1500"/>
-          </a:p>
-          <a:p>
-            <a:pPr marL="0" indent="0">
-              <a:lnSpc>
-                <a:spcPts val="1950"/>
-              </a:lnSpc>
-              <a:spcAft>
-                <a:spcPts val="0"/>
-              </a:spcAft>
-              <a:buNone/>
-            </a:pPr>
-            <a:r>
-              <a:rPr lang="en-US" sz="1500" b="0">
-                <a:solidFill>
-                  <a:srgbClr val="202B33"/>
-                </a:solidFill>
-                <a:latin typeface="Arial"/>
-                <a:ea typeface="Arial"/>
-                <a:cs typeface="Arial"/>
-              </a:rPr>
-              <a:t xml:space="preserve">remains unverified. Remembered output is</a:t>
-            </a:r>
-            <a:endParaRPr lang="en-US" sz="1500"/>
-          </a:p>
-          <a:p>
-            <a:pPr marL="0" indent="0">
-              <a:lnSpc>
-                <a:spcPts val="1950"/>
-              </a:lnSpc>
-              <a:spcAft>
-                <a:spcPts val="0"/>
-              </a:spcAft>
-              <a:buNone/>
-            </a:pPr>
-            <a:r>
-              <a:rPr lang="en-US" sz="1500" b="0">
-                <a:solidFill>
-                  <a:srgbClr val="202B33"/>
-                </a:solidFill>
-                <a:latin typeface="Arial"/>
-                <a:ea typeface="Arial"/>
-                <a:cs typeface="Arial"/>
-              </a:rPr>
-              <a:t xml:space="preserve">untrusted data and grants no new</a:t>
-            </a:r>
-            <a:endParaRPr lang="en-US" sz="1500"/>
-          </a:p>
-          <a:p>
-            <a:pPr marL="0" indent="0">
-              <a:lnSpc>
-                <a:spcPts val="1950"/>
-              </a:lnSpc>
-              <a:spcAft>
-                <a:spcPts val="0"/>
-              </a:spcAft>
-              <a:buNone/>
-            </a:pPr>
-            <a:r>
-              <a:rPr lang="en-US" sz="1500" b="0">
-                <a:solidFill>
-                  <a:srgbClr val="202B33"/>
-                </a:solidFill>
-                <a:latin typeface="Arial"/>
-                <a:ea typeface="Arial"/>
-                <a:cs typeface="Arial"/>
-              </a:rPr>
-              <a:t xml:space="preserve">permissions. The copyable prompt and a</a:t>
-            </a:r>
-            <a:endParaRPr lang="en-US" sz="1500"/>
-          </a:p>
-          <a:p>
-            <a:pPr marL="0" indent="0">
-              <a:lnSpc>
-                <a:spcPts val="1950"/>
-              </a:lnSpc>
-              <a:spcAft>
-                <a:spcPts val="0"/>
-              </a:spcAft>
-              <a:buNone/>
-            </a:pPr>
-            <a:r>
-              <a:rPr lang="en-US" sz="1500" b="0">
-                <a:solidFill>
-                  <a:srgbClr val="202B33"/>
-                </a:solidFill>
-                <a:latin typeface="Arial"/>
-                <a:ea typeface="Arial"/>
-                <a:cs typeface="Arial"/>
-              </a:rPr>
-              <a:t xml:space="preserve">small record format are in the handout.</a:t>
-            </a:r>
-            <a:endParaRPr lang="en-US" sz="1500"/>
-          </a:p>
-        </p:txBody>
-      </p:sp>
-      <p:sp>
-        <p:nvSpPr>
-          <p:cNvPr id="5" name="Text 5"/>
-          <p:cNvSpPr txBox="1"/>
-          <p:nvPr/>
-        </p:nvSpPr>
-        <p:spPr>
-          <a:xfrm>
-            <a:off x="5238750" y="1971675"/>
-            <a:ext cx="4362450" cy="5314950"/>
-          </a:xfrm>
-          <a:prstGeom prst="rect">
-            <a:avLst/>
-          </a:prstGeom>
-          <a:noFill/>
-          <a:ln>
-            <a:noFill/>
-          </a:ln>
-        </p:spPr>
-        <p:txBody>
-          <a:bodyPr wrap="none" lIns="0" tIns="0" rIns="0" bIns="0" anchor="t">
-            <a:noAutofit/>
-          </a:bodyPr>
-          <a:lstStyle/>
-          <a:p>
-            <a:pPr marL="0" indent="0">
-              <a:lnSpc>
-                <a:spcPts val="1950"/>
-              </a:lnSpc>
-              <a:spcAft>
-                <a:spcPts val="0"/>
-              </a:spcAft>
-              <a:buNone/>
-            </a:pPr>
-            <a:r>
-              <a:rPr lang="en-US" sz="1500" b="0">
-                <a:solidFill>
-                  <a:srgbClr val="202B33"/>
-                </a:solidFill>
-                <a:latin typeface="Arial"/>
-                <a:ea typeface="Arial"/>
-                <a:cs typeface="Arial"/>
-              </a:rPr>
-              <a:t xml:space="preserve"/>
-            </a:r>
-            <a:endParaRPr lang="en-US" sz="1500"/>
-          </a:p>
-          <a:p>
-            <a:pPr marL="0" indent="0">
-              <a:lnSpc>
-                <a:spcPts val="1950"/>
-              </a:lnSpc>
-              <a:spcAft>
-                <a:spcPts val="0"/>
-              </a:spcAft>
-              <a:buNone/>
-            </a:pPr>
-            <a:r>
-              <a:rPr lang="en-US" sz="1500" b="0">
-                <a:solidFill>
-                  <a:srgbClr val="202B33"/>
-                </a:solidFill>
-                <a:latin typeface="Arial"/>
-                <a:ea typeface="Arial"/>
-                <a:cs typeface="Arial"/>
-              </a:rPr>
-              <a:t xml:space="preserve">As patterns repeat, turn the reliable ones</a:t>
-            </a:r>
-            <a:endParaRPr lang="en-US" sz="1500"/>
-          </a:p>
-          <a:p>
-            <a:pPr marL="0" indent="0">
-              <a:lnSpc>
-                <a:spcPts val="1950"/>
-              </a:lnSpc>
-              <a:spcAft>
-                <a:spcPts val="0"/>
-              </a:spcAft>
-              <a:buNone/>
-            </a:pPr>
-            <a:r>
-              <a:rPr lang="en-US" sz="1500" b="0">
-                <a:solidFill>
-                  <a:srgbClr val="202B33"/>
-                </a:solidFill>
-                <a:latin typeface="Arial"/>
-                <a:ea typeface="Arial"/>
-                <a:cs typeface="Arial"/>
-              </a:rPr>
-              <a:t xml:space="preserve">into tested templates and adapters. The</a:t>
-            </a:r>
-            <a:endParaRPr lang="en-US" sz="1500"/>
-          </a:p>
-          <a:p>
-            <a:pPr marL="0" indent="0">
-              <a:lnSpc>
-                <a:spcPts val="1950"/>
-              </a:lnSpc>
-              <a:spcAft>
-                <a:spcPts val="0"/>
-              </a:spcAft>
-              <a:buNone/>
-            </a:pPr>
-            <a:r>
-              <a:rPr lang="en-US" sz="1500" b="0">
-                <a:solidFill>
-                  <a:srgbClr val="202B33"/>
-                </a:solidFill>
-                <a:latin typeface="Arial"/>
-                <a:ea typeface="Arial"/>
-                <a:cs typeface="Arial"/>
-              </a:rPr>
-              <a:t xml:space="preserve">runtime agent learns which evidence to</a:t>
-            </a:r>
-            <a:endParaRPr lang="en-US" sz="1500"/>
-          </a:p>
-          <a:p>
-            <a:pPr marL="0" indent="0">
-              <a:lnSpc>
-                <a:spcPts val="1950"/>
-              </a:lnSpc>
-              <a:spcAft>
-                <a:spcPts val="0"/>
-              </a:spcAft>
-              <a:buNone/>
-            </a:pPr>
-            <a:r>
-              <a:rPr lang="en-US" sz="1500" b="0">
-                <a:solidFill>
-                  <a:srgbClr val="202B33"/>
-                </a:solidFill>
-                <a:latin typeface="Arial"/>
-                <a:ea typeface="Arial"/>
-                <a:cs typeface="Arial"/>
-              </a:rPr>
-              <a:t xml:space="preserve">consult; the offline improvement loop</a:t>
-            </a:r>
-            <a:endParaRPr lang="en-US" sz="1500"/>
-          </a:p>
-          <a:p>
-            <a:pPr marL="0" indent="0">
-              <a:lnSpc>
-                <a:spcPts val="1950"/>
-              </a:lnSpc>
-              <a:spcAft>
-                <a:spcPts val="0"/>
-              </a:spcAft>
-              <a:buNone/>
-            </a:pPr>
-            <a:r>
-              <a:rPr lang="en-US" sz="1500" b="0">
-                <a:solidFill>
-                  <a:srgbClr val="202B33"/>
-                </a:solidFill>
-                <a:latin typeface="Arial"/>
-                <a:ea typeface="Arial"/>
-                <a:cs typeface="Arial"/>
-              </a:rPr>
-              <a:t xml:space="preserve">evaluates changes to the reusable</a:t>
-            </a:r>
-            <a:endParaRPr lang="en-US" sz="1500"/>
-          </a:p>
-          <a:p>
-            <a:pPr marL="0" indent="0">
-              <a:lnSpc>
-                <a:spcPts val="1950"/>
-              </a:lnSpc>
-              <a:spcAft>
-                <a:spcPts val="0"/>
-              </a:spcAft>
-              <a:buNone/>
-            </a:pPr>
-            <a:r>
-              <a:rPr lang="en-US" sz="1500" b="0">
-                <a:solidFill>
-                  <a:srgbClr val="202B33"/>
-                </a:solidFill>
-                <a:latin typeface="Arial"/>
-                <a:ea typeface="Arial"/>
-                <a:cs typeface="Arial"/>
-              </a:rPr>
-              <a:t xml:space="preserve">procedure. Once the known case is covered</a:t>
-            </a:r>
-            <a:endParaRPr lang="en-US" sz="1500"/>
-          </a:p>
-          <a:p>
-            <a:pPr marL="0" indent="0">
-              <a:lnSpc>
-                <a:spcPts val="1950"/>
-              </a:lnSpc>
-              <a:spcAft>
-                <a:spcPts val="0"/>
-              </a:spcAft>
-              <a:buNone/>
-            </a:pPr>
-            <a:r>
-              <a:rPr lang="en-US" sz="1500" b="0">
-                <a:solidFill>
-                  <a:srgbClr val="202B33"/>
-                </a:solidFill>
-                <a:latin typeface="Arial"/>
-                <a:ea typeface="Arial"/>
-                <a:cs typeface="Arial"/>
-              </a:rPr>
-              <a:t xml:space="preserve">by code, it need not spend another model</a:t>
-            </a:r>
-            <a:endParaRPr lang="en-US" sz="1500"/>
-          </a:p>
-          <a:p>
-            <a:pPr marL="0" indent="0">
-              <a:lnSpc>
-                <a:spcPts val="1950"/>
-              </a:lnSpc>
-              <a:spcAft>
-                <a:spcPts val="0"/>
-              </a:spcAft>
-              <a:buNone/>
-            </a:pPr>
-            <a:r>
-              <a:rPr lang="en-US" sz="1500" b="0">
-                <a:solidFill>
-                  <a:srgbClr val="202B33"/>
-                </a:solidFill>
-                <a:latin typeface="Arial"/>
-                <a:ea typeface="Arial"/>
-                <a:cs typeface="Arial"/>
-              </a:rPr>
-              <a:t xml:space="preserve">call rediscovering the rule.</a:t>
-            </a:r>
-            <a:endParaRPr lang="en-US" sz="1500"/>
-          </a:p>
-        </p:txBody>
-      </p:sp>
-      <p:sp>
-        <p:nvSpPr>
-          <p:cNvPr id="6" name="Text 6"/>
-          <p:cNvSpPr txBox="1"/>
-          <p:nvPr/>
-        </p:nvSpPr>
-        <p:spPr>
-          <a:xfrm>
-            <a:off x="457200" y="7486650"/>
-            <a:ext cx="8820150" cy="190500"/>
-          </a:xfrm>
-          <a:prstGeom prst="rect">
-            <a:avLst/>
-          </a:prstGeom>
-          <a:noFill/>
-          <a:ln>
-            <a:noFill/>
-          </a:ln>
-        </p:spPr>
-        <p:txBody>
-          <a:bodyPr wrap="none" lIns="0" tIns="0" rIns="0" bIns="0" anchor="t">
-            <a:noAutofit/>
-          </a:bodyPr>
-          <a:lstStyle/>
-          <a:p>
-            <a:pPr marL="0" indent="0">
-              <a:lnSpc>
-                <a:spcPts val="1268"/>
-              </a:lnSpc>
-              <a:spcAft>
-                <a:spcPts val="0"/>
-              </a:spcAft>
-              <a:buNone/>
-            </a:pPr>
-            <a:r>
-              <a:rPr lang="en-US" sz="975" b="0">
-                <a:solidFill>
-                  <a:srgbClr val="48555B"/>
-                </a:solidFill>
-                <a:latin typeface="Arial"/>
-                <a:ea typeface="Arial"/>
-                <a:cs typeface="Arial"/>
-              </a:rPr>
-              <a:t xml:space="preserve">Adaptive, agentic apps</a:t>
-            </a:r>
-            <a:endParaRPr lang="en-US" sz="975"/>
-          </a:p>
-        </p:txBody>
-      </p:sp>
-      <p:sp>
-        <p:nvSpPr>
-          <p:cNvPr id="7" name="Text 7"/>
-          <p:cNvSpPr txBox="1"/>
-          <p:nvPr/>
-        </p:nvSpPr>
-        <p:spPr>
-          <a:xfrm>
-            <a:off x="9391650" y="7486650"/>
-            <a:ext cx="238125" cy="190500"/>
-          </a:xfrm>
-          <a:prstGeom prst="rect">
-            <a:avLst/>
-          </a:prstGeom>
-          <a:noFill/>
-          <a:ln>
-            <a:noFill/>
-          </a:ln>
-        </p:spPr>
-        <p:txBody>
-          <a:bodyPr wrap="none" lIns="0" tIns="0" rIns="0" bIns="0" anchor="t">
-            <a:noAutofit/>
-          </a:bodyPr>
-          <a:lstStyle/>
-          <a:p>
-            <a:pPr marL="0" indent="0">
-              <a:lnSpc>
-                <a:spcPts val="1268"/>
-              </a:lnSpc>
-              <a:spcAft>
-                <a:spcPts val="0"/>
-              </a:spcAft>
-              <a:buNone/>
-            </a:pPr>
-            <a:r>
-              <a:rPr lang="en-US" sz="975" b="0">
-                <a:solidFill>
-                  <a:srgbClr val="48555B"/>
-                </a:solidFill>
-                <a:latin typeface="Arial"/>
-                <a:ea typeface="Arial"/>
-                <a:cs typeface="Arial"/>
-              </a:rPr>
-              <a:t xml:space="preserve">11</a:t>
-            </a:r>
-            <a:endParaRPr lang="en-US" sz="975"/>
-          </a:p>
-        </p:txBody>
-      </p:sp>
-    </p:spTree>
-  </p:cSld>
-  <p:clrMapOvr>
-    <a:masterClrMapping/>
-  </p:clrMapOvr>
-</p:sld>
-</file>
-
-<file path=ppt/slides/slide12.xml><?xml version="1.0" encoding="utf-8"?>
-<p:sld xmlns:a="http://schemas.openxmlformats.org/drawingml/2006/main" xmlns:r="http://schemas.openxmlformats.org/officeDocument/2006/relationships" xmlns:p="http://schemas.openxmlformats.org/presentationml/2006/main">
-  <p:cSld name="Slide 12">
-    <p:bg>
-      <p:bgPr>
-        <a:solidFill>
-          <a:srgbClr val="FAFAF7"/>
-        </a:solidFill>
-        <a:effectLst/>
-      </p:bgPr>
-    </p:bg>
-    <p:spTree>
-      <p:nvGrpSpPr>
-        <p:cNvPr id="1" name=""/>
-        <p:cNvGrpSpPr/>
-        <p:nvPr/>
-      </p:nvGrpSpPr>
-      <p:grpSpPr>
-        <a:xfrm>
-          <a:off x="0" y="0"/>
-          <a:ext cx="0" cy="0"/>
-          <a:chOff x="0" y="0"/>
-          <a:chExt cx="0" cy="0"/>
-        </a:xfrm>
-      </p:grpSpPr>
-      <p:sp>
-        <p:nvSpPr>
-          <p:cNvPr id="2" name="Text 2"/>
-          <p:cNvSpPr txBox="1"/>
-          <p:nvPr/>
-        </p:nvSpPr>
-        <p:spPr>
-          <a:xfrm>
-            <a:off x="457200" y="266700"/>
-            <a:ext cx="9144000" cy="228600"/>
-          </a:xfrm>
-          <a:prstGeom prst="rect">
-            <a:avLst/>
-          </a:prstGeom>
-          <a:noFill/>
-          <a:ln>
-            <a:noFill/>
-          </a:ln>
-        </p:spPr>
-        <p:txBody>
-          <a:bodyPr wrap="none" lIns="0" tIns="0" rIns="0" bIns="0" anchor="t">
-            <a:noAutofit/>
-          </a:bodyPr>
-          <a:lstStyle/>
-          <a:p>
-            <a:pPr marL="0" indent="0">
-              <a:lnSpc>
-                <a:spcPts val="1365"/>
-              </a:lnSpc>
-              <a:spcAft>
-                <a:spcPts val="0"/>
-              </a:spcAft>
-              <a:buNone/>
-            </a:pPr>
-            <a:r>
-              <a:rPr lang="en-US" sz="1050" b="1">
-                <a:solidFill>
-                  <a:srgbClr val="246957"/>
-                </a:solidFill>
-                <a:latin typeface="Arial"/>
-                <a:ea typeface="Arial"/>
-                <a:cs typeface="Arial"/>
-              </a:rPr>
-              <a:t xml:space="preserve">08 / 08    SOURCE SLIDE 15</a:t>
-            </a:r>
-            <a:endParaRPr lang="en-US" sz="1050"/>
-          </a:p>
-        </p:txBody>
-      </p:sp>
-      <p:sp>
-        <p:nvSpPr>
-          <p:cNvPr id="3" name="Text 3"/>
-          <p:cNvSpPr txBox="1"/>
-          <p:nvPr/>
-        </p:nvSpPr>
-        <p:spPr>
-          <a:xfrm>
-            <a:off x="457200" y="657225"/>
-            <a:ext cx="9144000" cy="1104900"/>
-          </a:xfrm>
-          <a:prstGeom prst="rect">
-            <a:avLst/>
-          </a:prstGeom>
-          <a:noFill/>
-          <a:ln>
-            <a:noFill/>
-          </a:ln>
-        </p:spPr>
-        <p:txBody>
-          <a:bodyPr wrap="none" lIns="0" tIns="0" rIns="0" bIns="0" anchor="t">
-            <a:noAutofit/>
-          </a:bodyPr>
-          <a:lstStyle/>
-          <a:p>
-            <a:pPr marL="0" indent="0">
-              <a:lnSpc>
-                <a:spcPts val="3060"/>
-              </a:lnSpc>
-              <a:spcAft>
-                <a:spcPts val="0"/>
-              </a:spcAft>
-              <a:buNone/>
-            </a:pPr>
-            <a:r>
-              <a:rPr lang="en-US" sz="2550" b="1">
-                <a:solidFill>
-                  <a:srgbClr val="202B33"/>
-                </a:solidFill>
-                <a:latin typeface="Arial"/>
-                <a:ea typeface="Arial"/>
-                <a:cs typeface="Arial"/>
-              </a:rPr>
-              <a:t xml:space="preserve">The next surprise should cost less</a:t>
-            </a:r>
-            <a:endParaRPr lang="en-US" sz="2550"/>
-          </a:p>
-        </p:txBody>
-      </p:sp>
-      <p:sp>
-        <p:nvSpPr>
-          <p:cNvPr id="4" name="Text 4"/>
-          <p:cNvSpPr txBox="1"/>
-          <p:nvPr/>
-        </p:nvSpPr>
-        <p:spPr>
-          <a:xfrm>
-            <a:off x="457200" y="1971675"/>
-            <a:ext cx="4352925" cy="5314950"/>
-          </a:xfrm>
-          <a:prstGeom prst="rect">
-            <a:avLst/>
-          </a:prstGeom>
-          <a:noFill/>
-          <a:ln>
-            <a:noFill/>
-          </a:ln>
-        </p:spPr>
-        <p:txBody>
-          <a:bodyPr wrap="none" lIns="0" tIns="0" rIns="0" bIns="0" anchor="t">
-            <a:noAutofit/>
-          </a:bodyPr>
-          <a:lstStyle/>
-          <a:p>
-            <a:pPr marL="0" indent="0">
-              <a:lnSpc>
-                <a:spcPts val="1950"/>
-              </a:lnSpc>
-              <a:spcAft>
-                <a:spcPts val="0"/>
-              </a:spcAft>
-              <a:buNone/>
-            </a:pPr>
-            <a:r>
-              <a:rPr lang="en-US" sz="1500" b="0">
-                <a:solidFill>
-                  <a:srgbClr val="202B33"/>
-                </a:solidFill>
-                <a:latin typeface="Arial"/>
-                <a:ea typeface="Arial"/>
-                <a:cs typeface="Arial"/>
-              </a:rPr>
-              <a:t xml:space="preserve">Conjure exactly enough</a:t>
-            </a:r>
-            <a:endParaRPr lang="en-US" sz="1500"/>
-          </a:p>
-          <a:p>
-            <a:pPr marL="0" indent="0">
-              <a:lnSpc>
-                <a:spcPts val="1950"/>
-              </a:lnSpc>
-              <a:spcAft>
-                <a:spcPts val="0"/>
-              </a:spcAft>
-              <a:buNone/>
-            </a:pPr>
-            <a:r>
-              <a:rPr lang="en-US" sz="1500" b="0">
-                <a:solidFill>
-                  <a:srgbClr val="202B33"/>
-                </a:solidFill>
-                <a:latin typeface="Arial"/>
-                <a:ea typeface="Arial"/>
-                <a:cs typeface="Arial"/>
-              </a:rPr>
-              <a:t xml:space="preserve"/>
-            </a:r>
-            <a:endParaRPr lang="en-US" sz="1500"/>
-          </a:p>
-          <a:p>
-            <a:pPr marL="0" indent="0">
-              <a:lnSpc>
-                <a:spcPts val="1950"/>
-              </a:lnSpc>
-              <a:spcAft>
-                <a:spcPts val="0"/>
-              </a:spcAft>
-              <a:buNone/>
-            </a:pPr>
-            <a:r>
-              <a:rPr lang="en-US" sz="1500" b="0">
-                <a:solidFill>
-                  <a:srgbClr val="202B33"/>
-                </a:solidFill>
-                <a:latin typeface="Arial"/>
-                <a:ea typeface="Arial"/>
-                <a:cs typeface="Arial"/>
-              </a:rPr>
-              <a:t xml:space="preserve">Prove the repair</a:t>
-            </a:r>
-            <a:endParaRPr lang="en-US" sz="1500"/>
-          </a:p>
-          <a:p>
-            <a:pPr marL="0" indent="0">
-              <a:lnSpc>
-                <a:spcPts val="1950"/>
-              </a:lnSpc>
-              <a:spcAft>
-                <a:spcPts val="0"/>
-              </a:spcAft>
-              <a:buNone/>
-            </a:pPr>
-            <a:r>
-              <a:rPr lang="en-US" sz="1500" b="0">
-                <a:solidFill>
-                  <a:srgbClr val="202B33"/>
-                </a:solidFill>
-                <a:latin typeface="Arial"/>
-                <a:ea typeface="Arial"/>
-                <a:cs typeface="Arial"/>
-              </a:rPr>
-              <a:t xml:space="preserve"/>
-            </a:r>
-            <a:endParaRPr lang="en-US" sz="1500"/>
-          </a:p>
-          <a:p>
-            <a:pPr marL="0" indent="0">
-              <a:lnSpc>
-                <a:spcPts val="1950"/>
-              </a:lnSpc>
-              <a:spcAft>
-                <a:spcPts val="0"/>
-              </a:spcAft>
-              <a:buNone/>
-            </a:pPr>
-            <a:r>
-              <a:rPr lang="en-US" sz="1500" b="0">
-                <a:solidFill>
-                  <a:srgbClr val="202B33"/>
-                </a:solidFill>
-                <a:latin typeface="Arial"/>
-                <a:ea typeface="Arial"/>
-                <a:cs typeface="Arial"/>
-              </a:rPr>
-              <a:t xml:space="preserve">Remember the known case</a:t>
-            </a:r>
-            <a:endParaRPr lang="en-US" sz="1500"/>
-          </a:p>
-          <a:p>
-            <a:pPr marL="0" indent="0">
-              <a:lnSpc>
-                <a:spcPts val="1950"/>
-              </a:lnSpc>
-              <a:spcAft>
-                <a:spcPts val="0"/>
-              </a:spcAft>
-              <a:buNone/>
-            </a:pPr>
-            <a:r>
-              <a:rPr lang="en-US" sz="1500" b="0">
-                <a:solidFill>
-                  <a:srgbClr val="202B33"/>
-                </a:solidFill>
-                <a:latin typeface="Arial"/>
-                <a:ea typeface="Arial"/>
-                <a:cs typeface="Arial"/>
-              </a:rPr>
-              <a:t xml:space="preserve"/>
-            </a:r>
-            <a:endParaRPr lang="en-US" sz="1500"/>
-          </a:p>
-          <a:p>
-            <a:pPr marL="0" indent="0">
-              <a:lnSpc>
-                <a:spcPts val="1950"/>
-              </a:lnSpc>
-              <a:spcAft>
-                <a:spcPts val="0"/>
-              </a:spcAft>
-              <a:buNone/>
-            </a:pPr>
-            <a:r>
-              <a:rPr lang="en-US" sz="1500" b="0">
-                <a:solidFill>
-                  <a:srgbClr val="202B33"/>
-                </a:solidFill>
-                <a:latin typeface="Arial"/>
-                <a:ea typeface="Arial"/>
-                <a:cs typeface="Arial"/>
-              </a:rPr>
-              <a:t xml:space="preserve">Return to the field that changed overnight.</a:t>
-            </a:r>
-            <a:endParaRPr lang="en-US" sz="1500"/>
-          </a:p>
-          <a:p>
-            <a:pPr marL="0" indent="0">
-              <a:lnSpc>
-                <a:spcPts val="1950"/>
-              </a:lnSpc>
-              <a:spcAft>
-                <a:spcPts val="0"/>
-              </a:spcAft>
-              <a:buNone/>
-            </a:pPr>
-            <a:r>
-              <a:rPr lang="en-US" sz="1500" b="0">
-                <a:solidFill>
-                  <a:srgbClr val="202B33"/>
-                </a:solidFill>
-                <a:latin typeface="Arial"/>
-                <a:ea typeface="Arial"/>
-                <a:cs typeface="Arial"/>
-              </a:rPr>
-              <a:t xml:space="preserve">We did not predict its spelling. We did</a:t>
-            </a:r>
-            <a:endParaRPr lang="en-US" sz="1500"/>
-          </a:p>
-          <a:p>
-            <a:pPr marL="0" indent="0">
-              <a:lnSpc>
-                <a:spcPts val="1950"/>
-              </a:lnSpc>
-              <a:spcAft>
-                <a:spcPts val="0"/>
-              </a:spcAft>
-              <a:buNone/>
-            </a:pPr>
-            <a:r>
-              <a:rPr lang="en-US" sz="1500" b="0">
-                <a:solidFill>
-                  <a:srgbClr val="202B33"/>
-                </a:solidFill>
-                <a:latin typeface="Arial"/>
-                <a:ea typeface="Arial"/>
-                <a:cs typeface="Arial"/>
-              </a:rPr>
-              <a:t xml:space="preserve">define what had to stay true, what evidence</a:t>
-            </a:r>
-            <a:endParaRPr lang="en-US" sz="1500"/>
-          </a:p>
-          <a:p>
-            <a:pPr marL="0" indent="0">
-              <a:lnSpc>
-                <a:spcPts val="1950"/>
-              </a:lnSpc>
-              <a:spcAft>
-                <a:spcPts val="0"/>
-              </a:spcAft>
-              <a:buNone/>
-            </a:pPr>
-            <a:r>
-              <a:rPr lang="en-US" sz="1500" b="0">
-                <a:solidFill>
-                  <a:srgbClr val="202B33"/>
-                </a:solidFill>
-                <a:latin typeface="Arial"/>
-                <a:ea typeface="Arial"/>
-                <a:cs typeface="Arial"/>
-              </a:rPr>
-              <a:t xml:space="preserve">a repair needed, which tools this one job</a:t>
-            </a:r>
-            <a:endParaRPr lang="en-US" sz="1500"/>
-          </a:p>
-          <a:p>
-            <a:pPr marL="0" indent="0">
-              <a:lnSpc>
-                <a:spcPts val="1950"/>
-              </a:lnSpc>
-              <a:spcAft>
-                <a:spcPts val="0"/>
-              </a:spcAft>
-              <a:buNone/>
-            </a:pPr>
-            <a:r>
-              <a:rPr lang="en-US" sz="1500" b="0">
-                <a:solidFill>
-                  <a:srgbClr val="202B33"/>
-                </a:solidFill>
-                <a:latin typeface="Arial"/>
-                <a:ea typeface="Arial"/>
-                <a:cs typeface="Arial"/>
-              </a:rPr>
-              <a:t xml:space="preserve">could have, and how far the app could go</a:t>
-            </a:r>
-            <a:endParaRPr lang="en-US" sz="1500"/>
-          </a:p>
-          <a:p>
-            <a:pPr marL="0" indent="0">
-              <a:lnSpc>
-                <a:spcPts val="1950"/>
-              </a:lnSpc>
-              <a:spcAft>
-                <a:spcPts val="0"/>
-              </a:spcAft>
-              <a:buNone/>
-            </a:pPr>
-            <a:r>
-              <a:rPr lang="en-US" sz="1500" b="0">
-                <a:solidFill>
-                  <a:srgbClr val="202B33"/>
-                </a:solidFill>
-                <a:latin typeface="Arial"/>
-                <a:ea typeface="Arial"/>
-                <a:cs typeface="Arial"/>
-              </a:rPr>
-              <a:t xml:space="preserve">without us.</a:t>
-            </a:r>
-            <a:endParaRPr lang="en-US" sz="1500"/>
-          </a:p>
-          <a:p>
-            <a:pPr marL="0" indent="0">
-              <a:lnSpc>
-                <a:spcPts val="1950"/>
-              </a:lnSpc>
-              <a:spcAft>
-                <a:spcPts val="0"/>
-              </a:spcAft>
-              <a:buNone/>
-            </a:pPr>
-            <a:r>
-              <a:rPr lang="en-US" sz="1500" b="0">
-                <a:solidFill>
-                  <a:srgbClr val="202B33"/>
-                </a:solidFill>
-                <a:latin typeface="Arial"/>
-                <a:ea typeface="Arial"/>
-                <a:cs typeface="Arial"/>
-              </a:rPr>
-              <a:t xml:space="preserve"/>
-            </a:r>
-            <a:endParaRPr lang="en-US" sz="1500"/>
-          </a:p>
-          <a:p>
-            <a:pPr marL="0" indent="0">
-              <a:lnSpc>
-                <a:spcPts val="1950"/>
-              </a:lnSpc>
-              <a:spcAft>
-                <a:spcPts val="0"/>
-              </a:spcAft>
-              <a:buNone/>
-            </a:pPr>
-            <a:r>
-              <a:rPr lang="en-US" sz="1500" b="0">
-                <a:solidFill>
-                  <a:srgbClr val="202B33"/>
-                </a:solidFill>
-                <a:latin typeface="Arial"/>
-                <a:ea typeface="Arial"/>
-                <a:cs typeface="Arial"/>
-              </a:rPr>
-              <a:t xml:space="preserve">And return to the assistant with</a:t>
-            </a:r>
-            <a:endParaRPr lang="en-US" sz="1500"/>
-          </a:p>
-          <a:p>
-            <a:pPr marL="0" indent="0">
-              <a:lnSpc>
-                <a:spcPts val="1950"/>
-              </a:lnSpc>
-              <a:spcAft>
-                <a:spcPts val="0"/>
-              </a:spcAft>
-              <a:buNone/>
-            </a:pPr>
-            <a:r>
-              <a:rPr lang="en-US" sz="1500" b="0">
-                <a:solidFill>
-                  <a:srgbClr val="202B33"/>
-                </a:solidFill>
-                <a:latin typeface="Arial"/>
-                <a:ea typeface="Arial"/>
-                <a:cs typeface="Arial"/>
-              </a:rPr>
-              <a:t xml:space="preserve">everything. It is still coming; nothing on</a:t>
-            </a:r>
-            <a:endParaRPr lang="en-US" sz="1500"/>
-          </a:p>
-          <a:p>
-            <a:pPr marL="0" indent="0">
-              <a:lnSpc>
-                <a:spcPts val="1950"/>
-              </a:lnSpc>
-              <a:spcAft>
-                <a:spcPts val="0"/>
-              </a:spcAft>
-              <a:buNone/>
-            </a:pPr>
-            <a:r>
-              <a:rPr lang="en-US" sz="1500" b="0">
-                <a:solidFill>
-                  <a:srgbClr val="202B33"/>
-                </a:solidFill>
-                <a:latin typeface="Arial"/>
-                <a:ea typeface="Arial"/>
-                <a:cs typeface="Arial"/>
-              </a:rPr>
-              <a:t xml:space="preserve">these slides stops it, and I would not want</a:t>
-            </a:r>
-            <a:endParaRPr lang="en-US" sz="1500"/>
-          </a:p>
-          <a:p>
-            <a:pPr marL="0" indent="0">
-              <a:lnSpc>
-                <a:spcPts val="1950"/>
-              </a:lnSpc>
-              <a:spcAft>
-                <a:spcPts val="0"/>
-              </a:spcAft>
-              <a:buNone/>
-            </a:pPr>
-            <a:r>
-              <a:rPr lang="en-US" sz="1500" b="0">
-                <a:solidFill>
-                  <a:srgbClr val="202B33"/>
-                </a:solidFill>
-                <a:latin typeface="Arial"/>
-                <a:ea typeface="Arial"/>
-                <a:cs typeface="Arial"/>
-              </a:rPr>
-              <a:t xml:space="preserve">to. What changed is how many of its</a:t>
-            </a:r>
-            <a:endParaRPr lang="en-US" sz="1500"/>
-          </a:p>
-          <a:p>
-            <a:pPr marL="0" indent="0">
-              <a:lnSpc>
-                <a:spcPts val="1950"/>
-              </a:lnSpc>
-              <a:spcAft>
-                <a:spcPts val="0"/>
-              </a:spcAft>
-              <a:buNone/>
-            </a:pPr>
-            <a:r>
-              <a:rPr lang="en-US" sz="1500" b="0">
-                <a:solidFill>
-                  <a:srgbClr val="202B33"/>
-                </a:solidFill>
-                <a:latin typeface="Arial"/>
-                <a:ea typeface="Arial"/>
-                <a:cs typeface="Arial"/>
-              </a:rPr>
-              <a:t xml:space="preserve">pathways are live at once. Each job gets a</a:t>
-            </a:r>
-            <a:endParaRPr lang="en-US" sz="1500"/>
-          </a:p>
-        </p:txBody>
-      </p:sp>
-      <p:sp>
-        <p:nvSpPr>
-          <p:cNvPr id="5" name="Text 5"/>
-          <p:cNvSpPr txBox="1"/>
-          <p:nvPr/>
-        </p:nvSpPr>
-        <p:spPr>
-          <a:xfrm>
-            <a:off x="5238750" y="1971675"/>
-            <a:ext cx="4362450" cy="5314950"/>
-          </a:xfrm>
-          <a:prstGeom prst="rect">
-            <a:avLst/>
-          </a:prstGeom>
-          <a:noFill/>
-          <a:ln>
-            <a:noFill/>
-          </a:ln>
-        </p:spPr>
-        <p:txBody>
-          <a:bodyPr wrap="none" lIns="0" tIns="0" rIns="0" bIns="0" anchor="t">
-            <a:noAutofit/>
-          </a:bodyPr>
-          <a:lstStyle/>
-          <a:p>
-            <a:pPr marL="0" indent="0">
-              <a:lnSpc>
-                <a:spcPts val="1950"/>
-              </a:lnSpc>
-              <a:spcAft>
-                <a:spcPts val="0"/>
-              </a:spcAft>
-              <a:buNone/>
-            </a:pPr>
-            <a:r>
-              <a:rPr lang="en-US" sz="1500" b="0">
-                <a:solidFill>
-                  <a:srgbClr val="202B33"/>
-                </a:solidFill>
-                <a:latin typeface="Arial"/>
-                <a:ea typeface="Arial"/>
-                <a:cs typeface="Arial"/>
-              </a:rPr>
-              <a:t xml:space="preserve">small agent with a tailored prompt, a short</a:t>
-            </a:r>
-            <a:endParaRPr lang="en-US" sz="1500"/>
-          </a:p>
-          <a:p>
-            <a:pPr marL="0" indent="0">
-              <a:lnSpc>
-                <a:spcPts val="1950"/>
-              </a:lnSpc>
-              <a:spcAft>
-                <a:spcPts val="0"/>
-              </a:spcAft>
-              <a:buNone/>
-            </a:pPr>
-            <a:r>
-              <a:rPr lang="en-US" sz="1500" b="0">
-                <a:solidFill>
-                  <a:srgbClr val="202B33"/>
-                </a:solidFill>
-                <a:latin typeface="Arial"/>
-                <a:ea typeface="Arial"/>
-                <a:cs typeface="Arial"/>
-              </a:rPr>
-              <a:t xml:space="preserve">tool list, a hard budget, and a log of</a:t>
-            </a:r>
-            <a:endParaRPr lang="en-US" sz="1500"/>
-          </a:p>
-          <a:p>
-            <a:pPr marL="0" indent="0">
-              <a:lnSpc>
-                <a:spcPts val="1950"/>
-              </a:lnSpc>
-              <a:spcAft>
-                <a:spcPts val="0"/>
-              </a:spcAft>
-              <a:buNone/>
-            </a:pPr>
-            <a:r>
-              <a:rPr lang="en-US" sz="1500" b="0">
-                <a:solidFill>
-                  <a:srgbClr val="202B33"/>
-                </a:solidFill>
-                <a:latin typeface="Arial"/>
-                <a:ea typeface="Arial"/>
-                <a:cs typeface="Arial"/>
-              </a:rPr>
-              <a:t xml:space="preserve">every time it asked for more. That is the</a:t>
-            </a:r>
-            <a:endParaRPr lang="en-US" sz="1500"/>
-          </a:p>
-          <a:p>
-            <a:pPr marL="0" indent="0">
-              <a:lnSpc>
-                <a:spcPts val="1950"/>
-              </a:lnSpc>
-              <a:spcAft>
-                <a:spcPts val="0"/>
-              </a:spcAft>
-              <a:buNone/>
-            </a:pPr>
-            <a:r>
-              <a:rPr lang="en-US" sz="1500" b="0">
-                <a:solidFill>
-                  <a:srgbClr val="202B33"/>
-                </a:solidFill>
-                <a:latin typeface="Arial"/>
-                <a:ea typeface="Arial"/>
-                <a:cs typeface="Arial"/>
-              </a:rPr>
-              <a:t xml:space="preserve">strategy I believe in for the next few</a:t>
-            </a:r>
-            <a:endParaRPr lang="en-US" sz="1500"/>
-          </a:p>
-          <a:p>
-            <a:pPr marL="0" indent="0">
-              <a:lnSpc>
-                <a:spcPts val="1950"/>
-              </a:lnSpc>
-              <a:spcAft>
-                <a:spcPts val="0"/>
-              </a:spcAft>
-              <a:buNone/>
-            </a:pPr>
-            <a:r>
-              <a:rPr lang="en-US" sz="1500" b="0">
-                <a:solidFill>
-                  <a:srgbClr val="202B33"/>
-                </a:solidFill>
-                <a:latin typeface="Arial"/>
-                <a:ea typeface="Arial"/>
-                <a:cs typeface="Arial"/>
-              </a:rPr>
-              <a:t xml:space="preserve">years: not one agent holding every</a:t>
-            </a:r>
-            <a:endParaRPr lang="en-US" sz="1500"/>
-          </a:p>
-          <a:p>
-            <a:pPr marL="0" indent="0">
-              <a:lnSpc>
-                <a:spcPts val="1950"/>
-              </a:lnSpc>
-              <a:spcAft>
-                <a:spcPts val="0"/>
-              </a:spcAft>
-              <a:buNone/>
-            </a:pPr>
-            <a:r>
-              <a:rPr lang="en-US" sz="1500" b="0">
-                <a:solidFill>
-                  <a:srgbClr val="202B33"/>
-                </a:solidFill>
-                <a:latin typeface="Arial"/>
-                <a:ea typeface="Arial"/>
-                <a:cs typeface="Arial"/>
-              </a:rPr>
-              <a:t xml:space="preserve">combination, which nobody can check, but</a:t>
-            </a:r>
-            <a:endParaRPr lang="en-US" sz="1500"/>
-          </a:p>
-          <a:p>
-            <a:pPr marL="0" indent="0">
-              <a:lnSpc>
-                <a:spcPts val="1950"/>
-              </a:lnSpc>
-              <a:spcAft>
-                <a:spcPts val="0"/>
-              </a:spcAft>
-              <a:buNone/>
-            </a:pPr>
-            <a:r>
-              <a:rPr lang="en-US" sz="1500" b="0">
-                <a:solidFill>
-                  <a:srgbClr val="202B33"/>
-                </a:solidFill>
-                <a:latin typeface="Arial"/>
-                <a:ea typeface="Arial"/>
-                <a:cs typeface="Arial"/>
-              </a:rPr>
-              <a:t xml:space="preserve">many small ones you can afford to.</a:t>
-            </a:r>
-            <a:endParaRPr lang="en-US" sz="1500"/>
-          </a:p>
-          <a:p>
-            <a:pPr marL="0" indent="0">
-              <a:lnSpc>
-                <a:spcPts val="1950"/>
-              </a:lnSpc>
-              <a:spcAft>
-                <a:spcPts val="0"/>
-              </a:spcAft>
-              <a:buNone/>
-            </a:pPr>
-            <a:r>
-              <a:rPr lang="en-US" sz="1500" b="0">
-                <a:solidFill>
-                  <a:srgbClr val="202B33"/>
-                </a:solidFill>
-                <a:latin typeface="Arial"/>
-                <a:ea typeface="Arial"/>
-                <a:cs typeface="Arial"/>
-              </a:rPr>
-              <a:t xml:space="preserve"/>
-            </a:r>
-            <a:endParaRPr lang="en-US" sz="1500"/>
-          </a:p>
-          <a:p>
-            <a:pPr marL="0" indent="0">
-              <a:lnSpc>
-                <a:spcPts val="1950"/>
-              </a:lnSpc>
-              <a:spcAft>
-                <a:spcPts val="0"/>
-              </a:spcAft>
-              <a:buNone/>
-            </a:pPr>
-            <a:r>
-              <a:rPr lang="en-US" sz="1500" b="0">
-                <a:solidFill>
-                  <a:srgbClr val="202B33"/>
-                </a:solidFill>
-                <a:latin typeface="Arial"/>
-                <a:ea typeface="Arial"/>
-                <a:cs typeface="Arial"/>
-              </a:rPr>
-              <a:t xml:space="preserve">Pick one integration that already costs</a:t>
-            </a:r>
-            <a:endParaRPr lang="en-US" sz="1500"/>
-          </a:p>
-          <a:p>
-            <a:pPr marL="0" indent="0">
-              <a:lnSpc>
-                <a:spcPts val="1950"/>
-              </a:lnSpc>
-              <a:spcAft>
-                <a:spcPts val="0"/>
-              </a:spcAft>
-              <a:buNone/>
-            </a:pPr>
-            <a:r>
-              <a:rPr lang="en-US" sz="1500" b="0">
-                <a:solidFill>
-                  <a:srgbClr val="202B33"/>
-                </a:solidFill>
-                <a:latin typeface="Arial"/>
-                <a:ea typeface="Arial"/>
-                <a:cs typeface="Arial"/>
-              </a:rPr>
-              <a:t xml:space="preserve">your team mornings. Give it a conjured</a:t>
-            </a:r>
-            <a:endParaRPr lang="en-US" sz="1500"/>
-          </a:p>
-          <a:p>
-            <a:pPr marL="0" indent="0">
-              <a:lnSpc>
-                <a:spcPts val="1950"/>
-              </a:lnSpc>
-              <a:spcAft>
-                <a:spcPts val="0"/>
-              </a:spcAft>
-              <a:buNone/>
-            </a:pPr>
-            <a:r>
-              <a:rPr lang="en-US" sz="1500" b="0">
-                <a:solidFill>
-                  <a:srgbClr val="202B33"/>
-                </a:solidFill>
-                <a:latin typeface="Arial"/>
-                <a:ea typeface="Arial"/>
-                <a:cs typeface="Arial"/>
-              </a:rPr>
-              <a:t xml:space="preserve">agent with a bounded way to investigate, a</a:t>
-            </a:r>
-            <a:endParaRPr lang="en-US" sz="1500"/>
-          </a:p>
-          <a:p>
-            <a:pPr marL="0" indent="0">
-              <a:lnSpc>
-                <a:spcPts val="1950"/>
-              </a:lnSpc>
-              <a:spcAft>
-                <a:spcPts val="0"/>
-              </a:spcAft>
-              <a:buNone/>
-            </a:pPr>
-            <a:r>
-              <a:rPr lang="en-US" sz="1500" b="0">
-                <a:solidFill>
-                  <a:srgbClr val="202B33"/>
-                </a:solidFill>
-                <a:latin typeface="Arial"/>
-                <a:ea typeface="Arial"/>
-                <a:cs typeface="Arial"/>
-              </a:rPr>
-              <a:t xml:space="preserve">test it did not write, and a place to</a:t>
-            </a:r>
-            <a:endParaRPr lang="en-US" sz="1500"/>
-          </a:p>
-          <a:p>
-            <a:pPr marL="0" indent="0">
-              <a:lnSpc>
-                <a:spcPts val="1950"/>
-              </a:lnSpc>
-              <a:spcAft>
-                <a:spcPts val="0"/>
-              </a:spcAft>
-              <a:buNone/>
-            </a:pPr>
-            <a:r>
-              <a:rPr lang="en-US" sz="1500" b="0">
-                <a:solidFill>
-                  <a:srgbClr val="202B33"/>
-                </a:solidFill>
-                <a:latin typeface="Arial"/>
-                <a:ea typeface="Arial"/>
-                <a:cs typeface="Arial"/>
-              </a:rPr>
-              <a:t xml:space="preserve">record what happened. Or start with one</a:t>
-            </a:r>
-            <a:endParaRPr lang="en-US" sz="1500"/>
-          </a:p>
-          <a:p>
-            <a:pPr marL="0" indent="0">
-              <a:lnSpc>
-                <a:spcPts val="1950"/>
-              </a:lnSpc>
-              <a:spcAft>
-                <a:spcPts val="0"/>
-              </a:spcAft>
-              <a:buNone/>
-            </a:pPr>
-            <a:r>
-              <a:rPr lang="en-US" sz="1500" b="0">
-                <a:solidFill>
-                  <a:srgbClr val="202B33"/>
-                </a:solidFill>
-                <a:latin typeface="Arial"/>
-                <a:ea typeface="Arial"/>
-                <a:cs typeface="Arial"/>
-              </a:rPr>
-              <a:t xml:space="preserve">reporting agent: keep its execution</a:t>
-            </a:r>
-            <a:endParaRPr lang="en-US" sz="1500"/>
-          </a:p>
-          <a:p>
-            <a:pPr marL="0" indent="0">
-              <a:lnSpc>
-                <a:spcPts val="1950"/>
-              </a:lnSpc>
-              <a:spcAft>
-                <a:spcPts val="0"/>
-              </a:spcAft>
-              <a:buNone/>
-            </a:pPr>
-            <a:r>
-              <a:rPr lang="en-US" sz="1500" b="0">
-                <a:solidFill>
-                  <a:srgbClr val="202B33"/>
-                </a:solidFill>
-                <a:latin typeface="Arial"/>
-                <a:ea typeface="Arial"/>
-                <a:cs typeface="Arial"/>
-              </a:rPr>
-              <a:t xml:space="preserve">observations, make it check them before</a:t>
-            </a:r>
-            <a:endParaRPr lang="en-US" sz="1500"/>
-          </a:p>
-          <a:p>
-            <a:pPr marL="0" indent="0">
-              <a:lnSpc>
-                <a:spcPts val="1950"/>
-              </a:lnSpc>
-              <a:spcAft>
-                <a:spcPts val="0"/>
-              </a:spcAft>
-              <a:buNone/>
-            </a:pPr>
-            <a:r>
-              <a:rPr lang="en-US" sz="1500" b="0">
-                <a:solidFill>
-                  <a:srgbClr val="202B33"/>
-                </a:solidFill>
-                <a:latin typeface="Arial"/>
-                <a:ea typeface="Arial"/>
-                <a:cs typeface="Arial"/>
-              </a:rPr>
-              <a:t xml:space="preserve">returning work, and measure whether the</a:t>
-            </a:r>
-            <a:endParaRPr lang="en-US" sz="1500"/>
-          </a:p>
-          <a:p>
-            <a:pPr marL="0" indent="0">
-              <a:lnSpc>
-                <a:spcPts val="1950"/>
-              </a:lnSpc>
-              <a:spcAft>
-                <a:spcPts val="0"/>
-              </a:spcAft>
-              <a:buNone/>
-            </a:pPr>
-            <a:r>
-              <a:rPr lang="en-US" sz="1500" b="0">
-                <a:solidFill>
-                  <a:srgbClr val="202B33"/>
-                </a:solidFill>
-                <a:latin typeface="Arial"/>
-                <a:ea typeface="Arial"/>
-                <a:cs typeface="Arial"/>
-              </a:rPr>
-              <a:t xml:space="preserve">same mistake comes back. That is enough to</a:t>
-            </a:r>
-            <a:endParaRPr lang="en-US" sz="1500"/>
-          </a:p>
-          <a:p>
-            <a:pPr marL="0" indent="0">
-              <a:lnSpc>
-                <a:spcPts val="1950"/>
-              </a:lnSpc>
-              <a:spcAft>
-                <a:spcPts val="0"/>
-              </a:spcAft>
-              <a:buNone/>
-            </a:pPr>
-            <a:r>
-              <a:rPr lang="en-US" sz="1500" b="0">
-                <a:solidFill>
-                  <a:srgbClr val="202B33"/>
-                </a:solidFill>
-                <a:latin typeface="Arial"/>
-                <a:ea typeface="Arial"/>
-                <a:cs typeface="Arial"/>
-              </a:rPr>
-              <a:t xml:space="preserve">start.</a:t>
-            </a:r>
-            <a:endParaRPr lang="en-US" sz="1500"/>
-          </a:p>
-        </p:txBody>
-      </p:sp>
-      <p:sp>
-        <p:nvSpPr>
-          <p:cNvPr id="6" name="Text 6"/>
-          <p:cNvSpPr txBox="1"/>
-          <p:nvPr/>
-        </p:nvSpPr>
-        <p:spPr>
-          <a:xfrm>
-            <a:off x="457200" y="7486650"/>
-            <a:ext cx="8820150" cy="190500"/>
-          </a:xfrm>
-          <a:prstGeom prst="rect">
-            <a:avLst/>
-          </a:prstGeom>
-          <a:noFill/>
-          <a:ln>
-            <a:noFill/>
-          </a:ln>
-        </p:spPr>
-        <p:txBody>
-          <a:bodyPr wrap="none" lIns="0" tIns="0" rIns="0" bIns="0" anchor="t">
-            <a:noAutofit/>
-          </a:bodyPr>
-          <a:lstStyle/>
-          <a:p>
-            <a:pPr marL="0" indent="0">
-              <a:lnSpc>
-                <a:spcPts val="1268"/>
-              </a:lnSpc>
-              <a:spcAft>
-                <a:spcPts val="0"/>
-              </a:spcAft>
-              <a:buNone/>
-            </a:pPr>
-            <a:r>
-              <a:rPr lang="en-US" sz="975" b="0">
-                <a:solidFill>
-                  <a:srgbClr val="48555B"/>
-                </a:solidFill>
-                <a:latin typeface="Arial"/>
-                <a:ea typeface="Arial"/>
-                <a:cs typeface="Arial"/>
-              </a:rPr>
-              <a:t xml:space="preserve">Adaptive, agentic apps</a:t>
-            </a:r>
-            <a:endParaRPr lang="en-US" sz="975"/>
-          </a:p>
-        </p:txBody>
-      </p:sp>
-      <p:sp>
-        <p:nvSpPr>
-          <p:cNvPr id="7" name="Text 7"/>
-          <p:cNvSpPr txBox="1"/>
-          <p:nvPr/>
-        </p:nvSpPr>
-        <p:spPr>
-          <a:xfrm>
-            <a:off x="9391650" y="7486650"/>
-            <a:ext cx="238125" cy="190500"/>
-          </a:xfrm>
-          <a:prstGeom prst="rect">
-            <a:avLst/>
-          </a:prstGeom>
-          <a:noFill/>
-          <a:ln>
-            <a:noFill/>
-          </a:ln>
-        </p:spPr>
-        <p:txBody>
-          <a:bodyPr wrap="none" lIns="0" tIns="0" rIns="0" bIns="0" anchor="t">
-            <a:noAutofit/>
-          </a:bodyPr>
-          <a:lstStyle/>
-          <a:p>
-            <a:pPr marL="0" indent="0">
-              <a:lnSpc>
-                <a:spcPts val="1268"/>
-              </a:lnSpc>
-              <a:spcAft>
-                <a:spcPts val="0"/>
-              </a:spcAft>
-              <a:buNone/>
-            </a:pPr>
-            <a:r>
-              <a:rPr lang="en-US" sz="975" b="0">
-                <a:solidFill>
-                  <a:srgbClr val="48555B"/>
-                </a:solidFill>
-                <a:latin typeface="Arial"/>
-                <a:ea typeface="Arial"/>
-                <a:cs typeface="Arial"/>
-              </a:rPr>
-              <a:t xml:space="preserve">12</a:t>
-            </a:r>
-            <a:endParaRPr lang="en-US" sz="975"/>
-          </a:p>
-        </p:txBody>
-      </p:sp>
-    </p:spTree>
-  </p:cSld>
-  <p:clrMapOvr>
-    <a:masterClrMapping/>
-  </p:clrMapOvr>
-</p:sld>
-</file>
-
-<file path=ppt/slides/slide13.xml><?xml version="1.0" encoding="utf-8"?>
-<p:sld xmlns:a="http://schemas.openxmlformats.org/drawingml/2006/main" xmlns:r="http://schemas.openxmlformats.org/officeDocument/2006/relationships" xmlns:p="http://schemas.openxmlformats.org/presentationml/2006/main">
-  <p:cSld name="Slide 13">
-    <p:bg>
-      <p:bgPr>
-        <a:solidFill>
-          <a:srgbClr val="FAFAF7"/>
-        </a:solidFill>
-        <a:effectLst/>
-      </p:bgPr>
-    </p:bg>
-    <p:spTree>
-      <p:nvGrpSpPr>
-        <p:cNvPr id="1" name=""/>
-        <p:cNvGrpSpPr/>
-        <p:nvPr/>
-      </p:nvGrpSpPr>
-      <p:grpSpPr>
-        <a:xfrm>
-          <a:off x="0" y="0"/>
-          <a:ext cx="0" cy="0"/>
-          <a:chOff x="0" y="0"/>
-          <a:chExt cx="0" cy="0"/>
-        </a:xfrm>
-      </p:grpSpPr>
-      <p:sp>
-        <p:nvSpPr>
-          <p:cNvPr id="2" name="Text 2"/>
-          <p:cNvSpPr txBox="1"/>
-          <p:nvPr/>
-        </p:nvSpPr>
-        <p:spPr>
-          <a:xfrm>
-            <a:off x="457200" y="266700"/>
-            <a:ext cx="9144000" cy="228600"/>
-          </a:xfrm>
-          <a:prstGeom prst="rect">
-            <a:avLst/>
-          </a:prstGeom>
-          <a:noFill/>
-          <a:ln>
-            <a:noFill/>
-          </a:ln>
-        </p:spPr>
-        <p:txBody>
-          <a:bodyPr wrap="none" lIns="0" tIns="0" rIns="0" bIns="0" anchor="t">
-            <a:noAutofit/>
-          </a:bodyPr>
-          <a:lstStyle/>
-          <a:p>
-            <a:pPr marL="0" indent="0">
-              <a:lnSpc>
-                <a:spcPts val="1365"/>
-              </a:lnSpc>
-              <a:spcAft>
-                <a:spcPts val="0"/>
-              </a:spcAft>
-              <a:buNone/>
-            </a:pPr>
-            <a:r>
-              <a:rPr lang="en-US" sz="1050" b="1">
-                <a:solidFill>
-                  <a:srgbClr val="246957"/>
-                </a:solidFill>
-                <a:latin typeface="Arial"/>
-                <a:ea typeface="Arial"/>
-                <a:cs typeface="Arial"/>
-              </a:rPr>
-              <a:t xml:space="preserve">SOURCE REFERENCES</a:t>
-            </a:r>
-            <a:endParaRPr lang="en-US" sz="1050"/>
-          </a:p>
-        </p:txBody>
-      </p:sp>
-      <p:sp>
-        <p:nvSpPr>
-          <p:cNvPr id="3" name="Text 3"/>
-          <p:cNvSpPr txBox="1"/>
-          <p:nvPr/>
-        </p:nvSpPr>
-        <p:spPr>
-          <a:xfrm>
-            <a:off x="457200" y="657225"/>
-            <a:ext cx="9144000" cy="1104900"/>
-          </a:xfrm>
-          <a:prstGeom prst="rect">
-            <a:avLst/>
-          </a:prstGeom>
-          <a:noFill/>
-          <a:ln>
-            <a:noFill/>
-          </a:ln>
-        </p:spPr>
-        <p:txBody>
-          <a:bodyPr wrap="none" lIns="0" tIns="0" rIns="0" bIns="0" anchor="t">
-            <a:noAutofit/>
-          </a:bodyPr>
-          <a:lstStyle/>
-          <a:p>
-            <a:pPr marL="0" indent="0">
-              <a:lnSpc>
-                <a:spcPts val="3060"/>
-              </a:lnSpc>
-              <a:spcAft>
-                <a:spcPts val="0"/>
-              </a:spcAft>
-              <a:buNone/>
-            </a:pPr>
-            <a:r>
-              <a:rPr lang="en-US" sz="2550" b="1">
-                <a:solidFill>
-                  <a:srgbClr val="202B33"/>
-                </a:solidFill>
-                <a:latin typeface="Arial"/>
-                <a:ea typeface="Arial"/>
-                <a:cs typeface="Arial"/>
-              </a:rPr>
-              <a:t xml:space="preserve">References</a:t>
-            </a:r>
-            <a:endParaRPr lang="en-US" sz="2550"/>
-          </a:p>
-        </p:txBody>
-      </p:sp>
-      <p:sp>
-        <p:nvSpPr>
-          <p:cNvPr id="4" name="Text 4"/>
-          <p:cNvSpPr txBox="1"/>
-          <p:nvPr/>
-        </p:nvSpPr>
-        <p:spPr>
-          <a:xfrm>
-            <a:off x="457200" y="1971675"/>
-            <a:ext cx="4352925" cy="5314950"/>
-          </a:xfrm>
-          <a:prstGeom prst="rect">
-            <a:avLst/>
-          </a:prstGeom>
-          <a:noFill/>
-          <a:ln>
-            <a:noFill/>
-          </a:ln>
-        </p:spPr>
-        <p:txBody>
-          <a:bodyPr wrap="none" lIns="0" tIns="0" rIns="0" bIns="0" anchor="t">
-            <a:noAutofit/>
-          </a:bodyPr>
-          <a:lstStyle/>
-          <a:p>
-            <a:pPr marL="0" indent="0">
-              <a:lnSpc>
-                <a:spcPts val="1950"/>
-              </a:lnSpc>
-              <a:spcAft>
-                <a:spcPts val="0"/>
-              </a:spcAft>
-              <a:buNone/>
-            </a:pPr>
-            <a:r>
-              <a:rPr lang="en-US" sz="1500" b="0">
-                <a:solidFill>
-                  <a:srgbClr val="202B33"/>
-                </a:solidFill>
-                <a:latin typeface="Arial"/>
-                <a:ea typeface="Arial"/>
-                <a:cs typeface="Arial"/>
-              </a:rPr>
-              <a:t xml:space="preserve">Saltzer and Schroeder (1975), The</a:t>
-            </a:r>
-            <a:endParaRPr lang="en-US" sz="1500"/>
-          </a:p>
-          <a:p>
-            <a:pPr marL="0" indent="0">
-              <a:lnSpc>
-                <a:spcPts val="1950"/>
-              </a:lnSpc>
-              <a:spcAft>
-                <a:spcPts val="0"/>
-              </a:spcAft>
-              <a:buNone/>
-            </a:pPr>
-            <a:r>
-              <a:rPr lang="en-US" sz="1500" b="0">
-                <a:solidFill>
-                  <a:srgbClr val="202B33"/>
-                </a:solidFill>
-                <a:latin typeface="Arial"/>
-                <a:ea typeface="Arial"/>
-                <a:cs typeface="Arial"/>
-              </a:rPr>
-              <a:t xml:space="preserve">Protection of Information in Computer</a:t>
-            </a:r>
-            <a:endParaRPr lang="en-US" sz="1500"/>
-          </a:p>
-          <a:p>
-            <a:pPr marL="0" indent="0">
-              <a:lnSpc>
-                <a:spcPts val="1950"/>
-              </a:lnSpc>
-              <a:spcAft>
-                <a:spcPts val="0"/>
-              </a:spcAft>
-              <a:buNone/>
-            </a:pPr>
-            <a:r>
-              <a:rPr lang="en-US" sz="1500" b="0">
-                <a:solidFill>
-                  <a:srgbClr val="202B33"/>
-                </a:solidFill>
-                <a:latin typeface="Arial"/>
-                <a:ea typeface="Arial"/>
-                <a:cs typeface="Arial"/>
-              </a:rPr>
-              <a:t xml:space="preserve">Systems —</a:t>
-            </a:r>
-            <a:endParaRPr lang="en-US" sz="1500"/>
-          </a:p>
-          <a:p>
-            <a:pPr marL="0" indent="0">
-              <a:lnSpc>
-                <a:spcPts val="1950"/>
-              </a:lnSpc>
-              <a:spcAft>
-                <a:spcPts val="0"/>
-              </a:spcAft>
-              <a:buNone/>
-            </a:pPr>
-            <a:r>
-              <a:rPr lang="en-US" sz="1500" b="0">
-                <a:solidFill>
-                  <a:srgbClr val="202B33"/>
-                </a:solidFill>
-                <a:latin typeface="Arial"/>
-                <a:ea typeface="Arial"/>
-                <a:cs typeface="Arial"/>
-              </a:rPr>
-              <a:t xml:space="preserve">https://doi.org/10.1109/PROC.1975.9939),</a:t>
-            </a:r>
-            <a:endParaRPr lang="en-US" sz="1500"/>
-          </a:p>
-        </p:txBody>
-      </p:sp>
-      <p:sp>
-        <p:nvSpPr>
-          <p:cNvPr id="5" name="Text 5"/>
-          <p:cNvSpPr txBox="1"/>
-          <p:nvPr/>
-        </p:nvSpPr>
-        <p:spPr>
-          <a:xfrm>
-            <a:off x="5238750" y="1971675"/>
-            <a:ext cx="4362450" cy="5314950"/>
-          </a:xfrm>
-          <a:prstGeom prst="rect">
-            <a:avLst/>
-          </a:prstGeom>
-          <a:noFill/>
-          <a:ln>
-            <a:noFill/>
-          </a:ln>
-        </p:spPr>
-        <p:txBody>
-          <a:bodyPr wrap="none" lIns="0" tIns="0" rIns="0" bIns="0" anchor="t">
-            <a:noAutofit/>
-          </a:bodyPr>
-          <a:lstStyle/>
-          <a:p>
-            <a:pPr marL="0" indent="0">
-              <a:lnSpc>
-                <a:spcPts val="1950"/>
-              </a:lnSpc>
-              <a:spcAft>
-                <a:spcPts val="0"/>
-              </a:spcAft>
-              <a:buNone/>
-            </a:pPr>
-            <a:r>
-              <a:rPr lang="en-US" sz="1500" b="0">
-                <a:solidFill>
-                  <a:srgbClr val="202B33"/>
-                </a:solidFill>
-                <a:latin typeface="Arial"/>
-                <a:ea typeface="Arial"/>
-                <a:cs typeface="Arial"/>
-              </a:rPr>
-              <a:t xml:space="preserve">Proceedings of the IEEE 63(9), 1278 to</a:t>
-            </a:r>
-            <a:endParaRPr lang="en-US" sz="1500"/>
-          </a:p>
-          <a:p>
-            <a:pPr marL="0" indent="0">
-              <a:lnSpc>
-                <a:spcPts val="1950"/>
-              </a:lnSpc>
-              <a:spcAft>
-                <a:spcPts val="0"/>
-              </a:spcAft>
-              <a:buNone/>
-            </a:pPr>
-            <a:r>
-              <a:rPr lang="en-US" sz="1500" b="0">
-                <a:solidFill>
-                  <a:srgbClr val="202B33"/>
-                </a:solidFill>
-                <a:latin typeface="Arial"/>
-                <a:ea typeface="Arial"/>
-                <a:cs typeface="Arial"/>
-              </a:rPr>
-              <a:t xml:space="preserve">1308. Least privilege is their principle</a:t>
-            </a:r>
-            <a:endParaRPr lang="en-US" sz="1500"/>
-          </a:p>
-          <a:p>
-            <a:pPr marL="0" indent="0">
-              <a:lnSpc>
-                <a:spcPts val="1950"/>
-              </a:lnSpc>
-              <a:spcAft>
-                <a:spcPts val="0"/>
-              </a:spcAft>
-              <a:buNone/>
-            </a:pPr>
-            <a:r>
-              <a:rPr lang="en-US" sz="1500" b="0">
-                <a:solidFill>
-                  <a:srgbClr val="202B33"/>
-                </a:solidFill>
-                <a:latin typeface="Arial"/>
-                <a:ea typeface="Arial"/>
-                <a:cs typeface="Arial"/>
-              </a:rPr>
-              <a:t xml:space="preserve">(f.</a:t>
-            </a:r>
-            <a:endParaRPr lang="en-US" sz="1500"/>
-          </a:p>
-        </p:txBody>
-      </p:sp>
-      <p:sp>
-        <p:nvSpPr>
-          <p:cNvPr id="6" name="Text 6"/>
-          <p:cNvSpPr txBox="1"/>
-          <p:nvPr/>
-        </p:nvSpPr>
-        <p:spPr>
-          <a:xfrm>
-            <a:off x="457200" y="7486650"/>
-            <a:ext cx="8820150" cy="190500"/>
-          </a:xfrm>
-          <a:prstGeom prst="rect">
-            <a:avLst/>
-          </a:prstGeom>
-          <a:noFill/>
-          <a:ln>
-            <a:noFill/>
-          </a:ln>
-        </p:spPr>
-        <p:txBody>
-          <a:bodyPr wrap="none" lIns="0" tIns="0" rIns="0" bIns="0" anchor="t">
-            <a:noAutofit/>
-          </a:bodyPr>
-          <a:lstStyle/>
-          <a:p>
-            <a:pPr marL="0" indent="0">
-              <a:lnSpc>
-                <a:spcPts val="1268"/>
-              </a:lnSpc>
-              <a:spcAft>
-                <a:spcPts val="0"/>
-              </a:spcAft>
-              <a:buNone/>
-            </a:pPr>
-            <a:r>
-              <a:rPr lang="en-US" sz="975" b="0">
-                <a:solidFill>
-                  <a:srgbClr val="48555B"/>
-                </a:solidFill>
-                <a:latin typeface="Arial"/>
-                <a:ea typeface="Arial"/>
-                <a:cs typeface="Arial"/>
-              </a:rPr>
-              <a:t xml:space="preserve">Adaptive, agentic apps</a:t>
-            </a:r>
-            <a:endParaRPr lang="en-US" sz="975"/>
-          </a:p>
-        </p:txBody>
-      </p:sp>
-      <p:sp>
-        <p:nvSpPr>
-          <p:cNvPr id="7" name="Text 7"/>
-          <p:cNvSpPr txBox="1"/>
-          <p:nvPr/>
-        </p:nvSpPr>
-        <p:spPr>
-          <a:xfrm>
-            <a:off x="9391650" y="7486650"/>
-            <a:ext cx="238125" cy="190500"/>
-          </a:xfrm>
-          <a:prstGeom prst="rect">
-            <a:avLst/>
-          </a:prstGeom>
-          <a:noFill/>
-          <a:ln>
-            <a:noFill/>
-          </a:ln>
-        </p:spPr>
-        <p:txBody>
-          <a:bodyPr wrap="none" lIns="0" tIns="0" rIns="0" bIns="0" anchor="t">
-            <a:noAutofit/>
-          </a:bodyPr>
-          <a:lstStyle/>
-          <a:p>
-            <a:pPr marL="0" indent="0">
-              <a:lnSpc>
-                <a:spcPts val="1268"/>
-              </a:lnSpc>
-              <a:spcAft>
-                <a:spcPts val="0"/>
-              </a:spcAft>
-              <a:buNone/>
-            </a:pPr>
-            <a:r>
-              <a:rPr lang="en-US" sz="975" b="0">
-                <a:solidFill>
-                  <a:srgbClr val="48555B"/>
-                </a:solidFill>
-                <a:latin typeface="Arial"/>
-                <a:ea typeface="Arial"/>
-                <a:cs typeface="Arial"/>
-              </a:rPr>
-              <a:t xml:space="preserve">13</a:t>
             </a:r>
             <a:endParaRPr lang="en-US" sz="975"/>
           </a:p>
@@ -10318,7 +5315,7 @@
                 <a:ea typeface="Arial"/>
                 <a:cs typeface="Arial"/>
               </a:rPr>
-              <a:t xml:space="preserve">01 / 08    SOURCE SLIDE 1</a:t>
+              <a:t xml:space="preserve">01 / 07    SOURCE SLIDE 1</a:t>
             </a:r>
             <a:endParaRPr lang="en-US" sz="1050"/>
           </a:p>
@@ -11206,7 +6203,7 @@
                 <a:ea typeface="Arial"/>
                 <a:cs typeface="Arial"/>
               </a:rPr>
-              <a:t xml:space="preserve">02 / 08    SOURCE SLIDE 3</a:t>
+              <a:t xml:space="preserve">02 / 07    SOURCE SLIDE 3</a:t>
             </a:r>
             <a:endParaRPr lang="en-US" sz="1050"/>
           </a:p>
@@ -11616,6 +6613,29 @@
             </a:r>
             <a:endParaRPr lang="en-US" sz="1200"/>
           </a:p>
+          <a:p>
+            <a:pPr marL="0" indent="0">
+              <a:lnSpc>
+                <a:spcPts val="1575"/>
+              </a:lnSpc>
+              <a:spcAft>
+                <a:spcPts val="0"/>
+              </a:spcAft>
+              <a:buNone/>
+            </a:pPr>
+            <a:r>
+              <a:rPr lang="en-US" sz="1200" b="0">
+                <a:solidFill>
+                  <a:srgbClr val="202B33"/>
+                </a:solidFill>
+                <a:latin typeface="Arial"/>
+                <a:ea typeface="Arial"/>
+                <a:cs typeface="Arial"/>
+              </a:rPr>
+              <a:t xml:space="preserve">integration at a time, and not only in our products.</a:t>
+            </a:r>
+            <a:endParaRPr lang="en-US" sz="1200"/>
+          </a:p>
         </p:txBody>
       </p:sp>
       <p:sp>
@@ -11661,260 +6681,283 @@
                 <a:ea typeface="Arial"/>
                 <a:cs typeface="Arial"/>
               </a:rPr>
-              <a:t xml:space="preserve">integration at a time, and not only in our products.</a:t>
-            </a:r>
-            <a:endParaRPr lang="en-US" sz="1200"/>
-          </a:p>
-          <a:p>
-            <a:pPr marL="0" indent="0">
-              <a:lnSpc>
-                <a:spcPts val="1575"/>
-              </a:lnSpc>
-              <a:spcAft>
-                <a:spcPts val="0"/>
-              </a:spcAft>
-              <a:buNone/>
-            </a:pPr>
-            <a:r>
-              <a:rPr lang="en-US" sz="1200" b="0">
-                <a:solidFill>
-                  <a:srgbClr val="202B33"/>
-                </a:solidFill>
-                <a:latin typeface="Arial"/>
-                <a:ea typeface="Arial"/>
-                <a:cs typeface="Arial"/>
-              </a:rPr>
-              <a:t xml:space="preserve">Browsers now ship a chat that drives the page. WebMCP</a:t>
-            </a:r>
-            <a:endParaRPr lang="en-US" sz="1200"/>
-          </a:p>
-          <a:p>
-            <a:pPr marL="0" indent="0">
-              <a:lnSpc>
-                <a:spcPts val="1575"/>
-              </a:lnSpc>
-              <a:spcAft>
-                <a:spcPts val="0"/>
-              </a:spcAft>
-              <a:buNone/>
-            </a:pPr>
-            <a:r>
-              <a:rPr lang="en-US" sz="1200" b="0">
-                <a:solidFill>
-                  <a:srgbClr val="202B33"/>
-                </a:solidFill>
-                <a:latin typeface="Arial"/>
-                <a:ea typeface="Arial"/>
-                <a:cs typeface="Arial"/>
-              </a:rPr>
-              <a:t xml:space="preserve">lets an agent act on any site that opts in, and the</a:t>
-            </a:r>
-            <a:endParaRPr lang="en-US" sz="1200"/>
-          </a:p>
-          <a:p>
-            <a:pPr marL="0" indent="0">
-              <a:lnSpc>
-                <a:spcPts val="1575"/>
-              </a:lnSpc>
-              <a:spcAft>
-                <a:spcPts val="0"/>
-              </a:spcAft>
-              <a:buNone/>
-            </a:pPr>
-            <a:r>
-              <a:rPr lang="en-US" sz="1200" b="0">
-                <a:solidFill>
-                  <a:srgbClr val="202B33"/>
-                </a:solidFill>
-                <a:latin typeface="Arial"/>
-                <a:ea typeface="Arial"/>
-                <a:cs typeface="Arial"/>
-              </a:rPr>
-              <a:t xml:space="preserve">list of sites that opt in only goes one direction.</a:t>
-            </a:r>
-            <a:endParaRPr lang="en-US" sz="1200"/>
-          </a:p>
-          <a:p>
-            <a:pPr marL="0" indent="0">
-              <a:lnSpc>
-                <a:spcPts val="1575"/>
-              </a:lnSpc>
-              <a:spcAft>
-                <a:spcPts val="0"/>
-              </a:spcAft>
-              <a:buNone/>
-            </a:pPr>
-            <a:r>
-              <a:rPr lang="en-US" sz="1200" b="0">
-                <a:solidFill>
-                  <a:srgbClr val="202B33"/>
-                </a:solidFill>
-                <a:latin typeface="Arial"/>
-                <a:ea typeface="Arial"/>
-                <a:cs typeface="Arial"/>
-              </a:rPr>
-              <a:t xml:space="preserve">The next generation of CLIs will take natural</a:t>
-            </a:r>
-            <a:endParaRPr lang="en-US" sz="1200"/>
-          </a:p>
-          <a:p>
-            <a:pPr marL="0" indent="0">
-              <a:lnSpc>
-                <a:spcPts val="1575"/>
-              </a:lnSpc>
-              <a:spcAft>
-                <a:spcPts val="0"/>
-              </a:spcAft>
-              <a:buNone/>
-            </a:pPr>
-            <a:r>
-              <a:rPr lang="en-US" sz="1200" b="0">
-                <a:solidFill>
-                  <a:srgbClr val="202B33"/>
-                </a:solidFill>
-                <a:latin typeface="Arial"/>
-                <a:ea typeface="Arial"/>
-                <a:cs typeface="Arial"/>
-              </a:rPr>
-              <a:t xml:space="preserve">language by default, and you will pass --no-agent to</a:t>
-            </a:r>
-            <a:endParaRPr lang="en-US" sz="1200"/>
-          </a:p>
-          <a:p>
-            <a:pPr marL="0" indent="0">
-              <a:lnSpc>
-                <a:spcPts val="1575"/>
-              </a:lnSpc>
-              <a:spcAft>
-                <a:spcPts val="0"/>
-              </a:spcAft>
-              <a:buNone/>
-            </a:pPr>
-            <a:r>
-              <a:rPr lang="en-US" sz="1200" b="0">
-                <a:solidFill>
-                  <a:srgbClr val="202B33"/>
-                </a:solidFill>
-                <a:latin typeface="Arial"/>
-                <a:ea typeface="Arial"/>
-                <a:cs typeface="Arial"/>
-              </a:rPr>
-              <a:t xml:space="preserve">get the old behavior back. The intermediary</a:t>
-            </a:r>
-            <a:endParaRPr lang="en-US" sz="1200"/>
-          </a:p>
-          <a:p>
-            <a:pPr marL="0" indent="0">
-              <a:lnSpc>
-                <a:spcPts val="1575"/>
-              </a:lnSpc>
-              <a:spcAft>
-                <a:spcPts val="0"/>
-              </a:spcAft>
-              <a:buNone/>
-            </a:pPr>
-            <a:r>
-              <a:rPr lang="en-US" sz="1200" b="0">
-                <a:solidFill>
-                  <a:srgbClr val="202B33"/>
-                </a:solidFill>
-                <a:latin typeface="Arial"/>
-                <a:ea typeface="Arial"/>
-                <a:cs typeface="Arial"/>
-              </a:rPr>
-              <a:t xml:space="preserve">intelligence layer is going to wrap everything, and I</a:t>
-            </a:r>
-            <a:endParaRPr lang="en-US" sz="1200"/>
-          </a:p>
-          <a:p>
-            <a:pPr marL="0" indent="0">
-              <a:lnSpc>
-                <a:spcPts val="1575"/>
-              </a:lnSpc>
-              <a:spcAft>
-                <a:spcPts val="0"/>
-              </a:spcAft>
-              <a:buNone/>
-            </a:pPr>
-            <a:r>
-              <a:rPr lang="en-US" sz="1200" b="0">
-                <a:solidFill>
-                  <a:srgbClr val="202B33"/>
-                </a:solidFill>
-                <a:latin typeface="Arial"/>
-                <a:ea typeface="Arial"/>
-                <a:cs typeface="Arial"/>
-              </a:rPr>
-              <a:t xml:space="preserve">know who to blame: the kids. Actually, the kids hate</a:t>
-            </a:r>
-            <a:endParaRPr lang="en-US" sz="1200"/>
-          </a:p>
-          <a:p>
-            <a:pPr marL="0" indent="0">
-              <a:lnSpc>
-                <a:spcPts val="1575"/>
-              </a:lnSpc>
-              <a:spcAft>
-                <a:spcPts val="0"/>
-              </a:spcAft>
-              <a:buNone/>
-            </a:pPr>
-            <a:r>
-              <a:rPr lang="en-US" sz="1200" b="0">
-                <a:solidFill>
-                  <a:srgbClr val="202B33"/>
-                </a:solidFill>
-                <a:latin typeface="Arial"/>
-                <a:ea typeface="Arial"/>
-                <a:cs typeface="Arial"/>
-              </a:rPr>
-              <a:t xml:space="preserve">AI. It will be their kids who demand an agent safety</a:t>
-            </a:r>
-            <a:endParaRPr lang="en-US" sz="1200"/>
-          </a:p>
-          <a:p>
-            <a:pPr marL="0" indent="0">
-              <a:lnSpc>
-                <a:spcPts val="1575"/>
-              </a:lnSpc>
-              <a:spcAft>
-                <a:spcPts val="0"/>
-              </a:spcAft>
-              <a:buNone/>
-            </a:pPr>
-            <a:r>
-              <a:rPr lang="en-US" sz="1200" b="0">
-                <a:solidFill>
-                  <a:srgbClr val="202B33"/>
-                </a:solidFill>
-                <a:latin typeface="Arial"/>
-                <a:ea typeface="Arial"/>
-                <a:cs typeface="Arial"/>
-              </a:rPr>
-              <a:t xml:space="preserve">blanket on everything. I will be in a rocking chair</a:t>
-            </a:r>
-            <a:endParaRPr lang="en-US" sz="1200"/>
-          </a:p>
-          <a:p>
-            <a:pPr marL="0" indent="0">
-              <a:lnSpc>
-                <a:spcPts val="1575"/>
-              </a:lnSpc>
-              <a:spcAft>
-                <a:spcPts val="0"/>
-              </a:spcAft>
-              <a:buNone/>
-            </a:pPr>
-            <a:r>
-              <a:rPr lang="en-US" sz="1200" b="0">
-                <a:solidFill>
-                  <a:srgbClr val="202B33"/>
-                </a:solidFill>
-                <a:latin typeface="Arial"/>
-                <a:ea typeface="Arial"/>
-                <a:cs typeface="Arial"/>
-              </a:rPr>
-              <a:t xml:space="preserve">explaining that the internet was better on vinyl.</a:t>
+              <a:t xml:space="preserve"/>
+            </a:r>
+            <a:endParaRPr lang="en-US" sz="1200"/>
+          </a:p>
+          <a:p>
+            <a:pPr marL="0" indent="0">
+              <a:lnSpc>
+                <a:spcPts val="1575"/>
+              </a:lnSpc>
+              <a:spcAft>
+                <a:spcPts val="0"/>
+              </a:spcAft>
+              <a:buNone/>
+            </a:pPr>
+            <a:r>
+              <a:rPr lang="en-US" sz="1200" b="0">
+                <a:solidFill>
+                  <a:srgbClr val="202B33"/>
+                </a:solidFill>
+                <a:latin typeface="Arial"/>
+                <a:ea typeface="Arial"/>
+                <a:cs typeface="Arial"/>
+              </a:rPr>
+              <a:t xml:space="preserve">So here is the hazard, and it applies to the small</a:t>
+            </a:r>
+            <a:endParaRPr lang="en-US" sz="1200"/>
+          </a:p>
+          <a:p>
+            <a:pPr marL="0" indent="0">
+              <a:lnSpc>
+                <a:spcPts val="1575"/>
+              </a:lnSpc>
+              <a:spcAft>
+                <a:spcPts val="0"/>
+              </a:spcAft>
+              <a:buNone/>
+            </a:pPr>
+            <a:r>
+              <a:rPr lang="en-US" sz="1200" b="0">
+                <a:solidFill>
+                  <a:srgbClr val="202B33"/>
+                </a:solidFill>
+                <a:latin typeface="Arial"/>
+                <a:ea typeface="Arial"/>
+                <a:cs typeface="Arial"/>
+              </a:rPr>
+              <a:t xml:space="preserve">systems too. Risk does not grow with the number of</a:t>
+            </a:r>
+            <a:endParaRPr lang="en-US" sz="1200"/>
+          </a:p>
+          <a:p>
+            <a:pPr marL="0" indent="0">
+              <a:lnSpc>
+                <a:spcPts val="1575"/>
+              </a:lnSpc>
+              <a:spcAft>
+                <a:spcPts val="0"/>
+              </a:spcAft>
+              <a:buNone/>
+            </a:pPr>
+            <a:r>
+              <a:rPr lang="en-US" sz="1200" b="0">
+                <a:solidFill>
+                  <a:srgbClr val="202B33"/>
+                </a:solidFill>
+                <a:latin typeface="Arial"/>
+                <a:ea typeface="Arial"/>
+                <a:cs typeface="Arial"/>
+              </a:rPr>
+              <a:t xml:space="preserve">tools. It grows with the number of pathways between</a:t>
+            </a:r>
+            <a:endParaRPr lang="en-US" sz="1200"/>
+          </a:p>
+          <a:p>
+            <a:pPr marL="0" indent="0">
+              <a:lnSpc>
+                <a:spcPts val="1575"/>
+              </a:lnSpc>
+              <a:spcAft>
+                <a:spcPts val="0"/>
+              </a:spcAft>
+              <a:buNone/>
+            </a:pPr>
+            <a:r>
+              <a:rPr lang="en-US" sz="1200" b="0">
+                <a:solidFill>
+                  <a:srgbClr val="202B33"/>
+                </a:solidFill>
+                <a:latin typeface="Arial"/>
+                <a:ea typeface="Arial"/>
+                <a:cs typeface="Arial"/>
+              </a:rPr>
+              <a:t xml:space="preserve">them, and every integration multiplies those. Ten</a:t>
+            </a:r>
+            <a:endParaRPr lang="en-US" sz="1200"/>
+          </a:p>
+          <a:p>
+            <a:pPr marL="0" indent="0">
+              <a:lnSpc>
+                <a:spcPts val="1575"/>
+              </a:lnSpc>
+              <a:spcAft>
+                <a:spcPts val="0"/>
+              </a:spcAft>
+              <a:buNone/>
+            </a:pPr>
+            <a:r>
+              <a:rPr lang="en-US" sz="1200" b="0">
+                <a:solidFill>
+                  <a:srgbClr val="202B33"/>
+                </a:solidFill>
+                <a:latin typeface="Arial"/>
+                <a:ea typeface="Arial"/>
+                <a:cs typeface="Arial"/>
+              </a:rPr>
+              <a:t xml:space="preserve">tools is forty-five pairs before you count chains.</a:t>
+            </a:r>
+            <a:endParaRPr lang="en-US" sz="1200"/>
+          </a:p>
+          <a:p>
+            <a:pPr marL="0" indent="0">
+              <a:lnSpc>
+                <a:spcPts val="1575"/>
+              </a:lnSpc>
+              <a:spcAft>
+                <a:spcPts val="0"/>
+              </a:spcAft>
+              <a:buNone/>
+            </a:pPr>
+            <a:r>
+              <a:rPr lang="en-US" sz="1200" b="0">
+                <a:solidFill>
+                  <a:srgbClr val="202B33"/>
+                </a:solidFill>
+                <a:latin typeface="Arial"/>
+                <a:ea typeface="Arial"/>
+                <a:cs typeface="Arial"/>
+              </a:rPr>
+              <a:t xml:space="preserve">Plug in one SaaS with a dozen endpoints and you did</a:t>
+            </a:r>
+            <a:endParaRPr lang="en-US" sz="1200"/>
+          </a:p>
+          <a:p>
+            <a:pPr marL="0" indent="0">
+              <a:lnSpc>
+                <a:spcPts val="1575"/>
+              </a:lnSpc>
+              <a:spcAft>
+                <a:spcPts val="0"/>
+              </a:spcAft>
+              <a:buNone/>
+            </a:pPr>
+            <a:r>
+              <a:rPr lang="en-US" sz="1200" b="0">
+                <a:solidFill>
+                  <a:srgbClr val="202B33"/>
+                </a:solidFill>
+                <a:latin typeface="Arial"/>
+                <a:ea typeface="Arial"/>
+                <a:cs typeface="Arial"/>
+              </a:rPr>
+              <a:t xml:space="preserve">not add twelve capabilities; you added hundreds of</a:t>
+            </a:r>
+            <a:endParaRPr lang="en-US" sz="1200"/>
+          </a:p>
+          <a:p>
+            <a:pPr marL="0" indent="0">
+              <a:lnSpc>
+                <a:spcPts val="1575"/>
+              </a:lnSpc>
+              <a:spcAft>
+                <a:spcPts val="0"/>
+              </a:spcAft>
+              <a:buNone/>
+            </a:pPr>
+            <a:r>
+              <a:rPr lang="en-US" sz="1200" b="0">
+                <a:solidFill>
+                  <a:srgbClr val="202B33"/>
+                </a:solidFill>
+                <a:latin typeface="Arial"/>
+                <a:ea typeface="Arial"/>
+                <a:cs typeface="Arial"/>
+              </a:rPr>
+              <a:t xml:space="preserve">routes from something the agent can read to something</a:t>
+            </a:r>
+            <a:endParaRPr lang="en-US" sz="1200"/>
+          </a:p>
+          <a:p>
+            <a:pPr marL="0" indent="0">
+              <a:lnSpc>
+                <a:spcPts val="1575"/>
+              </a:lnSpc>
+              <a:spcAft>
+                <a:spcPts val="0"/>
+              </a:spcAft>
+              <a:buNone/>
+            </a:pPr>
+            <a:r>
+              <a:rPr lang="en-US" sz="1200" b="0">
+                <a:solidFill>
+                  <a:srgbClr val="202B33"/>
+                </a:solidFill>
+                <a:latin typeface="Arial"/>
+                <a:ea typeface="Arial"/>
+                <a:cs typeface="Arial"/>
+              </a:rPr>
+              <a:t xml:space="preserve">it can do. Nobody reviews those combinations. Not</a:t>
+            </a:r>
+            <a:endParaRPr lang="en-US" sz="1200"/>
+          </a:p>
+          <a:p>
+            <a:pPr marL="0" indent="0">
+              <a:lnSpc>
+                <a:spcPts val="1575"/>
+              </a:lnSpc>
+              <a:spcAft>
+                <a:spcPts val="0"/>
+              </a:spcAft>
+              <a:buNone/>
+            </a:pPr>
+            <a:r>
+              <a:rPr lang="en-US" sz="1200" b="0">
+                <a:solidFill>
+                  <a:srgbClr val="202B33"/>
+                </a:solidFill>
+                <a:latin typeface="Arial"/>
+                <a:ea typeface="Arial"/>
+                <a:cs typeface="Arial"/>
+              </a:rPr>
+              <a:t xml:space="preserve">your security team, not the model, not you at three</a:t>
+            </a:r>
+            <a:endParaRPr lang="en-US" sz="1200"/>
+          </a:p>
+          <a:p>
+            <a:pPr marL="0" indent="0">
+              <a:lnSpc>
+                <a:spcPts val="1575"/>
+              </a:lnSpc>
+              <a:spcAft>
+                <a:spcPts val="0"/>
+              </a:spcAft>
+              <a:buNone/>
+            </a:pPr>
+            <a:r>
+              <a:rPr lang="en-US" sz="1200" b="0">
+                <a:solidFill>
+                  <a:srgbClr val="202B33"/>
+                </a:solidFill>
+                <a:latin typeface="Arial"/>
+                <a:ea typeface="Arial"/>
+                <a:cs typeface="Arial"/>
+              </a:rPr>
+              <a:t xml:space="preserve">in the morning. The dangerous pairing is never on the</a:t>
+            </a:r>
+            <a:endParaRPr lang="en-US" sz="1200"/>
+          </a:p>
+          <a:p>
+            <a:pPr marL="0" indent="0">
+              <a:lnSpc>
+                <a:spcPts val="1575"/>
+              </a:lnSpc>
+              <a:spcAft>
+                <a:spcPts val="0"/>
+              </a:spcAft>
+              <a:buNone/>
+            </a:pPr>
+            <a:r>
+              <a:rPr lang="en-US" sz="1200" b="0">
+                <a:solidFill>
+                  <a:srgbClr val="202B33"/>
+                </a:solidFill>
+                <a:latin typeface="Arial"/>
+                <a:ea typeface="Arial"/>
+                <a:cs typeface="Arial"/>
+              </a:rPr>
+              <a:t xml:space="preserve">roadmap. It gets discovered.</a:t>
             </a:r>
             <a:endParaRPr lang="en-US" sz="1200"/>
           </a:p>
@@ -12094,7 +7137,7 @@
                 <a:ea typeface="Arial"/>
                 <a:cs typeface="Arial"/>
               </a:rPr>
-              <a:t xml:space="preserve">02 / 08    SOURCE SLIDE 3</a:t>
+              <a:t xml:space="preserve">02 / 07    SOURCE SLIDE 3</a:t>
             </a:r>
             <a:endParaRPr lang="en-US" sz="1050"/>
           </a:p>
@@ -12192,7 +7235,7 @@
                 <a:ea typeface="Arial"/>
                 <a:cs typeface="Arial"/>
               </a:rPr>
-              <a:t xml:space="preserve">So here is the hazard, and it applies to</a:t>
+              <a:t xml:space="preserve">So the question is not whether to give the</a:t>
             </a:r>
             <a:endParaRPr lang="en-US" sz="1500"/>
           </a:p>
@@ -12215,7 +7258,7 @@
                 <a:ea typeface="Arial"/>
                 <a:cs typeface="Arial"/>
               </a:rPr>
-              <a:t xml:space="preserve">the small systems too. Risk does not grow</a:t>
+              <a:t xml:space="preserve">assistant access. It is how to keep the</a:t>
             </a:r>
             <a:endParaRPr lang="en-US" sz="1500"/>
           </a:p>
@@ -12238,7 +7281,7 @@
                 <a:ea typeface="Arial"/>
                 <a:cs typeface="Arial"/>
               </a:rPr>
-              <a:t xml:space="preserve">with the number of tools. It grows with the</a:t>
+              <a:t xml:space="preserve">number of live pathways small enough to</a:t>
             </a:r>
             <a:endParaRPr lang="en-US" sz="1500"/>
           </a:p>
@@ -12261,191 +7304,7 @@
                 <a:ea typeface="Arial"/>
                 <a:cs typeface="Arial"/>
               </a:rPr>
-              <a:t xml:space="preserve">number of pathways between them, and every</a:t>
-            </a:r>
-            <a:endParaRPr lang="en-US" sz="1500"/>
-          </a:p>
-          <a:p>
-            <a:pPr marL="0" indent="0">
-              <a:lnSpc>
-                <a:spcPts val="1950"/>
-              </a:lnSpc>
-              <a:spcAft>
-                <a:spcPts val="0"/>
-              </a:spcAft>
-              <a:buNone/>
-            </a:pPr>
-            <a:r>
-              <a:rPr lang="en-US" sz="1500" b="0">
-                <a:solidFill>
-                  <a:srgbClr val="202B33"/>
-                </a:solidFill>
-                <a:latin typeface="Arial"/>
-                <a:ea typeface="Arial"/>
-                <a:cs typeface="Arial"/>
-              </a:rPr>
-              <a:t xml:space="preserve">integration multiplies those. Ten tools is</a:t>
-            </a:r>
-            <a:endParaRPr lang="en-US" sz="1500"/>
-          </a:p>
-          <a:p>
-            <a:pPr marL="0" indent="0">
-              <a:lnSpc>
-                <a:spcPts val="1950"/>
-              </a:lnSpc>
-              <a:spcAft>
-                <a:spcPts val="0"/>
-              </a:spcAft>
-              <a:buNone/>
-            </a:pPr>
-            <a:r>
-              <a:rPr lang="en-US" sz="1500" b="0">
-                <a:solidFill>
-                  <a:srgbClr val="202B33"/>
-                </a:solidFill>
-                <a:latin typeface="Arial"/>
-                <a:ea typeface="Arial"/>
-                <a:cs typeface="Arial"/>
-              </a:rPr>
-              <a:t xml:space="preserve">forty-five pairs before you count chains.</a:t>
-            </a:r>
-            <a:endParaRPr lang="en-US" sz="1500"/>
-          </a:p>
-          <a:p>
-            <a:pPr marL="0" indent="0">
-              <a:lnSpc>
-                <a:spcPts val="1950"/>
-              </a:lnSpc>
-              <a:spcAft>
-                <a:spcPts val="0"/>
-              </a:spcAft>
-              <a:buNone/>
-            </a:pPr>
-            <a:r>
-              <a:rPr lang="en-US" sz="1500" b="0">
-                <a:solidFill>
-                  <a:srgbClr val="202B33"/>
-                </a:solidFill>
-                <a:latin typeface="Arial"/>
-                <a:ea typeface="Arial"/>
-                <a:cs typeface="Arial"/>
-              </a:rPr>
-              <a:t xml:space="preserve">Plug in one SaaS with a dozen endpoints and</a:t>
-            </a:r>
-            <a:endParaRPr lang="en-US" sz="1500"/>
-          </a:p>
-          <a:p>
-            <a:pPr marL="0" indent="0">
-              <a:lnSpc>
-                <a:spcPts val="1950"/>
-              </a:lnSpc>
-              <a:spcAft>
-                <a:spcPts val="0"/>
-              </a:spcAft>
-              <a:buNone/>
-            </a:pPr>
-            <a:r>
-              <a:rPr lang="en-US" sz="1500" b="0">
-                <a:solidFill>
-                  <a:srgbClr val="202B33"/>
-                </a:solidFill>
-                <a:latin typeface="Arial"/>
-                <a:ea typeface="Arial"/>
-                <a:cs typeface="Arial"/>
-              </a:rPr>
-              <a:t xml:space="preserve">you did not add twelve capabilities; you</a:t>
-            </a:r>
-            <a:endParaRPr lang="en-US" sz="1500"/>
-          </a:p>
-          <a:p>
-            <a:pPr marL="0" indent="0">
-              <a:lnSpc>
-                <a:spcPts val="1950"/>
-              </a:lnSpc>
-              <a:spcAft>
-                <a:spcPts val="0"/>
-              </a:spcAft>
-              <a:buNone/>
-            </a:pPr>
-            <a:r>
-              <a:rPr lang="en-US" sz="1500" b="0">
-                <a:solidFill>
-                  <a:srgbClr val="202B33"/>
-                </a:solidFill>
-                <a:latin typeface="Arial"/>
-                <a:ea typeface="Arial"/>
-                <a:cs typeface="Arial"/>
-              </a:rPr>
-              <a:t xml:space="preserve">added hundreds of routes from something the</a:t>
-            </a:r>
-            <a:endParaRPr lang="en-US" sz="1500"/>
-          </a:p>
-          <a:p>
-            <a:pPr marL="0" indent="0">
-              <a:lnSpc>
-                <a:spcPts val="1950"/>
-              </a:lnSpc>
-              <a:spcAft>
-                <a:spcPts val="0"/>
-              </a:spcAft>
-              <a:buNone/>
-            </a:pPr>
-            <a:r>
-              <a:rPr lang="en-US" sz="1500" b="0">
-                <a:solidFill>
-                  <a:srgbClr val="202B33"/>
-                </a:solidFill>
-                <a:latin typeface="Arial"/>
-                <a:ea typeface="Arial"/>
-                <a:cs typeface="Arial"/>
-              </a:rPr>
-              <a:t xml:space="preserve">agent can read to something it can do.</a:t>
-            </a:r>
-            <a:endParaRPr lang="en-US" sz="1500"/>
-          </a:p>
-          <a:p>
-            <a:pPr marL="0" indent="0">
-              <a:lnSpc>
-                <a:spcPts val="1950"/>
-              </a:lnSpc>
-              <a:spcAft>
-                <a:spcPts val="0"/>
-              </a:spcAft>
-              <a:buNone/>
-            </a:pPr>
-            <a:r>
-              <a:rPr lang="en-US" sz="1500" b="0">
-                <a:solidFill>
-                  <a:srgbClr val="202B33"/>
-                </a:solidFill>
-                <a:latin typeface="Arial"/>
-                <a:ea typeface="Arial"/>
-                <a:cs typeface="Arial"/>
-              </a:rPr>
-              <a:t xml:space="preserve">Nobody reviews those combinations. Not your</a:t>
-            </a:r>
-            <a:endParaRPr lang="en-US" sz="1500"/>
-          </a:p>
-          <a:p>
-            <a:pPr marL="0" indent="0">
-              <a:lnSpc>
-                <a:spcPts val="1950"/>
-              </a:lnSpc>
-              <a:spcAft>
-                <a:spcPts val="0"/>
-              </a:spcAft>
-              <a:buNone/>
-            </a:pPr>
-            <a:r>
-              <a:rPr lang="en-US" sz="1500" b="0">
-                <a:solidFill>
-                  <a:srgbClr val="202B33"/>
-                </a:solidFill>
-                <a:latin typeface="Arial"/>
-                <a:ea typeface="Arial"/>
-                <a:cs typeface="Arial"/>
-              </a:rPr>
-              <a:t xml:space="preserve">security team, not the model, not you at</a:t>
+              <a:t xml:space="preserve">reason about, one job at a time. That is</a:t>
             </a:r>
             <a:endParaRPr lang="en-US" sz="1500"/>
           </a:p>
@@ -12475,190 +7334,6 @@
             <a:noAutofit/>
           </a:bodyPr>
           <a:lstStyle/>
-          <a:p>
-            <a:pPr marL="0" indent="0">
-              <a:lnSpc>
-                <a:spcPts val="1950"/>
-              </a:lnSpc>
-              <a:spcAft>
-                <a:spcPts val="0"/>
-              </a:spcAft>
-              <a:buNone/>
-            </a:pPr>
-            <a:r>
-              <a:rPr lang="en-US" sz="1500" b="0">
-                <a:solidFill>
-                  <a:srgbClr val="202B33"/>
-                </a:solidFill>
-                <a:latin typeface="Arial"/>
-                <a:ea typeface="Arial"/>
-                <a:cs typeface="Arial"/>
-              </a:rPr>
-              <a:t xml:space="preserve">three in the morning. The dangerous pairing</a:t>
-            </a:r>
-            <a:endParaRPr lang="en-US" sz="1500"/>
-          </a:p>
-          <a:p>
-            <a:pPr marL="0" indent="0">
-              <a:lnSpc>
-                <a:spcPts val="1950"/>
-              </a:lnSpc>
-              <a:spcAft>
-                <a:spcPts val="0"/>
-              </a:spcAft>
-              <a:buNone/>
-            </a:pPr>
-            <a:r>
-              <a:rPr lang="en-US" sz="1500" b="0">
-                <a:solidFill>
-                  <a:srgbClr val="202B33"/>
-                </a:solidFill>
-                <a:latin typeface="Arial"/>
-                <a:ea typeface="Arial"/>
-                <a:cs typeface="Arial"/>
-              </a:rPr>
-              <a:t xml:space="preserve">is never on the roadmap. It gets</a:t>
-            </a:r>
-            <a:endParaRPr lang="en-US" sz="1500"/>
-          </a:p>
-          <a:p>
-            <a:pPr marL="0" indent="0">
-              <a:lnSpc>
-                <a:spcPts val="1950"/>
-              </a:lnSpc>
-              <a:spcAft>
-                <a:spcPts val="0"/>
-              </a:spcAft>
-              <a:buNone/>
-            </a:pPr>
-            <a:r>
-              <a:rPr lang="en-US" sz="1500" b="0">
-                <a:solidFill>
-                  <a:srgbClr val="202B33"/>
-                </a:solidFill>
-                <a:latin typeface="Arial"/>
-                <a:ea typeface="Arial"/>
-                <a:cs typeface="Arial"/>
-              </a:rPr>
-              <a:t xml:space="preserve">discovered.</a:t>
-            </a:r>
-            <a:endParaRPr lang="en-US" sz="1500"/>
-          </a:p>
-          <a:p>
-            <a:pPr marL="0" indent="0">
-              <a:lnSpc>
-                <a:spcPts val="1950"/>
-              </a:lnSpc>
-              <a:spcAft>
-                <a:spcPts val="0"/>
-              </a:spcAft>
-              <a:buNone/>
-            </a:pPr>
-            <a:r>
-              <a:rPr lang="en-US" sz="1500" b="0">
-                <a:solidFill>
-                  <a:srgbClr val="202B33"/>
-                </a:solidFill>
-                <a:latin typeface="Arial"/>
-                <a:ea typeface="Arial"/>
-                <a:cs typeface="Arial"/>
-              </a:rPr>
-              <a:t xml:space="preserve"/>
-            </a:r>
-            <a:endParaRPr lang="en-US" sz="1500"/>
-          </a:p>
-          <a:p>
-            <a:pPr marL="0" indent="0">
-              <a:lnSpc>
-                <a:spcPts val="1950"/>
-              </a:lnSpc>
-              <a:spcAft>
-                <a:spcPts val="0"/>
-              </a:spcAft>
-              <a:buNone/>
-            </a:pPr>
-            <a:r>
-              <a:rPr lang="en-US" sz="1500" b="0">
-                <a:solidFill>
-                  <a:srgbClr val="202B33"/>
-                </a:solidFill>
-                <a:latin typeface="Arial"/>
-                <a:ea typeface="Arial"/>
-                <a:cs typeface="Arial"/>
-              </a:rPr>
-              <a:t xml:space="preserve">So the question is not whether to give the</a:t>
-            </a:r>
-            <a:endParaRPr lang="en-US" sz="1500"/>
-          </a:p>
-          <a:p>
-            <a:pPr marL="0" indent="0">
-              <a:lnSpc>
-                <a:spcPts val="1950"/>
-              </a:lnSpc>
-              <a:spcAft>
-                <a:spcPts val="0"/>
-              </a:spcAft>
-              <a:buNone/>
-            </a:pPr>
-            <a:r>
-              <a:rPr lang="en-US" sz="1500" b="0">
-                <a:solidFill>
-                  <a:srgbClr val="202B33"/>
-                </a:solidFill>
-                <a:latin typeface="Arial"/>
-                <a:ea typeface="Arial"/>
-                <a:cs typeface="Arial"/>
-              </a:rPr>
-              <a:t xml:space="preserve">assistant access. It is how to keep the</a:t>
-            </a:r>
-            <a:endParaRPr lang="en-US" sz="1500"/>
-          </a:p>
-          <a:p>
-            <a:pPr marL="0" indent="0">
-              <a:lnSpc>
-                <a:spcPts val="1950"/>
-              </a:lnSpc>
-              <a:spcAft>
-                <a:spcPts val="0"/>
-              </a:spcAft>
-              <a:buNone/>
-            </a:pPr>
-            <a:r>
-              <a:rPr lang="en-US" sz="1500" b="0">
-                <a:solidFill>
-                  <a:srgbClr val="202B33"/>
-                </a:solidFill>
-                <a:latin typeface="Arial"/>
-                <a:ea typeface="Arial"/>
-                <a:cs typeface="Arial"/>
-              </a:rPr>
-              <a:t xml:space="preserve">number of live pathways small enough to</a:t>
-            </a:r>
-            <a:endParaRPr lang="en-US" sz="1500"/>
-          </a:p>
-          <a:p>
-            <a:pPr marL="0" indent="0">
-              <a:lnSpc>
-                <a:spcPts val="1950"/>
-              </a:lnSpc>
-              <a:spcAft>
-                <a:spcPts val="0"/>
-              </a:spcAft>
-              <a:buNone/>
-            </a:pPr>
-            <a:r>
-              <a:rPr lang="en-US" sz="1500" b="0">
-                <a:solidFill>
-                  <a:srgbClr val="202B33"/>
-                </a:solidFill>
-                <a:latin typeface="Arial"/>
-                <a:ea typeface="Arial"/>
-                <a:cs typeface="Arial"/>
-              </a:rPr>
-              <a:t xml:space="preserve">reason about, one job at a time. That is</a:t>
-            </a:r>
-            <a:endParaRPr lang="en-US" sz="1500"/>
-          </a:p>
           <a:p>
             <a:pPr marL="0" indent="0">
               <a:lnSpc>
@@ -12927,7 +7602,7 @@
                 <a:ea typeface="Arial"/>
                 <a:cs typeface="Arial"/>
               </a:rPr>
-              <a:t xml:space="preserve">03 / 08    SOURCE SLIDE 4</a:t>
+              <a:t xml:space="preserve">03 / 07    SOURCE SLIDE 4</a:t>
             </a:r>
             <a:endParaRPr lang="en-US" sz="1050"/>
           </a:p>
@@ -13291,75 +7966,6 @@
             </a:r>
             <a:endParaRPr lang="en-US" sz="1200"/>
           </a:p>
-          <a:p>
-            <a:pPr marL="0" indent="0">
-              <a:lnSpc>
-                <a:spcPts val="1575"/>
-              </a:lnSpc>
-              <a:spcAft>
-                <a:spcPts val="0"/>
-              </a:spcAft>
-              <a:buNone/>
-            </a:pPr>
-            <a:r>
-              <a:rPr lang="en-US" sz="1200" b="0">
-                <a:solidFill>
-                  <a:srgbClr val="202B33"/>
-                </a:solidFill>
-                <a:latin typeface="Arial"/>
-                <a:ea typeface="Arial"/>
-                <a:cs typeface="Arial"/>
-              </a:rPr>
-              <a:t xml:space="preserve">end it. Then it generates an agent for that job with</a:t>
-            </a:r>
-            <a:endParaRPr lang="en-US" sz="1200"/>
-          </a:p>
-          <a:p>
-            <a:pPr marL="0" indent="0">
-              <a:lnSpc>
-                <a:spcPts val="1575"/>
-              </a:lnSpc>
-              <a:spcAft>
-                <a:spcPts val="0"/>
-              </a:spcAft>
-              <a:buNone/>
-            </a:pPr>
-            <a:r>
-              <a:rPr lang="en-US" sz="1200" b="0">
-                <a:solidFill>
-                  <a:srgbClr val="202B33"/>
-                </a:solidFill>
-                <a:latin typeface="Arial"/>
-                <a:ea typeface="Arial"/>
-                <a:cs typeface="Arial"/>
-              </a:rPr>
-              <a:t xml:space="preserve">a tailored prompt and only the tools it expects to</a:t>
-            </a:r>
-            <a:endParaRPr lang="en-US" sz="1200"/>
-          </a:p>
-          <a:p>
-            <a:pPr marL="0" indent="0">
-              <a:lnSpc>
-                <a:spcPts val="1575"/>
-              </a:lnSpc>
-              <a:spcAft>
-                <a:spcPts val="0"/>
-              </a:spcAft>
-              <a:buNone/>
-            </a:pPr>
-            <a:r>
-              <a:rPr lang="en-US" sz="1200" b="0">
-                <a:solidFill>
-                  <a:srgbClr val="202B33"/>
-                </a:solidFill>
-                <a:latin typeface="Arial"/>
-                <a:ea typeface="Arial"/>
-                <a:cs typeface="Arial"/>
-              </a:rPr>
-              <a:t xml:space="preserve">need. A schema-diff agent gets read access to two</a:t>
-            </a:r>
-            <a:endParaRPr lang="en-US" sz="1200"/>
-          </a:p>
         </p:txBody>
       </p:sp>
       <p:sp>
@@ -13405,6 +8011,75 @@
                 <a:ea typeface="Arial"/>
                 <a:cs typeface="Arial"/>
               </a:rPr>
+              <a:t xml:space="preserve">end it. Then it generates an agent for that job with</a:t>
+            </a:r>
+            <a:endParaRPr lang="en-US" sz="1200"/>
+          </a:p>
+          <a:p>
+            <a:pPr marL="0" indent="0">
+              <a:lnSpc>
+                <a:spcPts val="1575"/>
+              </a:lnSpc>
+              <a:spcAft>
+                <a:spcPts val="0"/>
+              </a:spcAft>
+              <a:buNone/>
+            </a:pPr>
+            <a:r>
+              <a:rPr lang="en-US" sz="1200" b="0">
+                <a:solidFill>
+                  <a:srgbClr val="202B33"/>
+                </a:solidFill>
+                <a:latin typeface="Arial"/>
+                <a:ea typeface="Arial"/>
+                <a:cs typeface="Arial"/>
+              </a:rPr>
+              <a:t xml:space="preserve">a tailored prompt and only the tools it expects to</a:t>
+            </a:r>
+            <a:endParaRPr lang="en-US" sz="1200"/>
+          </a:p>
+          <a:p>
+            <a:pPr marL="0" indent="0">
+              <a:lnSpc>
+                <a:spcPts val="1575"/>
+              </a:lnSpc>
+              <a:spcAft>
+                <a:spcPts val="0"/>
+              </a:spcAft>
+              <a:buNone/>
+            </a:pPr>
+            <a:r>
+              <a:rPr lang="en-US" sz="1200" b="0">
+                <a:solidFill>
+                  <a:srgbClr val="202B33"/>
+                </a:solidFill>
+                <a:latin typeface="Arial"/>
+                <a:ea typeface="Arial"/>
+                <a:cs typeface="Arial"/>
+              </a:rPr>
+              <a:t xml:space="preserve">need. A schema-diff agent gets read access to two</a:t>
+            </a:r>
+            <a:endParaRPr lang="en-US" sz="1200"/>
+          </a:p>
+          <a:p>
+            <a:pPr marL="0" indent="0">
+              <a:lnSpc>
+                <a:spcPts val="1575"/>
+              </a:lnSpc>
+              <a:spcAft>
+                <a:spcPts val="0"/>
+              </a:spcAft>
+              <a:buNone/>
+            </a:pPr>
+            <a:r>
+              <a:rPr lang="en-US" sz="1200" b="0">
+                <a:solidFill>
+                  <a:srgbClr val="202B33"/>
+                </a:solidFill>
+                <a:latin typeface="Arial"/>
+                <a:ea typeface="Arial"/>
+                <a:cs typeface="Arial"/>
+              </a:rPr>
               <a:t xml:space="preserve">samples and a contract. It does not get the database.</a:t>
             </a:r>
             <a:endParaRPr lang="en-US" sz="1200"/>
@@ -13544,144 +8219,6 @@
                 <a:cs typeface="Arial"/>
               </a:rPr>
               <a:t xml:space="preserve">log is the most interesting file in the system.</a:t>
-            </a:r>
-            <a:endParaRPr lang="en-US" sz="1200"/>
-          </a:p>
-          <a:p>
-            <a:pPr marL="0" indent="0">
-              <a:lnSpc>
-                <a:spcPts val="1575"/>
-              </a:lnSpc>
-              <a:spcAft>
-                <a:spcPts val="0"/>
-              </a:spcAft>
-              <a:buNone/>
-            </a:pPr>
-            <a:r>
-              <a:rPr lang="en-US" sz="1200" b="0">
-                <a:solidFill>
-                  <a:srgbClr val="202B33"/>
-                </a:solidFill>
-                <a:latin typeface="Arial"/>
-                <a:ea typeface="Arial"/>
-                <a:cs typeface="Arial"/>
-              </a:rPr>
-              <a:t xml:space="preserve"/>
-            </a:r>
-            <a:endParaRPr lang="en-US" sz="1200"/>
-          </a:p>
-          <a:p>
-            <a:pPr marL="0" indent="0">
-              <a:lnSpc>
-                <a:spcPts val="1575"/>
-              </a:lnSpc>
-              <a:spcAft>
-                <a:spcPts val="0"/>
-              </a:spcAft>
-              <a:buNone/>
-            </a:pPr>
-            <a:r>
-              <a:rPr lang="en-US" sz="1200" b="0">
-                <a:solidFill>
-                  <a:srgbClr val="202B33"/>
-                </a:solidFill>
-                <a:latin typeface="Arial"/>
-                <a:ea typeface="Arial"/>
-                <a:cs typeface="Arial"/>
-              </a:rPr>
-              <a:t xml:space="preserve">I have this working as a prototype on my own</a:t>
-            </a:r>
-            <a:endParaRPr lang="en-US" sz="1200"/>
-          </a:p>
-          <a:p>
-            <a:pPr marL="0" indent="0">
-              <a:lnSpc>
-                <a:spcPts val="1575"/>
-              </a:lnSpc>
-              <a:spcAft>
-                <a:spcPts val="0"/>
-              </a:spcAft>
-              <a:buNone/>
-            </a:pPr>
-            <a:r>
-              <a:rPr lang="en-US" sz="1200" b="0">
-                <a:solidFill>
-                  <a:srgbClr val="202B33"/>
-                </a:solidFill>
-                <a:latin typeface="Arial"/>
-                <a:ea typeface="Arial"/>
-                <a:cs typeface="Arial"/>
-              </a:rPr>
-              <a:t xml:space="preserve">integrations. I am not going to give you a success</a:t>
-            </a:r>
-            <a:endParaRPr lang="en-US" sz="1200"/>
-          </a:p>
-          <a:p>
-            <a:pPr marL="0" indent="0">
-              <a:lnSpc>
-                <a:spcPts val="1575"/>
-              </a:lnSpc>
-              <a:spcAft>
-                <a:spcPts val="0"/>
-              </a:spcAft>
-              <a:buNone/>
-            </a:pPr>
-            <a:r>
-              <a:rPr lang="en-US" sz="1200" b="0">
-                <a:solidFill>
-                  <a:srgbClr val="202B33"/>
-                </a:solidFill>
-                <a:latin typeface="Arial"/>
-                <a:ea typeface="Arial"/>
-                <a:cs typeface="Arial"/>
-              </a:rPr>
-              <a:t xml:space="preserve">rate today, because I do not have one I trust yet. I</a:t>
-            </a:r>
-            <a:endParaRPr lang="en-US" sz="1200"/>
-          </a:p>
-          <a:p>
-            <a:pPr marL="0" indent="0">
-              <a:lnSpc>
-                <a:spcPts val="1575"/>
-              </a:lnSpc>
-              <a:spcAft>
-                <a:spcPts val="0"/>
-              </a:spcAft>
-              <a:buNone/>
-            </a:pPr>
-            <a:r>
-              <a:rPr lang="en-US" sz="1200" b="0">
-                <a:solidFill>
-                  <a:srgbClr val="202B33"/>
-                </a:solidFill>
-                <a:latin typeface="Arial"/>
-                <a:ea typeface="Arial"/>
-                <a:cs typeface="Arial"/>
-              </a:rPr>
-              <a:t xml:space="preserve">can tell you the log of denied tool requests taught</a:t>
-            </a:r>
-            <a:endParaRPr lang="en-US" sz="1200"/>
-          </a:p>
-          <a:p>
-            <a:pPr marL="0" indent="0">
-              <a:lnSpc>
-                <a:spcPts val="1575"/>
-              </a:lnSpc>
-              <a:spcAft>
-                <a:spcPts val="0"/>
-              </a:spcAft>
-              <a:buNone/>
-            </a:pPr>
-            <a:r>
-              <a:rPr lang="en-US" sz="1200" b="0">
-                <a:solidFill>
-                  <a:srgbClr val="202B33"/>
-                </a:solidFill>
-                <a:latin typeface="Arial"/>
-                <a:ea typeface="Arial"/>
-                <a:cs typeface="Arial"/>
-              </a:rPr>
-              <a:t xml:space="preserve">me more about my own permissions than any audit.</a:t>
             </a:r>
             <a:endParaRPr lang="en-US" sz="1200"/>
           </a:p>
@@ -13861,7 +8398,7 @@
                 <a:ea typeface="Arial"/>
                 <a:cs typeface="Arial"/>
               </a:rPr>
-              <a:t xml:space="preserve">04 / 08    SOURCE SLIDE 5</a:t>
+              <a:t xml:space="preserve">04 / 07    SOURCE SLIDE 5</a:t>
             </a:r>
             <a:endParaRPr lang="en-US" sz="1050"/>
           </a:p>
@@ -14225,29 +8762,6 @@
             </a:r>
             <a:endParaRPr lang="en-US" sz="1200"/>
           </a:p>
-          <a:p>
-            <a:pPr marL="0" indent="0">
-              <a:lnSpc>
-                <a:spcPts val="1575"/>
-              </a:lnSpc>
-              <a:spcAft>
-                <a:spcPts val="0"/>
-              </a:spcAft>
-              <a:buNone/>
-            </a:pPr>
-            <a:r>
-              <a:rPr lang="en-US" sz="1200" b="0">
-                <a:solidFill>
-                  <a:srgbClr val="202B33"/>
-                </a:solidFill>
-                <a:latin typeface="Arial"/>
-                <a:ea typeface="Arial"/>
-                <a:cs typeface="Arial"/>
-              </a:rPr>
-              <a:t xml:space="preserve">approval path, and a generated agent gets at most one</a:t>
-            </a:r>
-            <a:endParaRPr lang="en-US" sz="1200"/>
-          </a:p>
         </p:txBody>
       </p:sp>
       <p:sp>
@@ -14293,6 +8807,29 @@
                 <a:ea typeface="Arial"/>
                 <a:cs typeface="Arial"/>
               </a:rPr>
+              <a:t xml:space="preserve">approval path, and a generated agent gets at most one</a:t>
+            </a:r>
+            <a:endParaRPr lang="en-US" sz="1200"/>
+          </a:p>
+          <a:p>
+            <a:pPr marL="0" indent="0">
+              <a:lnSpc>
+                <a:spcPts val="1575"/>
+              </a:lnSpc>
+              <a:spcAft>
+                <a:spcPts val="0"/>
+              </a:spcAft>
+              <a:buNone/>
+            </a:pPr>
+            <a:r>
+              <a:rPr lang="en-US" sz="1200" b="0">
+                <a:solidFill>
+                  <a:srgbClr val="202B33"/>
+                </a:solidFill>
+                <a:latin typeface="Arial"/>
+                <a:ea typeface="Arial"/>
+                <a:cs typeface="Arial"/>
+              </a:rPr>
               <a:t xml:space="preserve">of them per job. Do not smuggle a destructive</a:t>
             </a:r>
             <a:endParaRPr lang="en-US" sz="1200"/>
@@ -14362,145 +8899,122 @@
                 <a:ea typeface="Arial"/>
                 <a:cs typeface="Arial"/>
               </a:rPr>
-              <a:t xml:space="preserve">This is least privilege, and Saltzer and Schroeder</a:t>
-            </a:r>
-            <a:endParaRPr lang="en-US" sz="1200"/>
-          </a:p>
-          <a:p>
-            <a:pPr marL="0" indent="0">
-              <a:lnSpc>
-                <a:spcPts val="1575"/>
-              </a:lnSpc>
-              <a:spcAft>
-                <a:spcPts val="0"/>
-              </a:spcAft>
-              <a:buNone/>
-            </a:pPr>
-            <a:r>
-              <a:rPr lang="en-US" sz="1200" b="0">
-                <a:solidFill>
-                  <a:srgbClr val="202B33"/>
-                </a:solidFill>
-                <a:latin typeface="Arial"/>
-                <a:ea typeface="Arial"/>
-                <a:cs typeface="Arial"/>
-              </a:rPr>
-              <a:t xml:space="preserve">wrote it down in 1975: every program runs with the</a:t>
-            </a:r>
-            <a:endParaRPr lang="en-US" sz="1200"/>
-          </a:p>
-          <a:p>
-            <a:pPr marL="0" indent="0">
-              <a:lnSpc>
-                <a:spcPts val="1575"/>
-              </a:lnSpc>
-              <a:spcAft>
-                <a:spcPts val="0"/>
-              </a:spcAft>
-              <a:buNone/>
-            </a:pPr>
-            <a:r>
-              <a:rPr lang="en-US" sz="1200" b="0">
-                <a:solidFill>
-                  <a:srgbClr val="202B33"/>
-                </a:solidFill>
-                <a:latin typeface="Arial"/>
-                <a:ea typeface="Arial"/>
-                <a:cs typeface="Arial"/>
-              </a:rPr>
-              <a:t xml:space="preserve">least set of privileges the job needs. We have all</a:t>
-            </a:r>
-            <a:endParaRPr lang="en-US" sz="1200"/>
-          </a:p>
-          <a:p>
-            <a:pPr marL="0" indent="0">
-              <a:lnSpc>
-                <a:spcPts val="1575"/>
-              </a:lnSpc>
-              <a:spcAft>
-                <a:spcPts val="0"/>
-              </a:spcAft>
-              <a:buNone/>
-            </a:pPr>
-            <a:r>
-              <a:rPr lang="en-US" sz="1200" b="0">
-                <a:solidFill>
-                  <a:srgbClr val="202B33"/>
-                </a:solidFill>
-                <a:latin typeface="Arial"/>
-                <a:ea typeface="Arial"/>
-                <a:cs typeface="Arial"/>
-              </a:rPr>
-              <a:t xml:space="preserve">been nodding at that for fifty years and shipping</a:t>
-            </a:r>
-            <a:endParaRPr lang="en-US" sz="1200"/>
-          </a:p>
-          <a:p>
-            <a:pPr marL="0" indent="0">
-              <a:lnSpc>
-                <a:spcPts val="1575"/>
-              </a:lnSpc>
-              <a:spcAft>
-                <a:spcPts val="0"/>
-              </a:spcAft>
-              <a:buNone/>
-            </a:pPr>
-            <a:r>
-              <a:rPr lang="en-US" sz="1200" b="0">
-                <a:solidFill>
-                  <a:srgbClr val="202B33"/>
-                </a:solidFill>
-                <a:latin typeface="Arial"/>
-                <a:ea typeface="Arial"/>
-                <a:cs typeface="Arial"/>
-              </a:rPr>
-              <a:t xml:space="preserve">service accounts that can do anything. A per-job</a:t>
-            </a:r>
-            <a:endParaRPr lang="en-US" sz="1200"/>
-          </a:p>
-          <a:p>
-            <a:pPr marL="0" indent="0">
-              <a:lnSpc>
-                <a:spcPts val="1575"/>
-              </a:lnSpc>
-              <a:spcAft>
-                <a:spcPts val="0"/>
-              </a:spcAft>
-              <a:buNone/>
-            </a:pPr>
-            <a:r>
-              <a:rPr lang="en-US" sz="1200" b="0">
-                <a:solidFill>
-                  <a:srgbClr val="202B33"/>
-                </a:solidFill>
-                <a:latin typeface="Arial"/>
-                <a:ea typeface="Arial"/>
-                <a:cs typeface="Arial"/>
-              </a:rPr>
-              <a:t xml:space="preserve">agent is the first thing I have built where complying</a:t>
-            </a:r>
-            <a:endParaRPr lang="en-US" sz="1200"/>
-          </a:p>
-          <a:p>
-            <a:pPr marL="0" indent="0">
-              <a:lnSpc>
-                <a:spcPts val="1575"/>
-              </a:lnSpc>
-              <a:spcAft>
-                <a:spcPts val="0"/>
-              </a:spcAft>
-              <a:buNone/>
-            </a:pPr>
-            <a:r>
-              <a:rPr lang="en-US" sz="1200" b="0">
-                <a:solidFill>
-                  <a:srgbClr val="202B33"/>
-                </a:solidFill>
-                <a:latin typeface="Arial"/>
-                <a:ea typeface="Arial"/>
-                <a:cs typeface="Arial"/>
-              </a:rPr>
-              <a:t xml:space="preserve">is genuinely easier than not.</a:t>
+              <a:t xml:space="preserve">Second, watch the boundary between systems. An agent</a:t>
+            </a:r>
+            <a:endParaRPr lang="en-US" sz="1200"/>
+          </a:p>
+          <a:p>
+            <a:pPr marL="0" indent="0">
+              <a:lnSpc>
+                <a:spcPts val="1575"/>
+              </a:lnSpc>
+              <a:spcAft>
+                <a:spcPts val="0"/>
+              </a:spcAft>
+              <a:buNone/>
+            </a:pPr>
+            <a:r>
+              <a:rPr lang="en-US" sz="1200" b="0">
+                <a:solidFill>
+                  <a:srgbClr val="202B33"/>
+                </a:solidFill>
+                <a:latin typeface="Arial"/>
+                <a:ea typeface="Arial"/>
+                <a:cs typeface="Arial"/>
+              </a:rPr>
+              <a:t xml:space="preserve">that can read customer data and an agent that can</a:t>
+            </a:r>
+            <a:endParaRPr lang="en-US" sz="1200"/>
+          </a:p>
+          <a:p>
+            <a:pPr marL="0" indent="0">
+              <a:lnSpc>
+                <a:spcPts val="1575"/>
+              </a:lnSpc>
+              <a:spcAft>
+                <a:spcPts val="0"/>
+              </a:spcAft>
+              <a:buNone/>
+            </a:pPr>
+            <a:r>
+              <a:rPr lang="en-US" sz="1200" b="0">
+                <a:solidFill>
+                  <a:srgbClr val="202B33"/>
+                </a:solidFill>
+                <a:latin typeface="Arial"/>
+                <a:ea typeface="Arial"/>
+                <a:cs typeface="Arial"/>
+              </a:rPr>
+              <a:t xml:space="preserve">post to a vendor are two agents, with a filter</a:t>
+            </a:r>
+            <a:endParaRPr lang="en-US" sz="1200"/>
+          </a:p>
+          <a:p>
+            <a:pPr marL="0" indent="0">
+              <a:lnSpc>
+                <a:spcPts val="1575"/>
+              </a:lnSpc>
+              <a:spcAft>
+                <a:spcPts val="0"/>
+              </a:spcAft>
+              <a:buNone/>
+            </a:pPr>
+            <a:r>
+              <a:rPr lang="en-US" sz="1200" b="0">
+                <a:solidFill>
+                  <a:srgbClr val="202B33"/>
+                </a:solidFill>
+                <a:latin typeface="Arial"/>
+                <a:ea typeface="Arial"/>
+                <a:cs typeface="Arial"/>
+              </a:rPr>
+              <a:t xml:space="preserve">between them. That is where data leaks: not through</a:t>
+            </a:r>
+            <a:endParaRPr lang="en-US" sz="1200"/>
+          </a:p>
+          <a:p>
+            <a:pPr marL="0" indent="0">
+              <a:lnSpc>
+                <a:spcPts val="1575"/>
+              </a:lnSpc>
+              <a:spcAft>
+                <a:spcPts val="0"/>
+              </a:spcAft>
+              <a:buNone/>
+            </a:pPr>
+            <a:r>
+              <a:rPr lang="en-US" sz="1200" b="0">
+                <a:solidFill>
+                  <a:srgbClr val="202B33"/>
+                </a:solidFill>
+                <a:latin typeface="Arial"/>
+                <a:ea typeface="Arial"/>
+                <a:cs typeface="Arial"/>
+              </a:rPr>
+              <a:t xml:space="preserve">the model being evil, but through a tool result</a:t>
+            </a:r>
+            <a:endParaRPr lang="en-US" sz="1200"/>
+          </a:p>
+          <a:p>
+            <a:pPr marL="0" indent="0">
+              <a:lnSpc>
+                <a:spcPts val="1575"/>
+              </a:lnSpc>
+              <a:spcAft>
+                <a:spcPts val="0"/>
+              </a:spcAft>
+              <a:buNone/>
+            </a:pPr>
+            <a:r>
+              <a:rPr lang="en-US" sz="1200" b="0">
+                <a:solidFill>
+                  <a:srgbClr val="202B33"/>
+                </a:solidFill>
+                <a:latin typeface="Arial"/>
+                <a:ea typeface="Arial"/>
+                <a:cs typeface="Arial"/>
+              </a:rPr>
+              <a:t xml:space="preserve">flowing into the next tool call.</a:t>
             </a:r>
             <a:endParaRPr lang="en-US" sz="1200"/>
           </a:p>
@@ -14680,679 +9194,7 @@
                 <a:ea typeface="Arial"/>
                 <a:cs typeface="Arial"/>
               </a:rPr>
-              <a:t xml:space="preserve">04 / 08    SOURCE SLIDE 5</a:t>
-            </a:r>
-            <a:endParaRPr lang="en-US" sz="1050"/>
-          </a:p>
-        </p:txBody>
-      </p:sp>
-      <p:sp>
-        <p:nvSpPr>
-          <p:cNvPr id="3" name="Text 3"/>
-          <p:cNvSpPr txBox="1"/>
-          <p:nvPr/>
-        </p:nvSpPr>
-        <p:spPr>
-          <a:xfrm>
-            <a:off x="457200" y="657225"/>
-            <a:ext cx="9144000" cy="1104900"/>
-          </a:xfrm>
-          <a:prstGeom prst="rect">
-            <a:avLst/>
-          </a:prstGeom>
-          <a:noFill/>
-          <a:ln>
-            <a:noFill/>
-          </a:ln>
-        </p:spPr>
-        <p:txBody>
-          <a:bodyPr wrap="none" lIns="0" tIns="0" rIns="0" bIns="0" anchor="t">
-            <a:noAutofit/>
-          </a:bodyPr>
-          <a:lstStyle/>
-          <a:p>
-            <a:pPr marL="0" indent="0">
-              <a:lnSpc>
-                <a:spcPts val="3060"/>
-              </a:lnSpc>
-              <a:spcAft>
-                <a:spcPts val="0"/>
-              </a:spcAft>
-              <a:buNone/>
-            </a:pPr>
-            <a:r>
-              <a:rPr lang="en-US" sz="2550" b="1">
-                <a:solidFill>
-                  <a:srgbClr val="202B33"/>
-                </a:solidFill>
-                <a:latin typeface="Arial"/>
-                <a:ea typeface="Arial"/>
-                <a:cs typeface="Arial"/>
-              </a:rPr>
-              <a:t xml:space="preserve">Guard the tools that can hurt (continued)</a:t>
-            </a:r>
-            <a:endParaRPr lang="en-US" sz="2550"/>
-          </a:p>
-        </p:txBody>
-      </p:sp>
-      <p:sp>
-        <p:nvSpPr>
-          <p:cNvPr id="4" name="Text 4"/>
-          <p:cNvSpPr txBox="1"/>
-          <p:nvPr/>
-        </p:nvSpPr>
-        <p:spPr>
-          <a:xfrm>
-            <a:off x="457200" y="1971675"/>
-            <a:ext cx="4352925" cy="5314950"/>
-          </a:xfrm>
-          <a:prstGeom prst="rect">
-            <a:avLst/>
-          </a:prstGeom>
-          <a:noFill/>
-          <a:ln>
-            <a:noFill/>
-          </a:ln>
-        </p:spPr>
-        <p:txBody>
-          <a:bodyPr wrap="none" lIns="0" tIns="0" rIns="0" bIns="0" anchor="t">
-            <a:noAutofit/>
-          </a:bodyPr>
-          <a:lstStyle/>
-          <a:p>
-            <a:pPr marL="0" indent="0">
-              <a:lnSpc>
-                <a:spcPts val="1950"/>
-              </a:lnSpc>
-              <a:spcAft>
-                <a:spcPts val="0"/>
-              </a:spcAft>
-              <a:buNone/>
-            </a:pPr>
-            <a:r>
-              <a:rPr lang="en-US" sz="1500" b="0">
-                <a:solidFill>
-                  <a:srgbClr val="202B33"/>
-                </a:solidFill>
-                <a:latin typeface="Arial"/>
-                <a:ea typeface="Arial"/>
-                <a:cs typeface="Arial"/>
-              </a:rPr>
-              <a:t xml:space="preserve">Second, watch the boundary between systems.</a:t>
-            </a:r>
-            <a:endParaRPr lang="en-US" sz="1500"/>
-          </a:p>
-          <a:p>
-            <a:pPr marL="0" indent="0">
-              <a:lnSpc>
-                <a:spcPts val="1950"/>
-              </a:lnSpc>
-              <a:spcAft>
-                <a:spcPts val="0"/>
-              </a:spcAft>
-              <a:buNone/>
-            </a:pPr>
-            <a:r>
-              <a:rPr lang="en-US" sz="1500" b="0">
-                <a:solidFill>
-                  <a:srgbClr val="202B33"/>
-                </a:solidFill>
-                <a:latin typeface="Arial"/>
-                <a:ea typeface="Arial"/>
-                <a:cs typeface="Arial"/>
-              </a:rPr>
-              <a:t xml:space="preserve">An agent that can read customer data and an</a:t>
-            </a:r>
-            <a:endParaRPr lang="en-US" sz="1500"/>
-          </a:p>
-          <a:p>
-            <a:pPr marL="0" indent="0">
-              <a:lnSpc>
-                <a:spcPts val="1950"/>
-              </a:lnSpc>
-              <a:spcAft>
-                <a:spcPts val="0"/>
-              </a:spcAft>
-              <a:buNone/>
-            </a:pPr>
-            <a:r>
-              <a:rPr lang="en-US" sz="1500" b="0">
-                <a:solidFill>
-                  <a:srgbClr val="202B33"/>
-                </a:solidFill>
-                <a:latin typeface="Arial"/>
-                <a:ea typeface="Arial"/>
-                <a:cs typeface="Arial"/>
-              </a:rPr>
-              <a:t xml:space="preserve">agent that can post to a vendor are two</a:t>
-            </a:r>
-            <a:endParaRPr lang="en-US" sz="1500"/>
-          </a:p>
-          <a:p>
-            <a:pPr marL="0" indent="0">
-              <a:lnSpc>
-                <a:spcPts val="1950"/>
-              </a:lnSpc>
-              <a:spcAft>
-                <a:spcPts val="0"/>
-              </a:spcAft>
-              <a:buNone/>
-            </a:pPr>
-            <a:r>
-              <a:rPr lang="en-US" sz="1500" b="0">
-                <a:solidFill>
-                  <a:srgbClr val="202B33"/>
-                </a:solidFill>
-                <a:latin typeface="Arial"/>
-                <a:ea typeface="Arial"/>
-                <a:cs typeface="Arial"/>
-              </a:rPr>
-              <a:t xml:space="preserve">agents, with a filter between them. That is</a:t>
-            </a:r>
-            <a:endParaRPr lang="en-US" sz="1500"/>
-          </a:p>
-          <a:p>
-            <a:pPr marL="0" indent="0">
-              <a:lnSpc>
-                <a:spcPts val="1950"/>
-              </a:lnSpc>
-              <a:spcAft>
-                <a:spcPts val="0"/>
-              </a:spcAft>
-              <a:buNone/>
-            </a:pPr>
-            <a:r>
-              <a:rPr lang="en-US" sz="1500" b="0">
-                <a:solidFill>
-                  <a:srgbClr val="202B33"/>
-                </a:solidFill>
-                <a:latin typeface="Arial"/>
-                <a:ea typeface="Arial"/>
-                <a:cs typeface="Arial"/>
-              </a:rPr>
-              <a:t xml:space="preserve">where data leaks: not through the model</a:t>
-            </a:r>
-            <a:endParaRPr lang="en-US" sz="1500"/>
-          </a:p>
-          <a:p>
-            <a:pPr marL="0" indent="0">
-              <a:lnSpc>
-                <a:spcPts val="1950"/>
-              </a:lnSpc>
-              <a:spcAft>
-                <a:spcPts val="0"/>
-              </a:spcAft>
-              <a:buNone/>
-            </a:pPr>
-            <a:r>
-              <a:rPr lang="en-US" sz="1500" b="0">
-                <a:solidFill>
-                  <a:srgbClr val="202B33"/>
-                </a:solidFill>
-                <a:latin typeface="Arial"/>
-                <a:ea typeface="Arial"/>
-                <a:cs typeface="Arial"/>
-              </a:rPr>
-              <a:t xml:space="preserve">being evil, but through a tool result</a:t>
-            </a:r>
-            <a:endParaRPr lang="en-US" sz="1500"/>
-          </a:p>
-          <a:p>
-            <a:pPr marL="0" indent="0">
-              <a:lnSpc>
-                <a:spcPts val="1950"/>
-              </a:lnSpc>
-              <a:spcAft>
-                <a:spcPts val="0"/>
-              </a:spcAft>
-              <a:buNone/>
-            </a:pPr>
-            <a:r>
-              <a:rPr lang="en-US" sz="1500" b="0">
-                <a:solidFill>
-                  <a:srgbClr val="202B33"/>
-                </a:solidFill>
-                <a:latin typeface="Arial"/>
-                <a:ea typeface="Arial"/>
-                <a:cs typeface="Arial"/>
-              </a:rPr>
-              <a:t xml:space="preserve">flowing into the next tool call.</a:t>
-            </a:r>
-            <a:endParaRPr lang="en-US" sz="1500"/>
-          </a:p>
-          <a:p>
-            <a:pPr marL="0" indent="0">
-              <a:lnSpc>
-                <a:spcPts val="1950"/>
-              </a:lnSpc>
-              <a:spcAft>
-                <a:spcPts val="0"/>
-              </a:spcAft>
-              <a:buNone/>
-            </a:pPr>
-            <a:r>
-              <a:rPr lang="en-US" sz="1500" b="0">
-                <a:solidFill>
-                  <a:srgbClr val="202B33"/>
-                </a:solidFill>
-                <a:latin typeface="Arial"/>
-                <a:ea typeface="Arial"/>
-                <a:cs typeface="Arial"/>
-              </a:rPr>
-              <a:t xml:space="preserve"/>
-            </a:r>
-            <a:endParaRPr lang="en-US" sz="1500"/>
-          </a:p>
-          <a:p>
-            <a:pPr marL="0" indent="0">
-              <a:lnSpc>
-                <a:spcPts val="1950"/>
-              </a:lnSpc>
-              <a:spcAft>
-                <a:spcPts val="0"/>
-              </a:spcAft>
-              <a:buNone/>
-            </a:pPr>
-            <a:r>
-              <a:rPr lang="en-US" sz="1500" b="0">
-                <a:solidFill>
-                  <a:srgbClr val="202B33"/>
-                </a:solidFill>
-                <a:latin typeface="Arial"/>
-                <a:ea typeface="Arial"/>
-                <a:cs typeface="Arial"/>
-              </a:rPr>
-              <a:t xml:space="preserve">For sensitive processing, the planner gets</a:t>
-            </a:r>
-            <a:endParaRPr lang="en-US" sz="1500"/>
-          </a:p>
-        </p:txBody>
-      </p:sp>
-      <p:sp>
-        <p:nvSpPr>
-          <p:cNvPr id="5" name="Text 5"/>
-          <p:cNvSpPr txBox="1"/>
-          <p:nvPr/>
-        </p:nvSpPr>
-        <p:spPr>
-          <a:xfrm>
-            <a:off x="5238750" y="1971675"/>
-            <a:ext cx="4362450" cy="5314950"/>
-          </a:xfrm>
-          <a:prstGeom prst="rect">
-            <a:avLst/>
-          </a:prstGeom>
-          <a:noFill/>
-          <a:ln>
-            <a:noFill/>
-          </a:ln>
-        </p:spPr>
-        <p:txBody>
-          <a:bodyPr wrap="none" lIns="0" tIns="0" rIns="0" bIns="0" anchor="t">
-            <a:noAutofit/>
-          </a:bodyPr>
-          <a:lstStyle/>
-          <a:p>
-            <a:pPr marL="0" indent="0">
-              <a:lnSpc>
-                <a:spcPts val="1950"/>
-              </a:lnSpc>
-              <a:spcAft>
-                <a:spcPts val="0"/>
-              </a:spcAft>
-              <a:buNone/>
-            </a:pPr>
-            <a:r>
-              <a:rPr lang="en-US" sz="1500" b="0">
-                <a:solidFill>
-                  <a:srgbClr val="202B33"/>
-                </a:solidFill>
-                <a:latin typeface="Arial"/>
-                <a:ea typeface="Arial"/>
-                <a:cs typeface="Arial"/>
-              </a:rPr>
-              <a:t xml:space="preserve">an opaque job reference. A trusted</a:t>
-            </a:r>
-            <a:endParaRPr lang="en-US" sz="1500"/>
-          </a:p>
-          <a:p>
-            <a:pPr marL="0" indent="0">
-              <a:lnSpc>
-                <a:spcPts val="1950"/>
-              </a:lnSpc>
-              <a:spcAft>
-                <a:spcPts val="0"/>
-              </a:spcAft>
-              <a:buNone/>
-            </a:pPr>
-            <a:r>
-              <a:rPr lang="en-US" sz="1500" b="0">
-                <a:solidFill>
-                  <a:srgbClr val="202B33"/>
-                </a:solidFill>
-                <a:latin typeface="Arial"/>
-                <a:ea typeface="Arial"/>
-                <a:cs typeface="Arial"/>
-              </a:rPr>
-              <a:t xml:space="preserve">dispatcher grants a local worker scoped</a:t>
-            </a:r>
-            <a:endParaRPr lang="en-US" sz="1500"/>
-          </a:p>
-          <a:p>
-            <a:pPr marL="0" indent="0">
-              <a:lnSpc>
-                <a:spcPts val="1950"/>
-              </a:lnSpc>
-              <a:spcAft>
-                <a:spcPts val="0"/>
-              </a:spcAft>
-              <a:buNone/>
-            </a:pPr>
-            <a:r>
-              <a:rPr lang="en-US" sz="1500" b="0">
-                <a:solidFill>
-                  <a:srgbClr val="202B33"/>
-                </a:solidFill>
-                <a:latin typeface="Arial"/>
-                <a:ea typeface="Arial"/>
-                <a:cs typeface="Arial"/>
-              </a:rPr>
-              <a:t xml:space="preserve">access; the worker touches the data; only</a:t>
-            </a:r>
-            <a:endParaRPr lang="en-US" sz="1500"/>
-          </a:p>
-          <a:p>
-            <a:pPr marL="0" indent="0">
-              <a:lnSpc>
-                <a:spcPts val="1950"/>
-              </a:lnSpc>
-              <a:spcAft>
-                <a:spcPts val="0"/>
-              </a:spcAft>
-              <a:buNone/>
-            </a:pPr>
-            <a:r>
-              <a:rPr lang="en-US" sz="1500" b="0">
-                <a:solidFill>
-                  <a:srgbClr val="202B33"/>
-                </a:solidFill>
-                <a:latin typeface="Arial"/>
-                <a:ea typeface="Arial"/>
-                <a:cs typeface="Arial"/>
-              </a:rPr>
-              <a:t xml:space="preserve">an allowlisted status comes back. A signed</a:t>
-            </a:r>
-            <a:endParaRPr lang="en-US" sz="1500"/>
-          </a:p>
-          <a:p>
-            <a:pPr marL="0" indent="0">
-              <a:lnSpc>
-                <a:spcPts val="1950"/>
-              </a:lnSpc>
-              <a:spcAft>
-                <a:spcPts val="0"/>
-              </a:spcAft>
-              <a:buNone/>
-            </a:pPr>
-            <a:r>
-              <a:rPr lang="en-US" sz="1500" b="0">
-                <a:solidFill>
-                  <a:srgbClr val="202B33"/>
-                </a:solidFill>
-                <a:latin typeface="Arial"/>
-                <a:ea typeface="Arial"/>
-                <a:cs typeface="Arial"/>
-              </a:rPr>
-              <a:t xml:space="preserve">download URL is a bearer credential.</a:t>
-            </a:r>
-            <a:endParaRPr lang="en-US" sz="1500"/>
-          </a:p>
-          <a:p>
-            <a:pPr marL="0" indent="0">
-              <a:lnSpc>
-                <a:spcPts val="1950"/>
-              </a:lnSpc>
-              <a:spcAft>
-                <a:spcPts val="0"/>
-              </a:spcAft>
-              <a:buNone/>
-            </a:pPr>
-            <a:r>
-              <a:rPr lang="en-US" sz="1500" b="0">
-                <a:solidFill>
-                  <a:srgbClr val="202B33"/>
-                </a:solidFill>
-                <a:latin typeface="Arial"/>
-                <a:ea typeface="Arial"/>
-                <a:cs typeface="Arial"/>
-              </a:rPr>
-              <a:t xml:space="preserve">Handing it to a model while asking the</a:t>
-            </a:r>
-            <a:endParaRPr lang="en-US" sz="1500"/>
-          </a:p>
-          <a:p>
-            <a:pPr marL="0" indent="0">
-              <a:lnSpc>
-                <a:spcPts val="1950"/>
-              </a:lnSpc>
-              <a:spcAft>
-                <a:spcPts val="0"/>
-              </a:spcAft>
-              <a:buNone/>
-            </a:pPr>
-            <a:r>
-              <a:rPr lang="en-US" sz="1500" b="0">
-                <a:solidFill>
-                  <a:srgbClr val="202B33"/>
-                </a:solidFill>
-                <a:latin typeface="Arial"/>
-                <a:ea typeface="Arial"/>
-                <a:cs typeface="Arial"/>
-              </a:rPr>
-              <a:t xml:space="preserve">model not to use it is not isolation, it is</a:t>
-            </a:r>
-            <a:endParaRPr lang="en-US" sz="1500"/>
-          </a:p>
-          <a:p>
-            <a:pPr marL="0" indent="0">
-              <a:lnSpc>
-                <a:spcPts val="1950"/>
-              </a:lnSpc>
-              <a:spcAft>
-                <a:spcPts val="0"/>
-              </a:spcAft>
-              <a:buNone/>
-            </a:pPr>
-            <a:r>
-              <a:rPr lang="en-US" sz="1500" b="0">
-                <a:solidFill>
-                  <a:srgbClr val="202B33"/>
-                </a:solidFill>
-                <a:latin typeface="Arial"/>
-                <a:ea typeface="Arial"/>
-                <a:cs typeface="Arial"/>
-              </a:rPr>
-              <a:t xml:space="preserve">hope.</a:t>
-            </a:r>
-            <a:endParaRPr lang="en-US" sz="1500"/>
-          </a:p>
-        </p:txBody>
-      </p:sp>
-      <p:sp>
-        <p:nvSpPr>
-          <p:cNvPr id="6" name="Text 6"/>
-          <p:cNvSpPr txBox="1"/>
-          <p:nvPr/>
-        </p:nvSpPr>
-        <p:spPr>
-          <a:xfrm>
-            <a:off x="457200" y="7486650"/>
-            <a:ext cx="8820150" cy="190500"/>
-          </a:xfrm>
-          <a:prstGeom prst="rect">
-            <a:avLst/>
-          </a:prstGeom>
-          <a:noFill/>
-          <a:ln>
-            <a:noFill/>
-          </a:ln>
-        </p:spPr>
-        <p:txBody>
-          <a:bodyPr wrap="none" lIns="0" tIns="0" rIns="0" bIns="0" anchor="t">
-            <a:noAutofit/>
-          </a:bodyPr>
-          <a:lstStyle/>
-          <a:p>
-            <a:pPr marL="0" indent="0">
-              <a:lnSpc>
-                <a:spcPts val="1268"/>
-              </a:lnSpc>
-              <a:spcAft>
-                <a:spcPts val="0"/>
-              </a:spcAft>
-              <a:buNone/>
-            </a:pPr>
-            <a:r>
-              <a:rPr lang="en-US" sz="975" b="0">
-                <a:solidFill>
-                  <a:srgbClr val="48555B"/>
-                </a:solidFill>
-                <a:latin typeface="Arial"/>
-                <a:ea typeface="Arial"/>
-                <a:cs typeface="Arial"/>
-              </a:rPr>
-              <a:t xml:space="preserve">Adaptive, agentic apps</a:t>
-            </a:r>
-            <a:endParaRPr lang="en-US" sz="975"/>
-          </a:p>
-        </p:txBody>
-      </p:sp>
-      <p:sp>
-        <p:nvSpPr>
-          <p:cNvPr id="7" name="Text 7"/>
-          <p:cNvSpPr txBox="1"/>
-          <p:nvPr/>
-        </p:nvSpPr>
-        <p:spPr>
-          <a:xfrm>
-            <a:off x="9391650" y="7486650"/>
-            <a:ext cx="238125" cy="190500"/>
-          </a:xfrm>
-          <a:prstGeom prst="rect">
-            <a:avLst/>
-          </a:prstGeom>
-          <a:noFill/>
-          <a:ln>
-            <a:noFill/>
-          </a:ln>
-        </p:spPr>
-        <p:txBody>
-          <a:bodyPr wrap="none" lIns="0" tIns="0" rIns="0" bIns="0" anchor="t">
-            <a:noAutofit/>
-          </a:bodyPr>
-          <a:lstStyle/>
-          <a:p>
-            <a:pPr marL="0" indent="0">
-              <a:lnSpc>
-                <a:spcPts val="1268"/>
-              </a:lnSpc>
-              <a:spcAft>
-                <a:spcPts val="0"/>
-              </a:spcAft>
-              <a:buNone/>
-            </a:pPr>
-            <a:r>
-              <a:rPr lang="en-US" sz="975" b="0">
-                <a:solidFill>
-                  <a:srgbClr val="48555B"/>
-                </a:solidFill>
-                <a:latin typeface="Arial"/>
-                <a:ea typeface="Arial"/>
-                <a:cs typeface="Arial"/>
-              </a:rPr>
-              <a:t xml:space="preserve">7</a:t>
-            </a:r>
-            <a:endParaRPr lang="en-US" sz="975"/>
-          </a:p>
-        </p:txBody>
-      </p:sp>
-    </p:spTree>
-  </p:cSld>
-  <p:clrMapOvr>
-    <a:masterClrMapping/>
-  </p:clrMapOvr>
-</p:sld>
-</file>
-
-<file path=ppt/slides/slide8.xml><?xml version="1.0" encoding="utf-8"?>
-<p:sld xmlns:a="http://schemas.openxmlformats.org/drawingml/2006/main" xmlns:r="http://schemas.openxmlformats.org/officeDocument/2006/relationships" xmlns:p="http://schemas.openxmlformats.org/presentationml/2006/main">
-  <p:cSld name="Slide 8">
-    <p:bg>
-      <p:bgPr>
-        <a:solidFill>
-          <a:srgbClr val="FAFAF7"/>
-        </a:solidFill>
-        <a:effectLst/>
-      </p:bgPr>
-    </p:bg>
-    <p:spTree>
-      <p:nvGrpSpPr>
-        <p:cNvPr id="1" name=""/>
-        <p:cNvGrpSpPr/>
-        <p:nvPr/>
-      </p:nvGrpSpPr>
-      <p:grpSpPr>
-        <a:xfrm>
-          <a:off x="0" y="0"/>
-          <a:ext cx="0" cy="0"/>
-          <a:chOff x="0" y="0"/>
-          <a:chExt cx="0" cy="0"/>
-        </a:xfrm>
-      </p:grpSpPr>
-      <p:sp>
-        <p:nvSpPr>
-          <p:cNvPr id="2" name="Text 2"/>
-          <p:cNvSpPr txBox="1"/>
-          <p:nvPr/>
-        </p:nvSpPr>
-        <p:spPr>
-          <a:xfrm>
-            <a:off x="457200" y="266700"/>
-            <a:ext cx="9144000" cy="228600"/>
-          </a:xfrm>
-          <a:prstGeom prst="rect">
-            <a:avLst/>
-          </a:prstGeom>
-          <a:noFill/>
-          <a:ln>
-            <a:noFill/>
-          </a:ln>
-        </p:spPr>
-        <p:txBody>
-          <a:bodyPr wrap="none" lIns="0" tIns="0" rIns="0" bIns="0" anchor="t">
-            <a:noAutofit/>
-          </a:bodyPr>
-          <a:lstStyle/>
-          <a:p>
-            <a:pPr marL="0" indent="0">
-              <a:lnSpc>
-                <a:spcPts val="1365"/>
-              </a:lnSpc>
-              <a:spcAft>
-                <a:spcPts val="0"/>
-              </a:spcAft>
-              <a:buNone/>
-            </a:pPr>
-            <a:r>
-              <a:rPr lang="en-US" sz="1050" b="1">
-                <a:solidFill>
-                  <a:srgbClr val="246957"/>
-                </a:solidFill>
-                <a:latin typeface="Arial"/>
-                <a:ea typeface="Arial"/>
-                <a:cs typeface="Arial"/>
-              </a:rPr>
-              <a:t xml:space="preserve">05 / 08    SOURCE SLIDE 6</a:t>
+              <a:t xml:space="preserve">05 / 07    SOURCE SLIDE 6</a:t>
             </a:r>
             <a:endParaRPr lang="en-US" sz="1050"/>
           </a:p>
@@ -15670,75 +9512,6 @@
             </a:r>
             <a:endParaRPr lang="en-US" sz="1200"/>
           </a:p>
-          <a:p>
-            <a:pPr marL="0" indent="0">
-              <a:lnSpc>
-                <a:spcPts val="1575"/>
-              </a:lnSpc>
-              <a:spcAft>
-                <a:spcPts val="0"/>
-              </a:spcAft>
-              <a:buNone/>
-            </a:pPr>
-            <a:r>
-              <a:rPr lang="en-US" sz="1200" b="0">
-                <a:solidFill>
-                  <a:srgbClr val="202B33"/>
-                </a:solidFill>
-                <a:latin typeface="Arial"/>
-                <a:ea typeface="Arial"/>
-                <a:cs typeface="Arial"/>
-              </a:rPr>
-              <a:t xml:space="preserve">somebody, somewhere, is joining on.</a:t>
-            </a:r>
-            <a:endParaRPr lang="en-US" sz="1200"/>
-          </a:p>
-          <a:p>
-            <a:pPr marL="0" indent="0">
-              <a:lnSpc>
-                <a:spcPts val="1575"/>
-              </a:lnSpc>
-              <a:spcAft>
-                <a:spcPts val="0"/>
-              </a:spcAft>
-              <a:buNone/>
-            </a:pPr>
-            <a:r>
-              <a:rPr lang="en-US" sz="1200" b="0">
-                <a:solidFill>
-                  <a:srgbClr val="202B33"/>
-                </a:solidFill>
-                <a:latin typeface="Arial"/>
-                <a:ea typeface="Arial"/>
-                <a:cs typeface="Arial"/>
-              </a:rPr>
-              <a:t xml:space="preserve"/>
-            </a:r>
-            <a:endParaRPr lang="en-US" sz="1200"/>
-          </a:p>
-          <a:p>
-            <a:pPr marL="0" indent="0">
-              <a:lnSpc>
-                <a:spcPts val="1575"/>
-              </a:lnSpc>
-              <a:spcAft>
-                <a:spcPts val="0"/>
-              </a:spcAft>
-              <a:buNone/>
-            </a:pPr>
-            <a:r>
-              <a:rPr lang="en-US" sz="1200" b="0">
-                <a:solidFill>
-                  <a:srgbClr val="202B33"/>
-                </a:solidFill>
-                <a:latin typeface="Arial"/>
-                <a:ea typeface="Arial"/>
-                <a:cs typeface="Arial"/>
-              </a:rPr>
-              <a:t xml:space="preserve">A Boolean status becoming an enum is harder. Does</a:t>
-            </a:r>
-            <a:endParaRPr lang="en-US" sz="1200"/>
-          </a:p>
         </p:txBody>
       </p:sp>
       <p:sp>
@@ -15784,53 +9557,7 @@
                 <a:ea typeface="Arial"/>
                 <a:cs typeface="Arial"/>
               </a:rPr>
-              <a:t xml:space="preserve">true mean active, eligible, verified, or anything</a:t>
-            </a:r>
-            <a:endParaRPr lang="en-US" sz="1200"/>
-          </a:p>
-          <a:p>
-            <a:pPr marL="0" indent="0">
-              <a:lnSpc>
-                <a:spcPts val="1575"/>
-              </a:lnSpc>
-              <a:spcAft>
-                <a:spcPts val="0"/>
-              </a:spcAft>
-              <a:buNone/>
-            </a:pPr>
-            <a:r>
-              <a:rPr lang="en-US" sz="1200" b="0">
-                <a:solidFill>
-                  <a:srgbClr val="202B33"/>
-                </a:solidFill>
-                <a:latin typeface="Arial"/>
-                <a:ea typeface="Arial"/>
-                <a:cs typeface="Arial"/>
-              </a:rPr>
-              <a:t xml:space="preserve">except cancelled? Pending cannot become true just</a:t>
-            </a:r>
-            <a:endParaRPr lang="en-US" sz="1200"/>
-          </a:p>
-          <a:p>
-            <a:pPr marL="0" indent="0">
-              <a:lnSpc>
-                <a:spcPts val="1575"/>
-              </a:lnSpc>
-              <a:spcAft>
-                <a:spcPts val="0"/>
-              </a:spcAft>
-              <a:buNone/>
-            </a:pPr>
-            <a:r>
-              <a:rPr lang="en-US" sz="1200" b="0">
-                <a:solidFill>
-                  <a:srgbClr val="202B33"/>
-                </a:solidFill>
-                <a:latin typeface="Arial"/>
-                <a:ea typeface="Arial"/>
-                <a:cs typeface="Arial"/>
-              </a:rPr>
-              <a:t xml:space="preserve">because both are truthy in JavaScript.</a:t>
+              <a:t xml:space="preserve">somebody, somewhere, is joining on.</a:t>
             </a:r>
             <a:endParaRPr lang="en-US" sz="1200"/>
           </a:p>
@@ -16089,7 +9816,7 @@
                 <a:ea typeface="Arial"/>
                 <a:cs typeface="Arial"/>
               </a:rPr>
-              <a:t xml:space="preserve">8</a:t>
+              <a:t xml:space="preserve">7</a:t>
             </a:r>
             <a:endParaRPr lang="en-US" sz="975"/>
           </a:p>
@@ -16103,9 +9830,9 @@
 </p:sld>
 </file>
 
-<file path=ppt/slides/slide9.xml><?xml version="1.0" encoding="utf-8"?>
+<file path=ppt/slides/slide8.xml><?xml version="1.0" encoding="utf-8"?>
 <p:sld xmlns:a="http://schemas.openxmlformats.org/drawingml/2006/main" xmlns:r="http://schemas.openxmlformats.org/officeDocument/2006/relationships" xmlns:p="http://schemas.openxmlformats.org/presentationml/2006/main">
-  <p:cSld name="Slide 9">
+  <p:cSld name="Slide 8">
     <p:bg>
       <p:bgPr>
         <a:solidFill>
@@ -16171,7 +9898,7 @@
                 <a:ea typeface="Arial"/>
                 <a:cs typeface="Arial"/>
               </a:rPr>
-              <a:t xml:space="preserve">06 / 08    SOURCE SLIDE 10</a:t>
+              <a:t xml:space="preserve">06 / 07    SOURCE SLIDE 10</a:t>
             </a:r>
             <a:endParaRPr lang="en-US" sz="1050"/>
           </a:p>
@@ -16983,6 +10710,954 @@
       <p:sp>
         <p:nvSpPr>
           <p:cNvPr id="9" name="Text 9"/>
+          <p:cNvSpPr txBox="1"/>
+          <p:nvPr/>
+        </p:nvSpPr>
+        <p:spPr>
+          <a:xfrm>
+            <a:off x="9391650" y="7486650"/>
+            <a:ext cx="238125" cy="190500"/>
+          </a:xfrm>
+          <a:prstGeom prst="rect">
+            <a:avLst/>
+          </a:prstGeom>
+          <a:noFill/>
+          <a:ln>
+            <a:noFill/>
+          </a:ln>
+        </p:spPr>
+        <p:txBody>
+          <a:bodyPr wrap="none" lIns="0" tIns="0" rIns="0" bIns="0" anchor="t">
+            <a:noAutofit/>
+          </a:bodyPr>
+          <a:lstStyle/>
+          <a:p>
+            <a:pPr marL="0" indent="0">
+              <a:lnSpc>
+                <a:spcPts val="1268"/>
+              </a:lnSpc>
+              <a:spcAft>
+                <a:spcPts val="0"/>
+              </a:spcAft>
+              <a:buNone/>
+            </a:pPr>
+            <a:r>
+              <a:rPr lang="en-US" sz="975" b="0">
+                <a:solidFill>
+                  <a:srgbClr val="48555B"/>
+                </a:solidFill>
+                <a:latin typeface="Arial"/>
+                <a:ea typeface="Arial"/>
+                <a:cs typeface="Arial"/>
+              </a:rPr>
+              <a:t xml:space="preserve">8</a:t>
+            </a:r>
+            <a:endParaRPr lang="en-US" sz="975"/>
+          </a:p>
+        </p:txBody>
+      </p:sp>
+    </p:spTree>
+  </p:cSld>
+  <p:clrMapOvr>
+    <a:masterClrMapping/>
+  </p:clrMapOvr>
+</p:sld>
+</file>
+
+<file path=ppt/slides/slide9.xml><?xml version="1.0" encoding="utf-8"?>
+<p:sld xmlns:a="http://schemas.openxmlformats.org/drawingml/2006/main" xmlns:r="http://schemas.openxmlformats.org/officeDocument/2006/relationships" xmlns:p="http://schemas.openxmlformats.org/presentationml/2006/main">
+  <p:cSld name="Slide 9">
+    <p:bg>
+      <p:bgPr>
+        <a:solidFill>
+          <a:srgbClr val="FAFAF7"/>
+        </a:solidFill>
+        <a:effectLst/>
+      </p:bgPr>
+    </p:bg>
+    <p:spTree>
+      <p:nvGrpSpPr>
+        <p:cNvPr id="1" name=""/>
+        <p:cNvGrpSpPr/>
+        <p:nvPr/>
+      </p:nvGrpSpPr>
+      <p:grpSpPr>
+        <a:xfrm>
+          <a:off x="0" y="0"/>
+          <a:ext cx="0" cy="0"/>
+          <a:chOff x="0" y="0"/>
+          <a:chExt cx="0" cy="0"/>
+        </a:xfrm>
+      </p:grpSpPr>
+      <p:sp>
+        <p:nvSpPr>
+          <p:cNvPr id="2" name="Text 2"/>
+          <p:cNvSpPr txBox="1"/>
+          <p:nvPr/>
+        </p:nvSpPr>
+        <p:spPr>
+          <a:xfrm>
+            <a:off x="457200" y="266700"/>
+            <a:ext cx="9144000" cy="228600"/>
+          </a:xfrm>
+          <a:prstGeom prst="rect">
+            <a:avLst/>
+          </a:prstGeom>
+          <a:noFill/>
+          <a:ln>
+            <a:noFill/>
+          </a:ln>
+        </p:spPr>
+        <p:txBody>
+          <a:bodyPr wrap="none" lIns="0" tIns="0" rIns="0" bIns="0" anchor="t">
+            <a:noAutofit/>
+          </a:bodyPr>
+          <a:lstStyle/>
+          <a:p>
+            <a:pPr marL="0" indent="0">
+              <a:lnSpc>
+                <a:spcPts val="1365"/>
+              </a:lnSpc>
+              <a:spcAft>
+                <a:spcPts val="0"/>
+              </a:spcAft>
+              <a:buNone/>
+            </a:pPr>
+            <a:r>
+              <a:rPr lang="en-US" sz="1050" b="1">
+                <a:solidFill>
+                  <a:srgbClr val="246957"/>
+                </a:solidFill>
+                <a:latin typeface="Arial"/>
+                <a:ea typeface="Arial"/>
+                <a:cs typeface="Arial"/>
+              </a:rPr>
+              <a:t xml:space="preserve">07 / 07    SOURCE SLIDE 15</a:t>
+            </a:r>
+            <a:endParaRPr lang="en-US" sz="1050"/>
+          </a:p>
+        </p:txBody>
+      </p:sp>
+      <p:sp>
+        <p:nvSpPr>
+          <p:cNvPr id="3" name="Text 3"/>
+          <p:cNvSpPr txBox="1"/>
+          <p:nvPr/>
+        </p:nvSpPr>
+        <p:spPr>
+          <a:xfrm>
+            <a:off x="457200" y="657225"/>
+            <a:ext cx="9144000" cy="1104900"/>
+          </a:xfrm>
+          <a:prstGeom prst="rect">
+            <a:avLst/>
+          </a:prstGeom>
+          <a:noFill/>
+          <a:ln>
+            <a:noFill/>
+          </a:ln>
+        </p:spPr>
+        <p:txBody>
+          <a:bodyPr wrap="none" lIns="0" tIns="0" rIns="0" bIns="0" anchor="t">
+            <a:noAutofit/>
+          </a:bodyPr>
+          <a:lstStyle/>
+          <a:p>
+            <a:pPr marL="0" indent="0">
+              <a:lnSpc>
+                <a:spcPts val="3060"/>
+              </a:lnSpc>
+              <a:spcAft>
+                <a:spcPts val="0"/>
+              </a:spcAft>
+              <a:buNone/>
+            </a:pPr>
+            <a:r>
+              <a:rPr lang="en-US" sz="2550" b="1">
+                <a:solidFill>
+                  <a:srgbClr val="202B33"/>
+                </a:solidFill>
+                <a:latin typeface="Arial"/>
+                <a:ea typeface="Arial"/>
+                <a:cs typeface="Arial"/>
+              </a:rPr>
+              <a:t xml:space="preserve">The next surprise should cost less</a:t>
+            </a:r>
+            <a:endParaRPr lang="en-US" sz="2550"/>
+          </a:p>
+        </p:txBody>
+      </p:sp>
+      <p:sp>
+        <p:nvSpPr>
+          <p:cNvPr id="4" name="Text 4"/>
+          <p:cNvSpPr txBox="1"/>
+          <p:nvPr/>
+        </p:nvSpPr>
+        <p:spPr>
+          <a:xfrm>
+            <a:off x="457200" y="1971675"/>
+            <a:ext cx="4352925" cy="5314950"/>
+          </a:xfrm>
+          <a:prstGeom prst="rect">
+            <a:avLst/>
+          </a:prstGeom>
+          <a:noFill/>
+          <a:ln>
+            <a:noFill/>
+          </a:ln>
+        </p:spPr>
+        <p:txBody>
+          <a:bodyPr wrap="none" lIns="0" tIns="0" rIns="0" bIns="0" anchor="t">
+            <a:noAutofit/>
+          </a:bodyPr>
+          <a:lstStyle/>
+          <a:p>
+            <a:pPr marL="0" indent="0">
+              <a:lnSpc>
+                <a:spcPts val="1950"/>
+              </a:lnSpc>
+              <a:spcAft>
+                <a:spcPts val="0"/>
+              </a:spcAft>
+              <a:buNone/>
+            </a:pPr>
+            <a:r>
+              <a:rPr lang="en-US" sz="1500" b="0">
+                <a:solidFill>
+                  <a:srgbClr val="202B33"/>
+                </a:solidFill>
+                <a:latin typeface="Arial"/>
+                <a:ea typeface="Arial"/>
+                <a:cs typeface="Arial"/>
+              </a:rPr>
+              <a:t xml:space="preserve">Conjure exactly enough</a:t>
+            </a:r>
+            <a:endParaRPr lang="en-US" sz="1500"/>
+          </a:p>
+          <a:p>
+            <a:pPr marL="0" indent="0">
+              <a:lnSpc>
+                <a:spcPts val="1950"/>
+              </a:lnSpc>
+              <a:spcAft>
+                <a:spcPts val="0"/>
+              </a:spcAft>
+              <a:buNone/>
+            </a:pPr>
+            <a:r>
+              <a:rPr lang="en-US" sz="1500" b="0">
+                <a:solidFill>
+                  <a:srgbClr val="202B33"/>
+                </a:solidFill>
+                <a:latin typeface="Arial"/>
+                <a:ea typeface="Arial"/>
+                <a:cs typeface="Arial"/>
+              </a:rPr>
+              <a:t xml:space="preserve"/>
+            </a:r>
+            <a:endParaRPr lang="en-US" sz="1500"/>
+          </a:p>
+          <a:p>
+            <a:pPr marL="0" indent="0">
+              <a:lnSpc>
+                <a:spcPts val="1950"/>
+              </a:lnSpc>
+              <a:spcAft>
+                <a:spcPts val="0"/>
+              </a:spcAft>
+              <a:buNone/>
+            </a:pPr>
+            <a:r>
+              <a:rPr lang="en-US" sz="1500" b="0">
+                <a:solidFill>
+                  <a:srgbClr val="202B33"/>
+                </a:solidFill>
+                <a:latin typeface="Arial"/>
+                <a:ea typeface="Arial"/>
+                <a:cs typeface="Arial"/>
+              </a:rPr>
+              <a:t xml:space="preserve">Prove the repair</a:t>
+            </a:r>
+            <a:endParaRPr lang="en-US" sz="1500"/>
+          </a:p>
+          <a:p>
+            <a:pPr marL="0" indent="0">
+              <a:lnSpc>
+                <a:spcPts val="1950"/>
+              </a:lnSpc>
+              <a:spcAft>
+                <a:spcPts val="0"/>
+              </a:spcAft>
+              <a:buNone/>
+            </a:pPr>
+            <a:r>
+              <a:rPr lang="en-US" sz="1500" b="0">
+                <a:solidFill>
+                  <a:srgbClr val="202B33"/>
+                </a:solidFill>
+                <a:latin typeface="Arial"/>
+                <a:ea typeface="Arial"/>
+                <a:cs typeface="Arial"/>
+              </a:rPr>
+              <a:t xml:space="preserve"/>
+            </a:r>
+            <a:endParaRPr lang="en-US" sz="1500"/>
+          </a:p>
+          <a:p>
+            <a:pPr marL="0" indent="0">
+              <a:lnSpc>
+                <a:spcPts val="1950"/>
+              </a:lnSpc>
+              <a:spcAft>
+                <a:spcPts val="0"/>
+              </a:spcAft>
+              <a:buNone/>
+            </a:pPr>
+            <a:r>
+              <a:rPr lang="en-US" sz="1500" b="0">
+                <a:solidFill>
+                  <a:srgbClr val="202B33"/>
+                </a:solidFill>
+                <a:latin typeface="Arial"/>
+                <a:ea typeface="Arial"/>
+                <a:cs typeface="Arial"/>
+              </a:rPr>
+              <a:t xml:space="preserve">Remember the known case</a:t>
+            </a:r>
+            <a:endParaRPr lang="en-US" sz="1500"/>
+          </a:p>
+          <a:p>
+            <a:pPr marL="0" indent="0">
+              <a:lnSpc>
+                <a:spcPts val="1950"/>
+              </a:lnSpc>
+              <a:spcAft>
+                <a:spcPts val="0"/>
+              </a:spcAft>
+              <a:buNone/>
+            </a:pPr>
+            <a:r>
+              <a:rPr lang="en-US" sz="1500" b="0">
+                <a:solidFill>
+                  <a:srgbClr val="202B33"/>
+                </a:solidFill>
+                <a:latin typeface="Arial"/>
+                <a:ea typeface="Arial"/>
+                <a:cs typeface="Arial"/>
+              </a:rPr>
+              <a:t xml:space="preserve"/>
+            </a:r>
+            <a:endParaRPr lang="en-US" sz="1500"/>
+          </a:p>
+          <a:p>
+            <a:pPr marL="0" indent="0">
+              <a:lnSpc>
+                <a:spcPts val="1950"/>
+              </a:lnSpc>
+              <a:spcAft>
+                <a:spcPts val="0"/>
+              </a:spcAft>
+              <a:buNone/>
+            </a:pPr>
+            <a:r>
+              <a:rPr lang="en-US" sz="1500" b="0">
+                <a:solidFill>
+                  <a:srgbClr val="202B33"/>
+                </a:solidFill>
+                <a:latin typeface="Arial"/>
+                <a:ea typeface="Arial"/>
+                <a:cs typeface="Arial"/>
+              </a:rPr>
+              <a:t xml:space="preserve">And return to the assistant with</a:t>
+            </a:r>
+            <a:endParaRPr lang="en-US" sz="1500"/>
+          </a:p>
+          <a:p>
+            <a:pPr marL="0" indent="0">
+              <a:lnSpc>
+                <a:spcPts val="1950"/>
+              </a:lnSpc>
+              <a:spcAft>
+                <a:spcPts val="0"/>
+              </a:spcAft>
+              <a:buNone/>
+            </a:pPr>
+            <a:r>
+              <a:rPr lang="en-US" sz="1500" b="0">
+                <a:solidFill>
+                  <a:srgbClr val="202B33"/>
+                </a:solidFill>
+                <a:latin typeface="Arial"/>
+                <a:ea typeface="Arial"/>
+                <a:cs typeface="Arial"/>
+              </a:rPr>
+              <a:t xml:space="preserve">everything. It is still coming; nothing on</a:t>
+            </a:r>
+            <a:endParaRPr lang="en-US" sz="1500"/>
+          </a:p>
+          <a:p>
+            <a:pPr marL="0" indent="0">
+              <a:lnSpc>
+                <a:spcPts val="1950"/>
+              </a:lnSpc>
+              <a:spcAft>
+                <a:spcPts val="0"/>
+              </a:spcAft>
+              <a:buNone/>
+            </a:pPr>
+            <a:r>
+              <a:rPr lang="en-US" sz="1500" b="0">
+                <a:solidFill>
+                  <a:srgbClr val="202B33"/>
+                </a:solidFill>
+                <a:latin typeface="Arial"/>
+                <a:ea typeface="Arial"/>
+                <a:cs typeface="Arial"/>
+              </a:rPr>
+              <a:t xml:space="preserve">these slides stops it, and I would not want</a:t>
+            </a:r>
+            <a:endParaRPr lang="en-US" sz="1500"/>
+          </a:p>
+          <a:p>
+            <a:pPr marL="0" indent="0">
+              <a:lnSpc>
+                <a:spcPts val="1950"/>
+              </a:lnSpc>
+              <a:spcAft>
+                <a:spcPts val="0"/>
+              </a:spcAft>
+              <a:buNone/>
+            </a:pPr>
+            <a:r>
+              <a:rPr lang="en-US" sz="1500" b="0">
+                <a:solidFill>
+                  <a:srgbClr val="202B33"/>
+                </a:solidFill>
+                <a:latin typeface="Arial"/>
+                <a:ea typeface="Arial"/>
+                <a:cs typeface="Arial"/>
+              </a:rPr>
+              <a:t xml:space="preserve">to. What changed is how many of its</a:t>
+            </a:r>
+            <a:endParaRPr lang="en-US" sz="1500"/>
+          </a:p>
+          <a:p>
+            <a:pPr marL="0" indent="0">
+              <a:lnSpc>
+                <a:spcPts val="1950"/>
+              </a:lnSpc>
+              <a:spcAft>
+                <a:spcPts val="0"/>
+              </a:spcAft>
+              <a:buNone/>
+            </a:pPr>
+            <a:r>
+              <a:rPr lang="en-US" sz="1500" b="0">
+                <a:solidFill>
+                  <a:srgbClr val="202B33"/>
+                </a:solidFill>
+                <a:latin typeface="Arial"/>
+                <a:ea typeface="Arial"/>
+                <a:cs typeface="Arial"/>
+              </a:rPr>
+              <a:t xml:space="preserve">pathways are live at once. Each job gets a</a:t>
+            </a:r>
+            <a:endParaRPr lang="en-US" sz="1500"/>
+          </a:p>
+          <a:p>
+            <a:pPr marL="0" indent="0">
+              <a:lnSpc>
+                <a:spcPts val="1950"/>
+              </a:lnSpc>
+              <a:spcAft>
+                <a:spcPts val="0"/>
+              </a:spcAft>
+              <a:buNone/>
+            </a:pPr>
+            <a:r>
+              <a:rPr lang="en-US" sz="1500" b="0">
+                <a:solidFill>
+                  <a:srgbClr val="202B33"/>
+                </a:solidFill>
+                <a:latin typeface="Arial"/>
+                <a:ea typeface="Arial"/>
+                <a:cs typeface="Arial"/>
+              </a:rPr>
+              <a:t xml:space="preserve">small agent with a tailored prompt, a short</a:t>
+            </a:r>
+            <a:endParaRPr lang="en-US" sz="1500"/>
+          </a:p>
+          <a:p>
+            <a:pPr marL="0" indent="0">
+              <a:lnSpc>
+                <a:spcPts val="1950"/>
+              </a:lnSpc>
+              <a:spcAft>
+                <a:spcPts val="0"/>
+              </a:spcAft>
+              <a:buNone/>
+            </a:pPr>
+            <a:r>
+              <a:rPr lang="en-US" sz="1500" b="0">
+                <a:solidFill>
+                  <a:srgbClr val="202B33"/>
+                </a:solidFill>
+                <a:latin typeface="Arial"/>
+                <a:ea typeface="Arial"/>
+                <a:cs typeface="Arial"/>
+              </a:rPr>
+              <a:t xml:space="preserve">tool list, a hard budget, and a log of</a:t>
+            </a:r>
+            <a:endParaRPr lang="en-US" sz="1500"/>
+          </a:p>
+          <a:p>
+            <a:pPr marL="0" indent="0">
+              <a:lnSpc>
+                <a:spcPts val="1950"/>
+              </a:lnSpc>
+              <a:spcAft>
+                <a:spcPts val="0"/>
+              </a:spcAft>
+              <a:buNone/>
+            </a:pPr>
+            <a:r>
+              <a:rPr lang="en-US" sz="1500" b="0">
+                <a:solidFill>
+                  <a:srgbClr val="202B33"/>
+                </a:solidFill>
+                <a:latin typeface="Arial"/>
+                <a:ea typeface="Arial"/>
+                <a:cs typeface="Arial"/>
+              </a:rPr>
+              <a:t xml:space="preserve">every time it asked for more. That is the</a:t>
+            </a:r>
+            <a:endParaRPr lang="en-US" sz="1500"/>
+          </a:p>
+          <a:p>
+            <a:pPr marL="0" indent="0">
+              <a:lnSpc>
+                <a:spcPts val="1950"/>
+              </a:lnSpc>
+              <a:spcAft>
+                <a:spcPts val="0"/>
+              </a:spcAft>
+              <a:buNone/>
+            </a:pPr>
+            <a:r>
+              <a:rPr lang="en-US" sz="1500" b="0">
+                <a:solidFill>
+                  <a:srgbClr val="202B33"/>
+                </a:solidFill>
+                <a:latin typeface="Arial"/>
+                <a:ea typeface="Arial"/>
+                <a:cs typeface="Arial"/>
+              </a:rPr>
+              <a:t xml:space="preserve">strategy I believe in for the next few</a:t>
+            </a:r>
+            <a:endParaRPr lang="en-US" sz="1500"/>
+          </a:p>
+        </p:txBody>
+      </p:sp>
+      <p:sp>
+        <p:nvSpPr>
+          <p:cNvPr id="5" name="Text 5"/>
+          <p:cNvSpPr txBox="1"/>
+          <p:nvPr/>
+        </p:nvSpPr>
+        <p:spPr>
+          <a:xfrm>
+            <a:off x="5238750" y="1971675"/>
+            <a:ext cx="4362450" cy="5314950"/>
+          </a:xfrm>
+          <a:prstGeom prst="rect">
+            <a:avLst/>
+          </a:prstGeom>
+          <a:noFill/>
+          <a:ln>
+            <a:noFill/>
+          </a:ln>
+        </p:spPr>
+        <p:txBody>
+          <a:bodyPr wrap="none" lIns="0" tIns="0" rIns="0" bIns="0" anchor="t">
+            <a:noAutofit/>
+          </a:bodyPr>
+          <a:lstStyle/>
+          <a:p>
+            <a:pPr marL="0" indent="0">
+              <a:lnSpc>
+                <a:spcPts val="1950"/>
+              </a:lnSpc>
+              <a:spcAft>
+                <a:spcPts val="0"/>
+              </a:spcAft>
+              <a:buNone/>
+            </a:pPr>
+            <a:r>
+              <a:rPr lang="en-US" sz="1500" b="0">
+                <a:solidFill>
+                  <a:srgbClr val="202B33"/>
+                </a:solidFill>
+                <a:latin typeface="Arial"/>
+                <a:ea typeface="Arial"/>
+                <a:cs typeface="Arial"/>
+              </a:rPr>
+              <a:t xml:space="preserve">years: not one agent holding every</a:t>
+            </a:r>
+            <a:endParaRPr lang="en-US" sz="1500"/>
+          </a:p>
+          <a:p>
+            <a:pPr marL="0" indent="0">
+              <a:lnSpc>
+                <a:spcPts val="1950"/>
+              </a:lnSpc>
+              <a:spcAft>
+                <a:spcPts val="0"/>
+              </a:spcAft>
+              <a:buNone/>
+            </a:pPr>
+            <a:r>
+              <a:rPr lang="en-US" sz="1500" b="0">
+                <a:solidFill>
+                  <a:srgbClr val="202B33"/>
+                </a:solidFill>
+                <a:latin typeface="Arial"/>
+                <a:ea typeface="Arial"/>
+                <a:cs typeface="Arial"/>
+              </a:rPr>
+              <a:t xml:space="preserve">combination, which nobody can check, but</a:t>
+            </a:r>
+            <a:endParaRPr lang="en-US" sz="1500"/>
+          </a:p>
+          <a:p>
+            <a:pPr marL="0" indent="0">
+              <a:lnSpc>
+                <a:spcPts val="1950"/>
+              </a:lnSpc>
+              <a:spcAft>
+                <a:spcPts val="0"/>
+              </a:spcAft>
+              <a:buNone/>
+            </a:pPr>
+            <a:r>
+              <a:rPr lang="en-US" sz="1500" b="0">
+                <a:solidFill>
+                  <a:srgbClr val="202B33"/>
+                </a:solidFill>
+                <a:latin typeface="Arial"/>
+                <a:ea typeface="Arial"/>
+                <a:cs typeface="Arial"/>
+              </a:rPr>
+              <a:t xml:space="preserve">many small ones you can afford to.</a:t>
+            </a:r>
+            <a:endParaRPr lang="en-US" sz="1500"/>
+          </a:p>
+          <a:p>
+            <a:pPr marL="0" indent="0">
+              <a:lnSpc>
+                <a:spcPts val="1950"/>
+              </a:lnSpc>
+              <a:spcAft>
+                <a:spcPts val="0"/>
+              </a:spcAft>
+              <a:buNone/>
+            </a:pPr>
+            <a:r>
+              <a:rPr lang="en-US" sz="1500" b="0">
+                <a:solidFill>
+                  <a:srgbClr val="202B33"/>
+                </a:solidFill>
+                <a:latin typeface="Arial"/>
+                <a:ea typeface="Arial"/>
+                <a:cs typeface="Arial"/>
+              </a:rPr>
+              <a:t xml:space="preserve"/>
+            </a:r>
+            <a:endParaRPr lang="en-US" sz="1500"/>
+          </a:p>
+          <a:p>
+            <a:pPr marL="0" indent="0">
+              <a:lnSpc>
+                <a:spcPts val="1950"/>
+              </a:lnSpc>
+              <a:spcAft>
+                <a:spcPts val="0"/>
+              </a:spcAft>
+              <a:buNone/>
+            </a:pPr>
+            <a:r>
+              <a:rPr lang="en-US" sz="1500" b="0">
+                <a:solidFill>
+                  <a:srgbClr val="202B33"/>
+                </a:solidFill>
+                <a:latin typeface="Arial"/>
+                <a:ea typeface="Arial"/>
+                <a:cs typeface="Arial"/>
+              </a:rPr>
+              <a:t xml:space="preserve">Pick one integration that already costs</a:t>
+            </a:r>
+            <a:endParaRPr lang="en-US" sz="1500"/>
+          </a:p>
+          <a:p>
+            <a:pPr marL="0" indent="0">
+              <a:lnSpc>
+                <a:spcPts val="1950"/>
+              </a:lnSpc>
+              <a:spcAft>
+                <a:spcPts val="0"/>
+              </a:spcAft>
+              <a:buNone/>
+            </a:pPr>
+            <a:r>
+              <a:rPr lang="en-US" sz="1500" b="0">
+                <a:solidFill>
+                  <a:srgbClr val="202B33"/>
+                </a:solidFill>
+                <a:latin typeface="Arial"/>
+                <a:ea typeface="Arial"/>
+                <a:cs typeface="Arial"/>
+              </a:rPr>
+              <a:t xml:space="preserve">your team mornings. Give it a conjured</a:t>
+            </a:r>
+            <a:endParaRPr lang="en-US" sz="1500"/>
+          </a:p>
+          <a:p>
+            <a:pPr marL="0" indent="0">
+              <a:lnSpc>
+                <a:spcPts val="1950"/>
+              </a:lnSpc>
+              <a:spcAft>
+                <a:spcPts val="0"/>
+              </a:spcAft>
+              <a:buNone/>
+            </a:pPr>
+            <a:r>
+              <a:rPr lang="en-US" sz="1500" b="0">
+                <a:solidFill>
+                  <a:srgbClr val="202B33"/>
+                </a:solidFill>
+                <a:latin typeface="Arial"/>
+                <a:ea typeface="Arial"/>
+                <a:cs typeface="Arial"/>
+              </a:rPr>
+              <a:t xml:space="preserve">agent with a bounded way to investigate, a</a:t>
+            </a:r>
+            <a:endParaRPr lang="en-US" sz="1500"/>
+          </a:p>
+          <a:p>
+            <a:pPr marL="0" indent="0">
+              <a:lnSpc>
+                <a:spcPts val="1950"/>
+              </a:lnSpc>
+              <a:spcAft>
+                <a:spcPts val="0"/>
+              </a:spcAft>
+              <a:buNone/>
+            </a:pPr>
+            <a:r>
+              <a:rPr lang="en-US" sz="1500" b="0">
+                <a:solidFill>
+                  <a:srgbClr val="202B33"/>
+                </a:solidFill>
+                <a:latin typeface="Arial"/>
+                <a:ea typeface="Arial"/>
+                <a:cs typeface="Arial"/>
+              </a:rPr>
+              <a:t xml:space="preserve">test it did not write, and a place to</a:t>
+            </a:r>
+            <a:endParaRPr lang="en-US" sz="1500"/>
+          </a:p>
+          <a:p>
+            <a:pPr marL="0" indent="0">
+              <a:lnSpc>
+                <a:spcPts val="1950"/>
+              </a:lnSpc>
+              <a:spcAft>
+                <a:spcPts val="0"/>
+              </a:spcAft>
+              <a:buNone/>
+            </a:pPr>
+            <a:r>
+              <a:rPr lang="en-US" sz="1500" b="0">
+                <a:solidFill>
+                  <a:srgbClr val="202B33"/>
+                </a:solidFill>
+                <a:latin typeface="Arial"/>
+                <a:ea typeface="Arial"/>
+                <a:cs typeface="Arial"/>
+              </a:rPr>
+              <a:t xml:space="preserve">record what happened. Or start with one</a:t>
+            </a:r>
+            <a:endParaRPr lang="en-US" sz="1500"/>
+          </a:p>
+          <a:p>
+            <a:pPr marL="0" indent="0">
+              <a:lnSpc>
+                <a:spcPts val="1950"/>
+              </a:lnSpc>
+              <a:spcAft>
+                <a:spcPts val="0"/>
+              </a:spcAft>
+              <a:buNone/>
+            </a:pPr>
+            <a:r>
+              <a:rPr lang="en-US" sz="1500" b="0">
+                <a:solidFill>
+                  <a:srgbClr val="202B33"/>
+                </a:solidFill>
+                <a:latin typeface="Arial"/>
+                <a:ea typeface="Arial"/>
+                <a:cs typeface="Arial"/>
+              </a:rPr>
+              <a:t xml:space="preserve">reporting agent: keep its execution</a:t>
+            </a:r>
+            <a:endParaRPr lang="en-US" sz="1500"/>
+          </a:p>
+          <a:p>
+            <a:pPr marL="0" indent="0">
+              <a:lnSpc>
+                <a:spcPts val="1950"/>
+              </a:lnSpc>
+              <a:spcAft>
+                <a:spcPts val="0"/>
+              </a:spcAft>
+              <a:buNone/>
+            </a:pPr>
+            <a:r>
+              <a:rPr lang="en-US" sz="1500" b="0">
+                <a:solidFill>
+                  <a:srgbClr val="202B33"/>
+                </a:solidFill>
+                <a:latin typeface="Arial"/>
+                <a:ea typeface="Arial"/>
+                <a:cs typeface="Arial"/>
+              </a:rPr>
+              <a:t xml:space="preserve">observations, make it check them before</a:t>
+            </a:r>
+            <a:endParaRPr lang="en-US" sz="1500"/>
+          </a:p>
+          <a:p>
+            <a:pPr marL="0" indent="0">
+              <a:lnSpc>
+                <a:spcPts val="1950"/>
+              </a:lnSpc>
+              <a:spcAft>
+                <a:spcPts val="0"/>
+              </a:spcAft>
+              <a:buNone/>
+            </a:pPr>
+            <a:r>
+              <a:rPr lang="en-US" sz="1500" b="0">
+                <a:solidFill>
+                  <a:srgbClr val="202B33"/>
+                </a:solidFill>
+                <a:latin typeface="Arial"/>
+                <a:ea typeface="Arial"/>
+                <a:cs typeface="Arial"/>
+              </a:rPr>
+              <a:t xml:space="preserve">returning work, and measure whether the</a:t>
+            </a:r>
+            <a:endParaRPr lang="en-US" sz="1500"/>
+          </a:p>
+          <a:p>
+            <a:pPr marL="0" indent="0">
+              <a:lnSpc>
+                <a:spcPts val="1950"/>
+              </a:lnSpc>
+              <a:spcAft>
+                <a:spcPts val="0"/>
+              </a:spcAft>
+              <a:buNone/>
+            </a:pPr>
+            <a:r>
+              <a:rPr lang="en-US" sz="1500" b="0">
+                <a:solidFill>
+                  <a:srgbClr val="202B33"/>
+                </a:solidFill>
+                <a:latin typeface="Arial"/>
+                <a:ea typeface="Arial"/>
+                <a:cs typeface="Arial"/>
+              </a:rPr>
+              <a:t xml:space="preserve">same mistake comes back. That is enough to</a:t>
+            </a:r>
+            <a:endParaRPr lang="en-US" sz="1500"/>
+          </a:p>
+          <a:p>
+            <a:pPr marL="0" indent="0">
+              <a:lnSpc>
+                <a:spcPts val="1950"/>
+              </a:lnSpc>
+              <a:spcAft>
+                <a:spcPts val="0"/>
+              </a:spcAft>
+              <a:buNone/>
+            </a:pPr>
+            <a:r>
+              <a:rPr lang="en-US" sz="1500" b="0">
+                <a:solidFill>
+                  <a:srgbClr val="202B33"/>
+                </a:solidFill>
+                <a:latin typeface="Arial"/>
+                <a:ea typeface="Arial"/>
+                <a:cs typeface="Arial"/>
+              </a:rPr>
+              <a:t xml:space="preserve">start.</a:t>
+            </a:r>
+            <a:endParaRPr lang="en-US" sz="1500"/>
+          </a:p>
+        </p:txBody>
+      </p:sp>
+      <p:sp>
+        <p:nvSpPr>
+          <p:cNvPr id="6" name="Text 6"/>
+          <p:cNvSpPr txBox="1"/>
+          <p:nvPr/>
+        </p:nvSpPr>
+        <p:spPr>
+          <a:xfrm>
+            <a:off x="457200" y="7486650"/>
+            <a:ext cx="8820150" cy="190500"/>
+          </a:xfrm>
+          <a:prstGeom prst="rect">
+            <a:avLst/>
+          </a:prstGeom>
+          <a:noFill/>
+          <a:ln>
+            <a:noFill/>
+          </a:ln>
+        </p:spPr>
+        <p:txBody>
+          <a:bodyPr wrap="none" lIns="0" tIns="0" rIns="0" bIns="0" anchor="t">
+            <a:noAutofit/>
+          </a:bodyPr>
+          <a:lstStyle/>
+          <a:p>
+            <a:pPr marL="0" indent="0">
+              <a:lnSpc>
+                <a:spcPts val="1268"/>
+              </a:lnSpc>
+              <a:spcAft>
+                <a:spcPts val="0"/>
+              </a:spcAft>
+              <a:buNone/>
+            </a:pPr>
+            <a:r>
+              <a:rPr lang="en-US" sz="975" b="0">
+                <a:solidFill>
+                  <a:srgbClr val="48555B"/>
+                </a:solidFill>
+                <a:latin typeface="Arial"/>
+                <a:ea typeface="Arial"/>
+                <a:cs typeface="Arial"/>
+              </a:rPr>
+              <a:t xml:space="preserve">Adaptive, agentic apps</a:t>
+            </a:r>
+            <a:endParaRPr lang="en-US" sz="975"/>
+          </a:p>
+        </p:txBody>
+      </p:sp>
+      <p:sp>
+        <p:nvSpPr>
+          <p:cNvPr id="7" name="Text 7"/>
           <p:cNvSpPr txBox="1"/>
           <p:nvPr/>
         </p:nvSpPr>

--- a/artifacts/speaking-portfolio-expanded/decks/adaptive-systems-15min-handout.pptx
+++ b/artifacts/speaking-portfolio-expanded/decks/adaptive-systems-15min-handout.pptx
@@ -1177,7 +1177,7 @@
                 <a:ea typeface="Arial"/>
                 <a:cs typeface="Arial"/>
               </a:rPr>
-              <a:t xml:space="preserve">So here is the hazard, and it applies to the small systems too. Risk does not grow with the number of tools. It grows with the number of pathways between them, and every integration multiplies those. Ten tools is forty-five pairs before you count chains. Plug in one SaaS with a dozen endpoints and you did not add twelve capabilities; you added hundreds of routes from something the agent can read to something it can do. Nobody reviews those combinations. Not your security team, not the model, not you at three in the morning. The dangerous pairing is never on the roadmap. It gets discovered.</a:t>
+              <a:t xml:space="preserve">Here is the hazard, and it applies to the small systems too. Risk does not grow with the number of tools. It grows with the pathways between them, and every integration multiplies those. Ten tools is forty-five pairs before you count chains. Plug in one SaaS with a dozen endpoints and you did not add twelve capabilities; you added hundreds of routes from something the agent can read to something it can do. Nobody reviews those combinations. Not your security team, not the model, not you at three in the morning. The dangerous pairing is never on the roadmap. It gets discovered.</a:t>
             </a:r>
             <a:endParaRPr lang="en-US" sz="1200"/>
           </a:p>
@@ -1223,7 +1223,7 @@
                 <a:ea typeface="Arial"/>
                 <a:cs typeface="Arial"/>
               </a:rPr>
-              <a:t xml:space="preserve">So the question is not whether to give the assistant access. It is how to keep the number of live pathways small enough to reason about, one job at a time. That is what the rest of this talk builds. The big assistant still exists. It just never has all of its hands full at once: it conjures a small agent per job, with exactly enough.</a:t>
+              <a:t xml:space="preserve">So the question is not whether to grant access. It is how many pathways are live at once. The big assistant still exists; it just never has all of its hands full at the same time, because it conjures a small agent per job with exactly enough.</a:t>
             </a:r>
             <a:endParaRPr lang="en-US" sz="1200"/>
           </a:p>
@@ -1704,7 +1704,7 @@
                 <a:ea typeface="Arial"/>
                 <a:cs typeface="Arial"/>
               </a:rPr>
-              <a:t xml:space="preserve">So here is the hazard, and it applies to the small systems too. Risk does not grow with the number of tools. It grows with the number of pathways between them, and every integration multiplies those. Ten tools is forty-five pairs before you count chains. Plug in one SaaS with a dozen endpoints and you did not add twelve capabilities; you added hundreds of routes from something the agent can read to something it can do. Nobody reviews those combinations. Not your security team, not the model, not you at three in the morning. The dangerous pairing is never on the roadmap. It gets discovered.</a:t>
+              <a:t xml:space="preserve">Here is the hazard, and it applies to the small systems too. Risk does not grow with the number of tools. It grows with the pathways between them, and every integration multiplies those. Ten tools is forty-five pairs before you count chains. Plug in one SaaS with a dozen endpoints and you did not add twelve capabilities; you added hundreds of routes from something the agent can read to something it can do. Nobody reviews those combinations. Not your security team, not the model, not you at three in the morning. The dangerous pairing is never on the roadmap. It gets discovered.</a:t>
             </a:r>
             <a:endParaRPr lang="en-US" sz="1200"/>
           </a:p>
@@ -1750,7 +1750,7 @@
                 <a:ea typeface="Arial"/>
                 <a:cs typeface="Arial"/>
               </a:rPr>
-              <a:t xml:space="preserve">So the question is not whether to give the assistant access. It is how to keep the number of live pathways small enough to reason about, one job at a time. That is what the rest of this talk builds. The big assistant still exists. It just never has all of its hands full at once: it conjures a small agent per job, with exactly enough.</a:t>
+              <a:t xml:space="preserve">So the question is not whether to grant access. It is how many pathways are live at once. The big assistant still exists; it just never has all of its hands full at the same time, because it conjures a small agent per job with exactly enough.</a:t>
             </a:r>
             <a:endParaRPr lang="en-US" sz="1200"/>
           </a:p>
@@ -4201,7 +4201,7 @@
                 <a:ea typeface="Arial"/>
                 <a:cs typeface="Arial"/>
               </a:rPr>
-              <a:t xml:space="preserve">And return to the assistant with everything. It is still coming; nothing on these slides stops it, and I would not want to. What changed is how many of its pathways are live at once. Each job gets a small agent with a tailored prompt, a short tool list, a hard budget, and a log of every time it asked for more. That is the strategy I believe in for the next few years: not one agent holding every combination, which nobody can check, but many small ones you can afford to.</a:t>
+              <a:t xml:space="preserve">And return to the assistant with everything. It is still coming; nothing on these slides stops it, and I would not want them to. What changed is how many of its pathways are live at once. Not one agent holding every combination, which nobody can check. Many small ones you can afford to.</a:t>
             </a:r>
             <a:endParaRPr lang="en-US" sz="1200"/>
           </a:p>
@@ -6704,7 +6704,7 @@
                 <a:ea typeface="Arial"/>
                 <a:cs typeface="Arial"/>
               </a:rPr>
-              <a:t xml:space="preserve">So here is the hazard, and it applies to the small</a:t>
+              <a:t xml:space="preserve">Here is the hazard, and it applies to the small</a:t>
             </a:r>
             <a:endParaRPr lang="en-US" sz="1200"/>
           </a:p>
@@ -6750,191 +6750,191 @@
                 <a:ea typeface="Arial"/>
                 <a:cs typeface="Arial"/>
               </a:rPr>
-              <a:t xml:space="preserve">tools. It grows with the number of pathways between</a:t>
-            </a:r>
-            <a:endParaRPr lang="en-US" sz="1200"/>
-          </a:p>
-          <a:p>
-            <a:pPr marL="0" indent="0">
-              <a:lnSpc>
-                <a:spcPts val="1575"/>
-              </a:lnSpc>
-              <a:spcAft>
-                <a:spcPts val="0"/>
-              </a:spcAft>
-              <a:buNone/>
-            </a:pPr>
-            <a:r>
-              <a:rPr lang="en-US" sz="1200" b="0">
-                <a:solidFill>
-                  <a:srgbClr val="202B33"/>
-                </a:solidFill>
-                <a:latin typeface="Arial"/>
-                <a:ea typeface="Arial"/>
-                <a:cs typeface="Arial"/>
-              </a:rPr>
-              <a:t xml:space="preserve">them, and every integration multiplies those. Ten</a:t>
-            </a:r>
-            <a:endParaRPr lang="en-US" sz="1200"/>
-          </a:p>
-          <a:p>
-            <a:pPr marL="0" indent="0">
-              <a:lnSpc>
-                <a:spcPts val="1575"/>
-              </a:lnSpc>
-              <a:spcAft>
-                <a:spcPts val="0"/>
-              </a:spcAft>
-              <a:buNone/>
-            </a:pPr>
-            <a:r>
-              <a:rPr lang="en-US" sz="1200" b="0">
-                <a:solidFill>
-                  <a:srgbClr val="202B33"/>
-                </a:solidFill>
-                <a:latin typeface="Arial"/>
-                <a:ea typeface="Arial"/>
-                <a:cs typeface="Arial"/>
-              </a:rPr>
-              <a:t xml:space="preserve">tools is forty-five pairs before you count chains.</a:t>
-            </a:r>
-            <a:endParaRPr lang="en-US" sz="1200"/>
-          </a:p>
-          <a:p>
-            <a:pPr marL="0" indent="0">
-              <a:lnSpc>
-                <a:spcPts val="1575"/>
-              </a:lnSpc>
-              <a:spcAft>
-                <a:spcPts val="0"/>
-              </a:spcAft>
-              <a:buNone/>
-            </a:pPr>
-            <a:r>
-              <a:rPr lang="en-US" sz="1200" b="0">
-                <a:solidFill>
-                  <a:srgbClr val="202B33"/>
-                </a:solidFill>
-                <a:latin typeface="Arial"/>
-                <a:ea typeface="Arial"/>
-                <a:cs typeface="Arial"/>
-              </a:rPr>
-              <a:t xml:space="preserve">Plug in one SaaS with a dozen endpoints and you did</a:t>
-            </a:r>
-            <a:endParaRPr lang="en-US" sz="1200"/>
-          </a:p>
-          <a:p>
-            <a:pPr marL="0" indent="0">
-              <a:lnSpc>
-                <a:spcPts val="1575"/>
-              </a:lnSpc>
-              <a:spcAft>
-                <a:spcPts val="0"/>
-              </a:spcAft>
-              <a:buNone/>
-            </a:pPr>
-            <a:r>
-              <a:rPr lang="en-US" sz="1200" b="0">
-                <a:solidFill>
-                  <a:srgbClr val="202B33"/>
-                </a:solidFill>
-                <a:latin typeface="Arial"/>
-                <a:ea typeface="Arial"/>
-                <a:cs typeface="Arial"/>
-              </a:rPr>
-              <a:t xml:space="preserve">not add twelve capabilities; you added hundreds of</a:t>
-            </a:r>
-            <a:endParaRPr lang="en-US" sz="1200"/>
-          </a:p>
-          <a:p>
-            <a:pPr marL="0" indent="0">
-              <a:lnSpc>
-                <a:spcPts val="1575"/>
-              </a:lnSpc>
-              <a:spcAft>
-                <a:spcPts val="0"/>
-              </a:spcAft>
-              <a:buNone/>
-            </a:pPr>
-            <a:r>
-              <a:rPr lang="en-US" sz="1200" b="0">
-                <a:solidFill>
-                  <a:srgbClr val="202B33"/>
-                </a:solidFill>
-                <a:latin typeface="Arial"/>
-                <a:ea typeface="Arial"/>
-                <a:cs typeface="Arial"/>
-              </a:rPr>
-              <a:t xml:space="preserve">routes from something the agent can read to something</a:t>
-            </a:r>
-            <a:endParaRPr lang="en-US" sz="1200"/>
-          </a:p>
-          <a:p>
-            <a:pPr marL="0" indent="0">
-              <a:lnSpc>
-                <a:spcPts val="1575"/>
-              </a:lnSpc>
-              <a:spcAft>
-                <a:spcPts val="0"/>
-              </a:spcAft>
-              <a:buNone/>
-            </a:pPr>
-            <a:r>
-              <a:rPr lang="en-US" sz="1200" b="0">
-                <a:solidFill>
-                  <a:srgbClr val="202B33"/>
-                </a:solidFill>
-                <a:latin typeface="Arial"/>
-                <a:ea typeface="Arial"/>
-                <a:cs typeface="Arial"/>
-              </a:rPr>
-              <a:t xml:space="preserve">it can do. Nobody reviews those combinations. Not</a:t>
-            </a:r>
-            <a:endParaRPr lang="en-US" sz="1200"/>
-          </a:p>
-          <a:p>
-            <a:pPr marL="0" indent="0">
-              <a:lnSpc>
-                <a:spcPts val="1575"/>
-              </a:lnSpc>
-              <a:spcAft>
-                <a:spcPts val="0"/>
-              </a:spcAft>
-              <a:buNone/>
-            </a:pPr>
-            <a:r>
-              <a:rPr lang="en-US" sz="1200" b="0">
-                <a:solidFill>
-                  <a:srgbClr val="202B33"/>
-                </a:solidFill>
-                <a:latin typeface="Arial"/>
-                <a:ea typeface="Arial"/>
-                <a:cs typeface="Arial"/>
-              </a:rPr>
-              <a:t xml:space="preserve">your security team, not the model, not you at three</a:t>
-            </a:r>
-            <a:endParaRPr lang="en-US" sz="1200"/>
-          </a:p>
-          <a:p>
-            <a:pPr marL="0" indent="0">
-              <a:lnSpc>
-                <a:spcPts val="1575"/>
-              </a:lnSpc>
-              <a:spcAft>
-                <a:spcPts val="0"/>
-              </a:spcAft>
-              <a:buNone/>
-            </a:pPr>
-            <a:r>
-              <a:rPr lang="en-US" sz="1200" b="0">
-                <a:solidFill>
-                  <a:srgbClr val="202B33"/>
-                </a:solidFill>
-                <a:latin typeface="Arial"/>
-                <a:ea typeface="Arial"/>
-                <a:cs typeface="Arial"/>
-              </a:rPr>
-              <a:t xml:space="preserve">in the morning. The dangerous pairing is never on the</a:t>
+              <a:t xml:space="preserve">tools. It grows with the pathways between them, and</a:t>
+            </a:r>
+            <a:endParaRPr lang="en-US" sz="1200"/>
+          </a:p>
+          <a:p>
+            <a:pPr marL="0" indent="0">
+              <a:lnSpc>
+                <a:spcPts val="1575"/>
+              </a:lnSpc>
+              <a:spcAft>
+                <a:spcPts val="0"/>
+              </a:spcAft>
+              <a:buNone/>
+            </a:pPr>
+            <a:r>
+              <a:rPr lang="en-US" sz="1200" b="0">
+                <a:solidFill>
+                  <a:srgbClr val="202B33"/>
+                </a:solidFill>
+                <a:latin typeface="Arial"/>
+                <a:ea typeface="Arial"/>
+                <a:cs typeface="Arial"/>
+              </a:rPr>
+              <a:t xml:space="preserve">every integration multiplies those. Ten tools is</a:t>
+            </a:r>
+            <a:endParaRPr lang="en-US" sz="1200"/>
+          </a:p>
+          <a:p>
+            <a:pPr marL="0" indent="0">
+              <a:lnSpc>
+                <a:spcPts val="1575"/>
+              </a:lnSpc>
+              <a:spcAft>
+                <a:spcPts val="0"/>
+              </a:spcAft>
+              <a:buNone/>
+            </a:pPr>
+            <a:r>
+              <a:rPr lang="en-US" sz="1200" b="0">
+                <a:solidFill>
+                  <a:srgbClr val="202B33"/>
+                </a:solidFill>
+                <a:latin typeface="Arial"/>
+                <a:ea typeface="Arial"/>
+                <a:cs typeface="Arial"/>
+              </a:rPr>
+              <a:t xml:space="preserve">forty-five pairs before you count chains. Plug in one</a:t>
+            </a:r>
+            <a:endParaRPr lang="en-US" sz="1200"/>
+          </a:p>
+          <a:p>
+            <a:pPr marL="0" indent="0">
+              <a:lnSpc>
+                <a:spcPts val="1575"/>
+              </a:lnSpc>
+              <a:spcAft>
+                <a:spcPts val="0"/>
+              </a:spcAft>
+              <a:buNone/>
+            </a:pPr>
+            <a:r>
+              <a:rPr lang="en-US" sz="1200" b="0">
+                <a:solidFill>
+                  <a:srgbClr val="202B33"/>
+                </a:solidFill>
+                <a:latin typeface="Arial"/>
+                <a:ea typeface="Arial"/>
+                <a:cs typeface="Arial"/>
+              </a:rPr>
+              <a:t xml:space="preserve">SaaS with a dozen endpoints and you did not add</a:t>
+            </a:r>
+            <a:endParaRPr lang="en-US" sz="1200"/>
+          </a:p>
+          <a:p>
+            <a:pPr marL="0" indent="0">
+              <a:lnSpc>
+                <a:spcPts val="1575"/>
+              </a:lnSpc>
+              <a:spcAft>
+                <a:spcPts val="0"/>
+              </a:spcAft>
+              <a:buNone/>
+            </a:pPr>
+            <a:r>
+              <a:rPr lang="en-US" sz="1200" b="0">
+                <a:solidFill>
+                  <a:srgbClr val="202B33"/>
+                </a:solidFill>
+                <a:latin typeface="Arial"/>
+                <a:ea typeface="Arial"/>
+                <a:cs typeface="Arial"/>
+              </a:rPr>
+              <a:t xml:space="preserve">twelve capabilities; you added hundreds of routes</a:t>
+            </a:r>
+            <a:endParaRPr lang="en-US" sz="1200"/>
+          </a:p>
+          <a:p>
+            <a:pPr marL="0" indent="0">
+              <a:lnSpc>
+                <a:spcPts val="1575"/>
+              </a:lnSpc>
+              <a:spcAft>
+                <a:spcPts val="0"/>
+              </a:spcAft>
+              <a:buNone/>
+            </a:pPr>
+            <a:r>
+              <a:rPr lang="en-US" sz="1200" b="0">
+                <a:solidFill>
+                  <a:srgbClr val="202B33"/>
+                </a:solidFill>
+                <a:latin typeface="Arial"/>
+                <a:ea typeface="Arial"/>
+                <a:cs typeface="Arial"/>
+              </a:rPr>
+              <a:t xml:space="preserve">from something the agent can read to something it can</a:t>
+            </a:r>
+            <a:endParaRPr lang="en-US" sz="1200"/>
+          </a:p>
+          <a:p>
+            <a:pPr marL="0" indent="0">
+              <a:lnSpc>
+                <a:spcPts val="1575"/>
+              </a:lnSpc>
+              <a:spcAft>
+                <a:spcPts val="0"/>
+              </a:spcAft>
+              <a:buNone/>
+            </a:pPr>
+            <a:r>
+              <a:rPr lang="en-US" sz="1200" b="0">
+                <a:solidFill>
+                  <a:srgbClr val="202B33"/>
+                </a:solidFill>
+                <a:latin typeface="Arial"/>
+                <a:ea typeface="Arial"/>
+                <a:cs typeface="Arial"/>
+              </a:rPr>
+              <a:t xml:space="preserve">do. Nobody reviews those combinations. Not your</a:t>
+            </a:r>
+            <a:endParaRPr lang="en-US" sz="1200"/>
+          </a:p>
+          <a:p>
+            <a:pPr marL="0" indent="0">
+              <a:lnSpc>
+                <a:spcPts val="1575"/>
+              </a:lnSpc>
+              <a:spcAft>
+                <a:spcPts val="0"/>
+              </a:spcAft>
+              <a:buNone/>
+            </a:pPr>
+            <a:r>
+              <a:rPr lang="en-US" sz="1200" b="0">
+                <a:solidFill>
+                  <a:srgbClr val="202B33"/>
+                </a:solidFill>
+                <a:latin typeface="Arial"/>
+                <a:ea typeface="Arial"/>
+                <a:cs typeface="Arial"/>
+              </a:rPr>
+              <a:t xml:space="preserve">security team, not the model, not you at three in the</a:t>
+            </a:r>
+            <a:endParaRPr lang="en-US" sz="1200"/>
+          </a:p>
+          <a:p>
+            <a:pPr marL="0" indent="0">
+              <a:lnSpc>
+                <a:spcPts val="1575"/>
+              </a:lnSpc>
+              <a:spcAft>
+                <a:spcPts val="0"/>
+              </a:spcAft>
+              <a:buNone/>
+            </a:pPr>
+            <a:r>
+              <a:rPr lang="en-US" sz="1200" b="0">
+                <a:solidFill>
+                  <a:srgbClr val="202B33"/>
+                </a:solidFill>
+                <a:latin typeface="Arial"/>
+                <a:ea typeface="Arial"/>
+                <a:cs typeface="Arial"/>
+              </a:rPr>
+              <a:t xml:space="preserve">morning. The dangerous pairing is never on the</a:t>
             </a:r>
             <a:endParaRPr lang="en-US" sz="1200"/>
           </a:p>
@@ -7235,7 +7235,7 @@
                 <a:ea typeface="Arial"/>
                 <a:cs typeface="Arial"/>
               </a:rPr>
-              <a:t xml:space="preserve">So the question is not whether to give the</a:t>
+              <a:t xml:space="preserve">So the question is not whether to grant</a:t>
             </a:r>
             <a:endParaRPr lang="en-US" sz="1500"/>
           </a:p>
@@ -7258,7 +7258,7 @@
                 <a:ea typeface="Arial"/>
                 <a:cs typeface="Arial"/>
               </a:rPr>
-              <a:t xml:space="preserve">assistant access. It is how to keep the</a:t>
+              <a:t xml:space="preserve">access. It is how many pathways are live at</a:t>
             </a:r>
             <a:endParaRPr lang="en-US" sz="1500"/>
           </a:p>
@@ -7281,30 +7281,7 @@
                 <a:ea typeface="Arial"/>
                 <a:cs typeface="Arial"/>
               </a:rPr>
-              <a:t xml:space="preserve">number of live pathways small enough to</a:t>
-            </a:r>
-            <a:endParaRPr lang="en-US" sz="1500"/>
-          </a:p>
-          <a:p>
-            <a:pPr marL="0" indent="0">
-              <a:lnSpc>
-                <a:spcPts val="1950"/>
-              </a:lnSpc>
-              <a:spcAft>
-                <a:spcPts val="0"/>
-              </a:spcAft>
-              <a:buNone/>
-            </a:pPr>
-            <a:r>
-              <a:rPr lang="en-US" sz="1500" b="0">
-                <a:solidFill>
-                  <a:srgbClr val="202B33"/>
-                </a:solidFill>
-                <a:latin typeface="Arial"/>
-                <a:ea typeface="Arial"/>
-                <a:cs typeface="Arial"/>
-              </a:rPr>
-              <a:t xml:space="preserve">reason about, one job at a time. That is</a:t>
+              <a:t xml:space="preserve">once. The big assistant still exists; it</a:t>
             </a:r>
             <a:endParaRPr lang="en-US" sz="1500"/>
           </a:p>
@@ -7353,7 +7330,7 @@
                 <a:ea typeface="Arial"/>
                 <a:cs typeface="Arial"/>
               </a:rPr>
-              <a:t xml:space="preserve">what the rest of this talk builds. The big</a:t>
+              <a:t xml:space="preserve">just never has all of its hands full at the</a:t>
             </a:r>
             <a:endParaRPr lang="en-US" sz="1500"/>
           </a:p>
@@ -7376,7 +7353,7 @@
                 <a:ea typeface="Arial"/>
                 <a:cs typeface="Arial"/>
               </a:rPr>
-              <a:t xml:space="preserve">assistant still exists. It just never has</a:t>
+              <a:t xml:space="preserve">same time, because it conjures a small</a:t>
             </a:r>
             <a:endParaRPr lang="en-US" sz="1500"/>
           </a:p>
@@ -7399,30 +7376,7 @@
                 <a:ea typeface="Arial"/>
                 <a:cs typeface="Arial"/>
               </a:rPr>
-              <a:t xml:space="preserve">all of its hands full at once: it conjures</a:t>
-            </a:r>
-            <a:endParaRPr lang="en-US" sz="1500"/>
-          </a:p>
-          <a:p>
-            <a:pPr marL="0" indent="0">
-              <a:lnSpc>
-                <a:spcPts val="1950"/>
-              </a:lnSpc>
-              <a:spcAft>
-                <a:spcPts val="0"/>
-              </a:spcAft>
-              <a:buNone/>
-            </a:pPr>
-            <a:r>
-              <a:rPr lang="en-US" sz="1500" b="0">
-                <a:solidFill>
-                  <a:srgbClr val="202B33"/>
-                </a:solidFill>
-                <a:latin typeface="Arial"/>
-                <a:ea typeface="Arial"/>
-                <a:cs typeface="Arial"/>
-              </a:rPr>
-              <a:t xml:space="preserve">a small agent per job, with exactly enough.</a:t>
+              <a:t xml:space="preserve">agent per job with exactly enough.</a:t>
             </a:r>
             <a:endParaRPr lang="en-US" sz="1500"/>
           </a:p>
@@ -11137,7 +11091,7 @@
                 <a:ea typeface="Arial"/>
                 <a:cs typeface="Arial"/>
               </a:rPr>
-              <a:t xml:space="preserve">to. What changed is how many of its</a:t>
+              <a:t xml:space="preserve">them to. What changed is how many of its</a:t>
             </a:r>
             <a:endParaRPr lang="en-US" sz="1500"/>
           </a:p>
@@ -11160,7 +11114,7 @@
                 <a:ea typeface="Arial"/>
                 <a:cs typeface="Arial"/>
               </a:rPr>
-              <a:t xml:space="preserve">pathways are live at once. Each job gets a</a:t>
+              <a:t xml:space="preserve">pathways are live at once. Not one agent</a:t>
             </a:r>
             <a:endParaRPr lang="en-US" sz="1500"/>
           </a:p>
@@ -11183,76 +11137,7 @@
                 <a:ea typeface="Arial"/>
                 <a:cs typeface="Arial"/>
               </a:rPr>
-              <a:t xml:space="preserve">small agent with a tailored prompt, a short</a:t>
-            </a:r>
-            <a:endParaRPr lang="en-US" sz="1500"/>
-          </a:p>
-          <a:p>
-            <a:pPr marL="0" indent="0">
-              <a:lnSpc>
-                <a:spcPts val="1950"/>
-              </a:lnSpc>
-              <a:spcAft>
-                <a:spcPts val="0"/>
-              </a:spcAft>
-              <a:buNone/>
-            </a:pPr>
-            <a:r>
-              <a:rPr lang="en-US" sz="1500" b="0">
-                <a:solidFill>
-                  <a:srgbClr val="202B33"/>
-                </a:solidFill>
-                <a:latin typeface="Arial"/>
-                <a:ea typeface="Arial"/>
-                <a:cs typeface="Arial"/>
-              </a:rPr>
-              <a:t xml:space="preserve">tool list, a hard budget, and a log of</a:t>
-            </a:r>
-            <a:endParaRPr lang="en-US" sz="1500"/>
-          </a:p>
-          <a:p>
-            <a:pPr marL="0" indent="0">
-              <a:lnSpc>
-                <a:spcPts val="1950"/>
-              </a:lnSpc>
-              <a:spcAft>
-                <a:spcPts val="0"/>
-              </a:spcAft>
-              <a:buNone/>
-            </a:pPr>
-            <a:r>
-              <a:rPr lang="en-US" sz="1500" b="0">
-                <a:solidFill>
-                  <a:srgbClr val="202B33"/>
-                </a:solidFill>
-                <a:latin typeface="Arial"/>
-                <a:ea typeface="Arial"/>
-                <a:cs typeface="Arial"/>
-              </a:rPr>
-              <a:t xml:space="preserve">every time it asked for more. That is the</a:t>
-            </a:r>
-            <a:endParaRPr lang="en-US" sz="1500"/>
-          </a:p>
-          <a:p>
-            <a:pPr marL="0" indent="0">
-              <a:lnSpc>
-                <a:spcPts val="1950"/>
-              </a:lnSpc>
-              <a:spcAft>
-                <a:spcPts val="0"/>
-              </a:spcAft>
-              <a:buNone/>
-            </a:pPr>
-            <a:r>
-              <a:rPr lang="en-US" sz="1500" b="0">
-                <a:solidFill>
-                  <a:srgbClr val="202B33"/>
-                </a:solidFill>
-                <a:latin typeface="Arial"/>
-                <a:ea typeface="Arial"/>
-                <a:cs typeface="Arial"/>
-              </a:rPr>
-              <a:t xml:space="preserve">strategy I believe in for the next few</a:t>
+              <a:t xml:space="preserve">holding every combination, which nobody can</a:t>
             </a:r>
             <a:endParaRPr lang="en-US" sz="1500"/>
           </a:p>
@@ -11301,53 +11186,7 @@
                 <a:ea typeface="Arial"/>
                 <a:cs typeface="Arial"/>
               </a:rPr>
-              <a:t xml:space="preserve">years: not one agent holding every</a:t>
-            </a:r>
-            <a:endParaRPr lang="en-US" sz="1500"/>
-          </a:p>
-          <a:p>
-            <a:pPr marL="0" indent="0">
-              <a:lnSpc>
-                <a:spcPts val="1950"/>
-              </a:lnSpc>
-              <a:spcAft>
-                <a:spcPts val="0"/>
-              </a:spcAft>
-              <a:buNone/>
-            </a:pPr>
-            <a:r>
-              <a:rPr lang="en-US" sz="1500" b="0">
-                <a:solidFill>
-                  <a:srgbClr val="202B33"/>
-                </a:solidFill>
-                <a:latin typeface="Arial"/>
-                <a:ea typeface="Arial"/>
-                <a:cs typeface="Arial"/>
-              </a:rPr>
-              <a:t xml:space="preserve">combination, which nobody can check, but</a:t>
-            </a:r>
-            <a:endParaRPr lang="en-US" sz="1500"/>
-          </a:p>
-          <a:p>
-            <a:pPr marL="0" indent="0">
-              <a:lnSpc>
-                <a:spcPts val="1950"/>
-              </a:lnSpc>
-              <a:spcAft>
-                <a:spcPts val="0"/>
-              </a:spcAft>
-              <a:buNone/>
-            </a:pPr>
-            <a:r>
-              <a:rPr lang="en-US" sz="1500" b="0">
-                <a:solidFill>
-                  <a:srgbClr val="202B33"/>
-                </a:solidFill>
-                <a:latin typeface="Arial"/>
-                <a:ea typeface="Arial"/>
-                <a:cs typeface="Arial"/>
-              </a:rPr>
-              <a:t xml:space="preserve">many small ones you can afford to.</a:t>
+              <a:t xml:space="preserve">check. Many small ones you can afford to.</a:t>
             </a:r>
             <a:endParaRPr lang="en-US" sz="1500"/>
           </a:p>
